--- a/submission/presentation_group18.pptx
+++ b/submission/presentation_group18.pptx
@@ -1,23 +1,23 @@
 
 <file path=ppt/presentation.xml><?xml version="1.0" encoding="utf-8"?>
-<p:presentation xmlns:p="http://schemas.openxmlformats.org/presentationml/2006/main">
+<p:presentation xmlns:a="http://schemas.openxmlformats.org/drawingml/2006/main" xmlns:r="http://schemas.openxmlformats.org/officeDocument/2006/relationships" xmlns:p="http://schemas.openxmlformats.org/presentationml/2006/main">
   <p:sldMasterIdLst>
-    <p:sldMasterId xmlns:r="http://schemas.openxmlformats.org/officeDocument/2006/relationships" id="2147483648" r:id="R22aa04f787254129"/>
+    <p:sldMasterId id="2147483648" r:id="rId1"/>
   </p:sldMasterIdLst>
   <p:notesMasterIdLst>
-    <p:notesMasterId xmlns:r="http://schemas.openxmlformats.org/officeDocument/2006/relationships" r:id="Rcd58d2eee2474998"/>
+    <p:notesMasterId r:id="rId4"/>
   </p:notesMasterIdLst>
   <p:sldIdLst>
-    <p:sldId xmlns:r="http://schemas.openxmlformats.org/officeDocument/2006/relationships" id="256" r:id="Rfdf90ddd369f4309"/>
-    <p:sldId xmlns:r="http://schemas.openxmlformats.org/officeDocument/2006/relationships" id="257" r:id="Ra98d993b4eba4e68"/>
+    <p:sldId id="256" r:id="rId2"/>
+    <p:sldId id="257" r:id="rId3"/>
   </p:sldIdLst>
   <p:sldSz cx="12192000" cy="6858000"/>
   <p:notesSz cx="6858000" cy="9144000"/>
   <p:defaultTextStyle>
-    <a:defPPr xmlns:a="http://schemas.openxmlformats.org/drawingml/2006/main">
+    <a:defPPr>
       <a:defRPr lang="en-US"/>
     </a:defPPr>
-    <a:lvl1pPr xmlns:a="http://schemas.openxmlformats.org/drawingml/2006/main" marL="0" indent="0" algn="l" defTabSz="914400">
+    <a:lvl1pPr marL="0" indent="0" algn="l" defTabSz="914400">
       <a:defRPr sz="1800" kern="1200">
         <a:solidFill>
           <a:schemeClr val="tx1"/>
@@ -27,7 +27,7 @@
         <a:cs typeface="+mn-cs"/>
       </a:defRPr>
     </a:lvl1pPr>
-    <a:lvl2pPr xmlns:a="http://schemas.openxmlformats.org/drawingml/2006/main" marL="457200" indent="0" algn="l" defTabSz="914400">
+    <a:lvl2pPr marL="457200" indent="0" algn="l" defTabSz="914400">
       <a:defRPr sz="1800" kern="1200">
         <a:solidFill>
           <a:schemeClr val="tx1"/>
@@ -37,7 +37,7 @@
         <a:cs typeface="+mn-cs"/>
       </a:defRPr>
     </a:lvl2pPr>
-    <a:lvl3pPr xmlns:a="http://schemas.openxmlformats.org/drawingml/2006/main" marL="914400" indent="0" algn="l" defTabSz="914400">
+    <a:lvl3pPr marL="914400" indent="0" algn="l" defTabSz="914400">
       <a:defRPr sz="1800" kern="1200">
         <a:solidFill>
           <a:schemeClr val="tx1"/>
@@ -47,7 +47,7 @@
         <a:cs typeface="+mn-cs"/>
       </a:defRPr>
     </a:lvl3pPr>
-    <a:lvl4pPr xmlns:a="http://schemas.openxmlformats.org/drawingml/2006/main" marL="1371600" indent="0" algn="l" defTabSz="914400">
+    <a:lvl4pPr marL="1371600" indent="0" algn="l" defTabSz="914400">
       <a:defRPr sz="1800" kern="1200">
         <a:solidFill>
           <a:schemeClr val="tx1"/>
@@ -57,7 +57,7 @@
         <a:cs typeface="+mn-cs"/>
       </a:defRPr>
     </a:lvl4pPr>
-    <a:lvl5pPr xmlns:a="http://schemas.openxmlformats.org/drawingml/2006/main" marL="1828800" indent="0" algn="l" defTabSz="914400">
+    <a:lvl5pPr marL="1828800" indent="0" algn="l" defTabSz="914400">
       <a:defRPr sz="1800" kern="1200">
         <a:solidFill>
           <a:schemeClr val="tx1"/>
@@ -67,7 +67,7 @@
         <a:cs typeface="+mn-cs"/>
       </a:defRPr>
     </a:lvl5pPr>
-    <a:lvl6pPr xmlns:a="http://schemas.openxmlformats.org/drawingml/2006/main" marL="2286000" indent="0" algn="l" defTabSz="914400">
+    <a:lvl6pPr marL="2286000" indent="0" algn="l" defTabSz="914400">
       <a:defRPr sz="1800" kern="1200">
         <a:solidFill>
           <a:schemeClr val="tx1"/>
@@ -77,7 +77,7 @@
         <a:cs typeface="+mn-cs"/>
       </a:defRPr>
     </a:lvl6pPr>
-    <a:lvl7pPr xmlns:a="http://schemas.openxmlformats.org/drawingml/2006/main" marL="2743200" indent="0" algn="l" defTabSz="914400">
+    <a:lvl7pPr marL="2743200" indent="0" algn="l" defTabSz="914400">
       <a:defRPr sz="1800" kern="1200">
         <a:solidFill>
           <a:schemeClr val="tx1"/>
@@ -87,7 +87,7 @@
         <a:cs typeface="+mn-cs"/>
       </a:defRPr>
     </a:lvl7pPr>
-    <a:lvl8pPr xmlns:a="http://schemas.openxmlformats.org/drawingml/2006/main" marL="3200400" indent="0" algn="l" defTabSz="914400">
+    <a:lvl8pPr marL="3200400" indent="0" algn="l" defTabSz="914400">
       <a:defRPr sz="1800" kern="1200">
         <a:solidFill>
           <a:schemeClr val="tx1"/>
@@ -97,7 +97,7 @@
         <a:cs typeface="+mn-cs"/>
       </a:defRPr>
     </a:lvl8pPr>
-    <a:lvl9pPr xmlns:a="http://schemas.openxmlformats.org/drawingml/2006/main" marL="3657600" indent="0" algn="l" defTabSz="914400">
+    <a:lvl9pPr marL="3657600" indent="0" algn="l" defTabSz="914400">
       <a:defRPr sz="1800" kern="1200">
         <a:solidFill>
           <a:schemeClr val="tx1"/>
@@ -108,15 +108,20 @@
       </a:defRPr>
     </a:lvl9pPr>
   </p:defaultTextStyle>
+  <p:extLst>
+    <p:ext uri="{EFAFB233-063F-42B5-8137-9DF3F51BA10A}">
+      <p15:sldGuideLst xmlns:p15="http://schemas.microsoft.com/office/powerpoint/2012/main"/>
+    </p:ext>
+  </p:extLst>
 </p:presentation>
 </file>
 
 <file path=ppt/notesMasters/notesMaster1.xml><?xml version="1.0" encoding="utf-8"?>
-<p:notesMaster xmlns:p="http://schemas.openxmlformats.org/presentationml/2006/main">
+<p:notesMaster xmlns:a="http://schemas.openxmlformats.org/drawingml/2006/main" xmlns:r="http://schemas.openxmlformats.org/officeDocument/2006/relationships" xmlns:p="http://schemas.openxmlformats.org/presentationml/2006/main">
   <p:cSld>
     <p:bg>
       <p:bgRef idx="1001">
-        <a:schemeClr xmlns:a="http://schemas.openxmlformats.org/drawingml/2006/main" val="bg1"/>
+        <a:schemeClr val="bg1"/>
       </p:bgRef>
     </p:bg>
     <p:spTree>
@@ -126,280 +131,164 @@
         <p:nvPr/>
       </p:nvGrpSpPr>
       <p:grpSpPr>
-        <a:xfrm xmlns:a="http://schemas.openxmlformats.org/drawingml/2006/main"/>
+        <a:xfrm>
+          <a:off x="0" y="0"/>
+          <a:ext cx="0" cy="0"/>
+          <a:chOff x="0" y="0"/>
+          <a:chExt cx="0" cy="0"/>
+        </a:xfrm>
       </p:grpSpPr>
       <p:sp>
         <p:nvSpPr>
           <p:cNvPr id="2" name="Header Placeholder"/>
-          <p:cNvSpPr/>
+          <p:cNvSpPr>
+            <a:spLocks noGrp="1"/>
+          </p:cNvSpPr>
           <p:nvPr>
             <p:ph type="hdr" sz="quarter"/>
           </p:nvPr>
         </p:nvSpPr>
         <p:spPr>
-          <a:prstGeom xmlns:a="http://schemas.openxmlformats.org/drawingml/2006/main" prst="rect">
-            <a:avLst/>
-          </a:prstGeom>
-        </p:spPr>
-        <p:txBody>
-          <a:bodyPr xmlns:a="http://schemas.openxmlformats.org/drawingml/2006/main"/>
-          <a:lstStyle xmlns:a="http://schemas.openxmlformats.org/drawingml/2006/main"/>
-          <a:p xmlns:a="http://schemas.openxmlformats.org/drawingml/2006/main"/>
+          <a:prstGeom prst="rect">
+            <a:avLst/>
+          </a:prstGeom>
+        </p:spPr>
+        <p:txBody>
+          <a:bodyPr/>
+          <a:lstStyle/>
+          <a:p>
+            <a:endParaRPr/>
+          </a:p>
         </p:txBody>
       </p:sp>
       <p:sp>
         <p:nvSpPr>
           <p:cNvPr id="3" name="Date Placeholder"/>
-          <p:cNvSpPr/>
+          <p:cNvSpPr>
+            <a:spLocks noGrp="1"/>
+          </p:cNvSpPr>
           <p:nvPr>
             <p:ph type="dt" sz="quarter" idx="1"/>
           </p:nvPr>
         </p:nvSpPr>
         <p:spPr>
-          <a:prstGeom xmlns:a="http://schemas.openxmlformats.org/drawingml/2006/main" prst="rect">
-            <a:avLst/>
-          </a:prstGeom>
-        </p:spPr>
-        <p:txBody>
-          <a:bodyPr xmlns:a="http://schemas.openxmlformats.org/drawingml/2006/main"/>
-          <a:lstStyle xmlns:a="http://schemas.openxmlformats.org/drawingml/2006/main"/>
-          <a:p xmlns:a="http://schemas.openxmlformats.org/drawingml/2006/main"/>
+          <a:prstGeom prst="rect">
+            <a:avLst/>
+          </a:prstGeom>
+        </p:spPr>
+        <p:txBody>
+          <a:bodyPr/>
+          <a:lstStyle/>
+          <a:p>
+            <a:endParaRPr/>
+          </a:p>
         </p:txBody>
       </p:sp>
       <p:sp>
         <p:nvSpPr>
           <p:cNvPr id="4" name="Slide Image Placeholder"/>
-          <p:cNvSpPr/>
+          <p:cNvSpPr>
+            <a:spLocks noGrp="1" noRot="1" noChangeAspect="1"/>
+          </p:cNvSpPr>
           <p:nvPr>
             <p:ph type="sldImg" idx="2"/>
           </p:nvPr>
         </p:nvSpPr>
         <p:spPr>
-          <a:prstGeom xmlns:a="http://schemas.openxmlformats.org/drawingml/2006/main" prst="rect">
-            <a:avLst/>
-          </a:prstGeom>
-        </p:spPr>
-        <p:txBody>
-          <a:bodyPr xmlns:a="http://schemas.openxmlformats.org/drawingml/2006/main"/>
-          <a:lstStyle xmlns:a="http://schemas.openxmlformats.org/drawingml/2006/main"/>
-          <a:p xmlns:a="http://schemas.openxmlformats.org/drawingml/2006/main"/>
+          <a:prstGeom prst="rect">
+            <a:avLst/>
+          </a:prstGeom>
+        </p:spPr>
+        <p:txBody>
+          <a:bodyPr/>
+          <a:lstStyle/>
+          <a:p>
+            <a:endParaRPr/>
+          </a:p>
         </p:txBody>
       </p:sp>
       <p:sp>
         <p:nvSpPr>
           <p:cNvPr id="5" name="Notes Placeholder"/>
-          <p:cNvSpPr/>
+          <p:cNvSpPr>
+            <a:spLocks noGrp="1"/>
+          </p:cNvSpPr>
           <p:nvPr>
             <p:ph type="body" sz="quarter" idx="3"/>
           </p:nvPr>
         </p:nvSpPr>
         <p:spPr>
-          <a:prstGeom xmlns:a="http://schemas.openxmlformats.org/drawingml/2006/main" prst="rect">
-            <a:avLst/>
-          </a:prstGeom>
-        </p:spPr>
-        <p:txBody>
-          <a:bodyPr xmlns:a="http://schemas.openxmlformats.org/drawingml/2006/main"/>
-          <a:lstStyle xmlns:a="http://schemas.openxmlformats.org/drawingml/2006/main"/>
-          <a:p xmlns:a="http://schemas.openxmlformats.org/drawingml/2006/main"/>
+          <a:prstGeom prst="rect">
+            <a:avLst/>
+          </a:prstGeom>
+        </p:spPr>
+        <p:txBody>
+          <a:bodyPr/>
+          <a:lstStyle/>
+          <a:p>
+            <a:endParaRPr/>
+          </a:p>
         </p:txBody>
       </p:sp>
       <p:sp>
         <p:nvSpPr>
           <p:cNvPr id="6" name="Footer Placeholder"/>
-          <p:cNvSpPr/>
+          <p:cNvSpPr>
+            <a:spLocks noGrp="1"/>
+          </p:cNvSpPr>
           <p:nvPr>
             <p:ph type="ftr" sz="quarter" idx="4"/>
           </p:nvPr>
         </p:nvSpPr>
         <p:spPr>
-          <a:prstGeom xmlns:a="http://schemas.openxmlformats.org/drawingml/2006/main" prst="rect">
-            <a:avLst/>
-          </a:prstGeom>
-        </p:spPr>
-        <p:txBody>
-          <a:bodyPr xmlns:a="http://schemas.openxmlformats.org/drawingml/2006/main"/>
-          <a:lstStyle xmlns:a="http://schemas.openxmlformats.org/drawingml/2006/main"/>
-          <a:p xmlns:a="http://schemas.openxmlformats.org/drawingml/2006/main"/>
+          <a:prstGeom prst="rect">
+            <a:avLst/>
+          </a:prstGeom>
+        </p:spPr>
+        <p:txBody>
+          <a:bodyPr/>
+          <a:lstStyle/>
+          <a:p>
+            <a:endParaRPr/>
+          </a:p>
         </p:txBody>
       </p:sp>
       <p:sp>
         <p:nvSpPr>
           <p:cNvPr id="7" name="Slide Number Placeholder"/>
-          <p:cNvSpPr/>
+          <p:cNvSpPr>
+            <a:spLocks noGrp="1"/>
+          </p:cNvSpPr>
           <p:nvPr>
             <p:ph type="sldNum" sz="quarter" idx="5"/>
           </p:nvPr>
         </p:nvSpPr>
         <p:spPr>
-          <a:prstGeom xmlns:a="http://schemas.openxmlformats.org/drawingml/2006/main" prst="rect">
-            <a:avLst/>
-          </a:prstGeom>
-        </p:spPr>
-        <p:txBody>
-          <a:bodyPr xmlns:a="http://schemas.openxmlformats.org/drawingml/2006/main"/>
-          <a:lstStyle xmlns:a="http://schemas.openxmlformats.org/drawingml/2006/main"/>
-          <a:p xmlns:a="http://schemas.openxmlformats.org/drawingml/2006/main"/>
+          <a:prstGeom prst="rect">
+            <a:avLst/>
+          </a:prstGeom>
+        </p:spPr>
+        <p:txBody>
+          <a:bodyPr/>
+          <a:lstStyle/>
+          <a:p>
+            <a:endParaRPr/>
+          </a:p>
         </p:txBody>
       </p:sp>
     </p:spTree>
   </p:cSld>
   <p:clrMap bg1="lt1" tx1="dk1" bg2="lt2" tx2="dk2" accent1="accent1" accent2="accent2" accent3="accent3" accent4="accent4" accent5="accent5" accent6="accent6" hlink="hlink" folHlink="folHlink"/>
   <p:notesStyle>
-    <a:lvl1pPr xmlns:a="http://schemas.openxmlformats.org/drawingml/2006/main" marL="0" algn="l" defTabSz="914400" rtl="0" eaLnBrk="1" latinLnBrk="0" hangingPunct="1">
+    <a:lvl1pPr marL="0" algn="l" defTabSz="914400" rtl="0" eaLnBrk="1" latinLnBrk="0" hangingPunct="1">
       <a:defRPr sz="1200" kern="1200"/>
     </a:lvl1pPr>
   </p:notesStyle>
 </p:notesMaster>
 </file>
 
-<file path=ppt/notesMasters/theme/theme2.xml><?xml version="1.0" encoding="utf-8"?>
-<a:theme xmlns:a="http://schemas.openxmlformats.org/drawingml/2006/main" name="ChatGPT">
-  <a:themeElements>
-    <a:clrScheme name="ChatGPT">
-      <a:dk1>
-        <a:srgbClr val="000000"/>
-      </a:dk1>
-      <a:lt1>
-        <a:srgbClr val="FFFFFF"/>
-      </a:lt1>
-      <a:dk2>
-        <a:srgbClr val="0E2841"/>
-      </a:dk2>
-      <a:lt2>
-        <a:srgbClr val="E8E8E8"/>
-      </a:lt2>
-      <a:accent1>
-        <a:srgbClr val="156082"/>
-      </a:accent1>
-      <a:accent2>
-        <a:srgbClr val="E97132"/>
-      </a:accent2>
-      <a:accent3>
-        <a:srgbClr val="196B24"/>
-      </a:accent3>
-      <a:accent4>
-        <a:srgbClr val="0F9ED5"/>
-      </a:accent4>
-      <a:accent5>
-        <a:srgbClr val="A02B93"/>
-      </a:accent5>
-      <a:accent6>
-        <a:srgbClr val="4EA72E"/>
-      </a:accent6>
-      <a:hlink>
-        <a:srgbClr val="467886"/>
-      </a:hlink>
-      <a:folHlink>
-        <a:srgbClr val="96607D"/>
-      </a:folHlink>
-    </a:clrScheme>
-    <a:fontScheme name="Office">
-      <a:majorFont>
-        <a:latin typeface="Calibri Light"/>
-        <a:ea typeface="Calibri Light"/>
-        <a:cs typeface="Calibri Light"/>
-      </a:majorFont>
-      <a:minorFont>
-        <a:latin typeface="Calibri"/>
-        <a:ea typeface="Calibri"/>
-        <a:cs typeface="Calibri"/>
-      </a:minorFont>
-    </a:fontScheme>
-    <a:fmtScheme name="ChatGPT">
-      <a:fillStyleLst>
-        <a:solidFill>
-          <a:schemeClr val="phClr"/>
-        </a:solidFill>
-        <a:solidFill>
-          <a:schemeClr val="dk1"/>
-        </a:solidFill>
-        <a:solidFill>
-          <a:schemeClr val="accent1"/>
-        </a:solidFill>
-      </a:fillStyleLst>
-      <a:lnStyleLst>
-        <a:ln w="12700">
-          <a:solidFill>
-            <a:schemeClr val="phClr"/>
-          </a:solidFill>
-          <a:prstDash val="solid"/>
-        </a:ln>
-        <a:ln w="19050">
-          <a:solidFill>
-            <a:schemeClr val="phClr"/>
-          </a:solidFill>
-          <a:prstDash val="solid"/>
-        </a:ln>
-        <a:ln w="25400">
-          <a:solidFill>
-            <a:schemeClr val="phClr"/>
-          </a:solidFill>
-          <a:prstDash val="solid"/>
-        </a:ln>
-      </a:lnStyleLst>
-      <a:effectStyleLst>
-        <a:effectStyle>
-          <a:effectLst/>
-        </a:effectStyle>
-        <a:effectStyle>
-          <a:effectLst/>
-        </a:effectStyle>
-        <a:effectStyle>
-          <a:effectLst>
-            <a:outerShdw blurRad="57150" dist="19050" dir="5400000">
-              <a:srgbClr val="000000">
-                <a:alpha val="63000"/>
-              </a:srgbClr>
-            </a:outerShdw>
-          </a:effectLst>
-        </a:effectStyle>
-      </a:effectStyleLst>
-      <a:bgFillStyleLst>
-        <a:solidFill>
-          <a:schemeClr val="phClr"/>
-        </a:solidFill>
-        <a:solidFill>
-          <a:schemeClr val="phClr">
-            <a:tint val="95000"/>
-            <a:satMod val="170000"/>
-          </a:schemeClr>
-        </a:solidFill>
-        <a:gradFill>
-          <a:gsLst>
-            <a:gs pos="0">
-              <a:schemeClr val="phClr">
-                <a:tint val="93000"/>
-                <a:shade val="98000"/>
-                <a:lumMod val="102000"/>
-                <a:satMod val="150000"/>
-              </a:schemeClr>
-            </a:gs>
-            <a:gs pos="50000">
-              <a:schemeClr val="phClr">
-                <a:tint val="98000"/>
-                <a:shade val="90000"/>
-                <a:lumMod val="103000"/>
-                <a:satMod val="130000"/>
-              </a:schemeClr>
-            </a:gs>
-            <a:gs pos="100000">
-              <a:schemeClr val="phClr">
-                <a:shade val="63000"/>
-                <a:satMod val="120000"/>
-              </a:schemeClr>
-            </a:gs>
-          </a:gsLst>
-          <a:lin ang="5400000" scaled="0"/>
-        </a:gradFill>
-      </a:bgFillStyleLst>
-    </a:fmtScheme>
-  </a:themeElements>
-</a:theme>
-</file>
-
 <file path=ppt/notesSlides/notesSlide1.xml><?xml version="1.0" encoding="utf-8"?>
-<p:notes xmlns:p="http://schemas.openxmlformats.org/presentationml/2006/main">
+<p:notes xmlns:a="http://schemas.openxmlformats.org/drawingml/2006/main" xmlns:r="http://schemas.openxmlformats.org/officeDocument/2006/relationships" xmlns:p="http://schemas.openxmlformats.org/presentationml/2006/main">
   <p:cSld>
     <p:spTree>
       <p:nvGrpSpPr>
@@ -408,16 +297,21 @@
         <p:nvPr/>
       </p:nvGrpSpPr>
       <p:grpSpPr>
-        <a:xfrm xmlns:a="http://schemas.openxmlformats.org/drawingml/2006/main"/>
+        <a:xfrm>
+          <a:off x="0" y="0"/>
+          <a:ext cx="0" cy="0"/>
+          <a:chOff x="0" y="0"/>
+          <a:chExt cx="0" cy="0"/>
+        </a:xfrm>
       </p:grpSpPr>
       <p:sp>
         <p:nvSpPr>
           <p:cNvPr id="2" name="Slide Image Placeholder 1"/>
           <p:cNvSpPr>
-            <a:spLocks xmlns:a="http://schemas.openxmlformats.org/drawingml/2006/main" noGrp="1"/>
+            <a:spLocks noGrp="1" noRot="1" noChangeAspect="1"/>
           </p:cNvSpPr>
           <p:nvPr>
-            <p:ph type="sldImg" idx="0"/>
+            <p:ph type="sldImg"/>
           </p:nvPr>
         </p:nvSpPr>
         <p:spPr/>
@@ -426,7 +320,7 @@
         <p:nvSpPr>
           <p:cNvPr id="3" name="Notes Placeholder 2"/>
           <p:cNvSpPr>
-            <a:spLocks xmlns:a="http://schemas.openxmlformats.org/drawingml/2006/main" noGrp="1"/>
+            <a:spLocks noGrp="1"/>
           </p:cNvSpPr>
           <p:nvPr>
             <p:ph type="body" idx="1"/>
@@ -434,16 +328,20 @@
         </p:nvSpPr>
         <p:spPr/>
         <p:txBody>
-          <a:bodyPr xmlns:a="http://schemas.openxmlformats.org/drawingml/2006/main"/>
-          <a:lstStyle xmlns:a="http://schemas.openxmlformats.org/drawingml/2006/main"/>
-          <a:p xmlns:a="http://schemas.openxmlformats.org/drawingml/2006/main"/>
+          <a:bodyPr/>
+          <a:lstStyle/>
+          <a:p>
+            <a:r>
+              <a:t>Use this slide to explain method, not results. Start with direct horizons, then the required model families. For features, emphasize target-hour calendar/weather and BikeCount lags. Clarify that target-hour weather is an assumption, while BikeCount remains leakage-safe. Validation is rolling-origin CV; the 61-day holdout is only a control.</a:t>
+            </a:r>
+          </a:p>
         </p:txBody>
       </p:sp>
       <p:sp>
         <p:nvSpPr>
           <p:cNvPr id="4" name="Slide Number Placeholder 3"/>
           <p:cNvSpPr>
-            <a:spLocks xmlns:a="http://schemas.openxmlformats.org/drawingml/2006/main" noGrp="1"/>
+            <a:spLocks noGrp="1"/>
           </p:cNvSpPr>
           <p:nvPr>
             <p:ph type="sldNum" idx="5"/>
@@ -451,21 +349,23 @@
         </p:nvSpPr>
         <p:spPr/>
         <p:txBody>
-          <a:bodyPr xmlns:a="http://schemas.openxmlformats.org/drawingml/2006/main"/>
-          <a:lstStyle xmlns:a="http://schemas.openxmlformats.org/drawingml/2006/main"/>
-          <a:p xmlns:a="http://schemas.openxmlformats.org/drawingml/2006/main"/>
+          <a:bodyPr/>
+          <a:lstStyle/>
+          <a:p>
+            <a:endParaRPr/>
+          </a:p>
         </p:txBody>
       </p:sp>
     </p:spTree>
   </p:cSld>
   <p:clrMapOvr>
-    <a:masterClrMapping xmlns:a="http://schemas.openxmlformats.org/drawingml/2006/main"/>
+    <a:masterClrMapping/>
   </p:clrMapOvr>
 </p:notes>
 </file>
 
 <file path=ppt/notesSlides/notesSlide2.xml><?xml version="1.0" encoding="utf-8"?>
-<p:notes xmlns:p="http://schemas.openxmlformats.org/presentationml/2006/main">
+<p:notes xmlns:a="http://schemas.openxmlformats.org/drawingml/2006/main" xmlns:r="http://schemas.openxmlformats.org/officeDocument/2006/relationships" xmlns:p="http://schemas.openxmlformats.org/presentationml/2006/main">
   <p:cSld>
     <p:spTree>
       <p:nvGrpSpPr>
@@ -474,16 +374,21 @@
         <p:nvPr/>
       </p:nvGrpSpPr>
       <p:grpSpPr>
-        <a:xfrm xmlns:a="http://schemas.openxmlformats.org/drawingml/2006/main"/>
+        <a:xfrm>
+          <a:off x="0" y="0"/>
+          <a:ext cx="0" cy="0"/>
+          <a:chOff x="0" y="0"/>
+          <a:chExt cx="0" cy="0"/>
+        </a:xfrm>
       </p:grpSpPr>
       <p:sp>
         <p:nvSpPr>
           <p:cNvPr id="2" name="Slide Image Placeholder 1"/>
           <p:cNvSpPr>
-            <a:spLocks xmlns:a="http://schemas.openxmlformats.org/drawingml/2006/main" noGrp="1"/>
+            <a:spLocks noGrp="1" noRot="1" noChangeAspect="1"/>
           </p:cNvSpPr>
           <p:nvPr>
-            <p:ph type="sldImg" idx="0"/>
+            <p:ph type="sldImg"/>
           </p:nvPr>
         </p:nvSpPr>
         <p:spPr/>
@@ -492,7 +397,7 @@
         <p:nvSpPr>
           <p:cNvPr id="3" name="Notes Placeholder 2"/>
           <p:cNvSpPr>
-            <a:spLocks xmlns:a="http://schemas.openxmlformats.org/drawingml/2006/main" noGrp="1"/>
+            <a:spLocks noGrp="1"/>
           </p:cNvSpPr>
           <p:nvPr>
             <p:ph type="body" idx="1"/>
@@ -500,16 +405,20 @@
         </p:nvSpPr>
         <p:spPr/>
         <p:txBody>
-          <a:bodyPr xmlns:a="http://schemas.openxmlformats.org/drawingml/2006/main"/>
-          <a:lstStyle xmlns:a="http://schemas.openxmlformats.org/drawingml/2006/main"/>
-          <a:p xmlns:a="http://schemas.openxmlformats.org/drawingml/2006/main"/>
+          <a:bodyPr/>
+          <a:lstStyle/>
+          <a:p>
+            <a:r>
+              <a:t>Explain this as a funnel, not as unrelated XGBoost rows. We first compared naive baselines and required model families. XGBoost won the initial comparison, so we checked variants. Rolling-origin CV selects XGBoost tuned for +1h and +24h; log1p won the recent holdout but was noisier across the year.</a:t>
+            </a:r>
+          </a:p>
         </p:txBody>
       </p:sp>
       <p:sp>
         <p:nvSpPr>
           <p:cNvPr id="4" name="Slide Number Placeholder 3"/>
           <p:cNvSpPr>
-            <a:spLocks xmlns:a="http://schemas.openxmlformats.org/drawingml/2006/main" noGrp="1"/>
+            <a:spLocks noGrp="1"/>
           </p:cNvSpPr>
           <p:nvPr>
             <p:ph type="sldNum" idx="5"/>
@@ -517,21 +426,23 @@
         </p:nvSpPr>
         <p:spPr/>
         <p:txBody>
-          <a:bodyPr xmlns:a="http://schemas.openxmlformats.org/drawingml/2006/main"/>
-          <a:lstStyle xmlns:a="http://schemas.openxmlformats.org/drawingml/2006/main"/>
-          <a:p xmlns:a="http://schemas.openxmlformats.org/drawingml/2006/main"/>
+          <a:bodyPr/>
+          <a:lstStyle/>
+          <a:p>
+            <a:endParaRPr/>
+          </a:p>
         </p:txBody>
       </p:sp>
     </p:spTree>
   </p:cSld>
   <p:clrMapOvr>
-    <a:masterClrMapping xmlns:a="http://schemas.openxmlformats.org/drawingml/2006/main"/>
+    <a:masterClrMapping/>
   </p:clrMapOvr>
 </p:notes>
 </file>
 
-<file path=ppt/slideLayouts/slideLayout2.xml><?xml version="1.0" encoding="utf-8"?>
-<p:sldLayout xmlns:p="http://schemas.openxmlformats.org/presentationml/2006/main" type="title">
+<file path=ppt/slideLayouts/slideLayout1.xml><?xml version="1.0" encoding="utf-8"?>
+<p:sldLayout xmlns:a="http://schemas.openxmlformats.org/drawingml/2006/main" xmlns:r="http://schemas.openxmlformats.org/officeDocument/2006/relationships" xmlns:p="http://schemas.openxmlformats.org/presentationml/2006/main" type="title">
   <p:cSld name="Title Slide">
     <p:spTree>
       <p:nvGrpSpPr>
@@ -540,62 +451,73 @@
         <p:nvPr/>
       </p:nvGrpSpPr>
       <p:grpSpPr>
-        <a:xfrm xmlns:a="http://schemas.openxmlformats.org/drawingml/2006/main"/>
+        <a:xfrm>
+          <a:off x="0" y="0"/>
+          <a:ext cx="0" cy="0"/>
+          <a:chOff x="0" y="0"/>
+          <a:chExt cx="0" cy="0"/>
+        </a:xfrm>
       </p:grpSpPr>
       <p:sp>
         <p:nvSpPr>
-          <p:cNvPr id="1" name="Title 1">
-            <a:extLst xmlns:a="http://schemas.openxmlformats.org/drawingml/2006/main">
-              <a:ext uri="{FF2B5EF4-FFF2-40B4-BE49-F238E27FC236}">
-                <a16:creationId xmlns:a16="http://schemas.microsoft.com/office/drawing/2014/main" id="{7BFBEC45-B7A0-45B0-9B9C-A577EBFDD647}"/>
-              </a:ext>
-            </a:extLst>
-          </p:cNvPr>
-          <p:cNvSpPr/>
+          <p:cNvPr id="6" name="Title 1">
+            <a:extLst>
+              <a:ext uri="{FF2B5EF4-FFF2-40B4-BE49-F238E27FC236}">
+                <a16:creationId xmlns:a16="http://schemas.microsoft.com/office/drawing/2014/main" id="{9282DCA4-A682-4D99-9238-9EE0B2C96102}"/>
+              </a:ext>
+            </a:extLst>
+          </p:cNvPr>
+          <p:cNvSpPr>
+            <a:spLocks noGrp="1"/>
+          </p:cNvSpPr>
           <p:nvPr>
-            <p:ph type="ctrTitle" idx="0"/>
+            <p:ph type="ctrTitle"/>
           </p:nvPr>
         </p:nvSpPr>
         <p:spPr>
-          <a:xfrm xmlns:a="http://schemas.openxmlformats.org/drawingml/2006/main">
+          <a:xfrm>
             <a:off x="1524000" y="1122363"/>
             <a:ext cx="9144000" cy="2387600"/>
           </a:xfrm>
         </p:spPr>
         <p:txBody>
-          <a:bodyPr xmlns:a="http://schemas.openxmlformats.org/drawingml/2006/main" anchor="b"/>
-          <a:lstStyle xmlns:a="http://schemas.openxmlformats.org/drawingml/2006/main">
+          <a:bodyPr anchor="b"/>
+          <a:lstStyle>
             <a:lvl1pPr algn="ctr">
               <a:buNone/>
               <a:defRPr sz="6000"/>
             </a:lvl1pPr>
           </a:lstStyle>
-          <a:p xmlns:a="http://schemas.openxmlformats.org/drawingml/2006/main"/>
+          <a:p>
+            <a:endParaRPr/>
+          </a:p>
         </p:txBody>
       </p:sp>
       <p:sp>
         <p:nvSpPr>
           <p:cNvPr id="2" name="Subtitle 2">
-            <a:extLst xmlns:a="http://schemas.openxmlformats.org/drawingml/2006/main">
-              <a:ext uri="{FF2B5EF4-FFF2-40B4-BE49-F238E27FC236}">
-                <a16:creationId xmlns:a16="http://schemas.microsoft.com/office/drawing/2014/main" id="{659479CA-555D-470B-9526-44E9CE59D853}"/>
-              </a:ext>
-            </a:extLst>
-          </p:cNvPr>
-          <p:cNvSpPr/>
+            <a:extLst>
+              <a:ext uri="{FF2B5EF4-FFF2-40B4-BE49-F238E27FC236}">
+                <a16:creationId xmlns:a16="http://schemas.microsoft.com/office/drawing/2014/main" id="{D5F84356-7333-470C-B037-16128CA12FE8}"/>
+              </a:ext>
+            </a:extLst>
+          </p:cNvPr>
+          <p:cNvSpPr>
+            <a:spLocks noGrp="1"/>
+          </p:cNvSpPr>
           <p:nvPr>
             <p:ph type="subTitle" idx="1"/>
           </p:nvPr>
         </p:nvSpPr>
         <p:spPr>
-          <a:xfrm xmlns:a="http://schemas.openxmlformats.org/drawingml/2006/main">
+          <a:xfrm>
             <a:off x="1524000" y="3602038"/>
             <a:ext cx="9144000" cy="1655762"/>
           </a:xfrm>
         </p:spPr>
         <p:txBody>
-          <a:bodyPr xmlns:a="http://schemas.openxmlformats.org/drawingml/2006/main"/>
-          <a:lstStyle xmlns:a="http://schemas.openxmlformats.org/drawingml/2006/main">
+          <a:bodyPr/>
+          <a:lstStyle>
             <a:lvl1pPr marL="0" indent="0" algn="ctr">
               <a:buNone/>
               <a:defRPr sz="2400"/>
@@ -633,83 +555,100 @@
               <a:defRPr sz="1600"/>
             </a:lvl9pPr>
           </a:lstStyle>
-          <a:p xmlns:a="http://schemas.openxmlformats.org/drawingml/2006/main"/>
+          <a:p>
+            <a:endParaRPr/>
+          </a:p>
         </p:txBody>
       </p:sp>
       <p:sp>
         <p:nvSpPr>
           <p:cNvPr id="3" name="Date Placeholder 3">
-            <a:extLst xmlns:a="http://schemas.openxmlformats.org/drawingml/2006/main">
-              <a:ext uri="{FF2B5EF4-FFF2-40B4-BE49-F238E27FC236}">
-                <a16:creationId xmlns:a16="http://schemas.microsoft.com/office/drawing/2014/main" id="{2282B1D4-1558-4C3D-B43D-EAFC3D4FCADE}"/>
-              </a:ext>
-            </a:extLst>
-          </p:cNvPr>
-          <p:cNvSpPr/>
+            <a:extLst>
+              <a:ext uri="{FF2B5EF4-FFF2-40B4-BE49-F238E27FC236}">
+                <a16:creationId xmlns:a16="http://schemas.microsoft.com/office/drawing/2014/main" id="{1B7A1C82-9AB8-4368-89B4-97D1831273D4}"/>
+              </a:ext>
+            </a:extLst>
+          </p:cNvPr>
+          <p:cNvSpPr>
+            <a:spLocks noGrp="1"/>
+          </p:cNvSpPr>
           <p:nvPr>
             <p:ph type="dt" idx="10"/>
           </p:nvPr>
         </p:nvSpPr>
         <p:spPr/>
         <p:txBody>
-          <a:bodyPr xmlns:a="http://schemas.openxmlformats.org/drawingml/2006/main"/>
-          <a:lstStyle xmlns:a="http://schemas.openxmlformats.org/drawingml/2006/main"/>
-          <a:p xmlns:a="http://schemas.openxmlformats.org/drawingml/2006/main"/>
+          <a:bodyPr/>
+          <a:lstStyle/>
+          <a:p>
+            <a:endParaRPr/>
+          </a:p>
         </p:txBody>
       </p:sp>
       <p:sp>
         <p:nvSpPr>
           <p:cNvPr id="4" name="Footer Placeholder 4">
-            <a:extLst xmlns:a="http://schemas.openxmlformats.org/drawingml/2006/main">
-              <a:ext uri="{FF2B5EF4-FFF2-40B4-BE49-F238E27FC236}">
-                <a16:creationId xmlns:a16="http://schemas.microsoft.com/office/drawing/2014/main" id="{3614EC94-7323-4501-B097-48796960C2A4}"/>
-              </a:ext>
-            </a:extLst>
-          </p:cNvPr>
-          <p:cNvSpPr/>
+            <a:extLst>
+              <a:ext uri="{FF2B5EF4-FFF2-40B4-BE49-F238E27FC236}">
+                <a16:creationId xmlns:a16="http://schemas.microsoft.com/office/drawing/2014/main" id="{600A4FCD-8EB6-45D1-B536-6418DF55471F}"/>
+              </a:ext>
+            </a:extLst>
+          </p:cNvPr>
+          <p:cNvSpPr>
+            <a:spLocks noGrp="1"/>
+          </p:cNvSpPr>
           <p:nvPr>
             <p:ph type="ftr" idx="11"/>
           </p:nvPr>
         </p:nvSpPr>
         <p:spPr/>
         <p:txBody>
-          <a:bodyPr xmlns:a="http://schemas.openxmlformats.org/drawingml/2006/main"/>
-          <a:lstStyle xmlns:a="http://schemas.openxmlformats.org/drawingml/2006/main"/>
-          <a:p xmlns:a="http://schemas.openxmlformats.org/drawingml/2006/main"/>
+          <a:bodyPr/>
+          <a:lstStyle/>
+          <a:p>
+            <a:endParaRPr/>
+          </a:p>
         </p:txBody>
       </p:sp>
       <p:sp>
         <p:nvSpPr>
           <p:cNvPr id="5" name="Slide Number Placeholder 5">
-            <a:extLst xmlns:a="http://schemas.openxmlformats.org/drawingml/2006/main">
-              <a:ext uri="{FF2B5EF4-FFF2-40B4-BE49-F238E27FC236}">
-                <a16:creationId xmlns:a16="http://schemas.microsoft.com/office/drawing/2014/main" id="{EAF96064-9C18-412C-9CCF-EEE58A2F07D2}"/>
-              </a:ext>
-            </a:extLst>
-          </p:cNvPr>
-          <p:cNvSpPr/>
+            <a:extLst>
+              <a:ext uri="{FF2B5EF4-FFF2-40B4-BE49-F238E27FC236}">
+                <a16:creationId xmlns:a16="http://schemas.microsoft.com/office/drawing/2014/main" id="{40ECF421-98D8-466C-A4A9-37C9CBAACE13}"/>
+              </a:ext>
+            </a:extLst>
+          </p:cNvPr>
+          <p:cNvSpPr>
+            <a:spLocks noGrp="1"/>
+          </p:cNvSpPr>
           <p:nvPr>
             <p:ph type="sldNum" idx="12"/>
           </p:nvPr>
         </p:nvSpPr>
         <p:spPr/>
         <p:txBody>
-          <a:bodyPr xmlns:a="http://schemas.openxmlformats.org/drawingml/2006/main"/>
-          <a:lstStyle xmlns:a="http://schemas.openxmlformats.org/drawingml/2006/main"/>
-          <a:p xmlns:a="http://schemas.openxmlformats.org/drawingml/2006/main"/>
+          <a:bodyPr/>
+          <a:lstStyle/>
+          <a:p>
+            <a:endParaRPr/>
+          </a:p>
         </p:txBody>
       </p:sp>
     </p:spTree>
   </p:cSld>
+  <p:clrMapOvr>
+    <a:masterClrMapping/>
+  </p:clrMapOvr>
 </p:sldLayout>
 </file>
 
 <file path=ppt/slideMasters/slideMaster1.xml><?xml version="1.0" encoding="utf-8"?>
-<p:sldMaster xmlns:p="http://schemas.openxmlformats.org/presentationml/2006/main">
+<p:sldMaster xmlns:a="http://schemas.openxmlformats.org/drawingml/2006/main" xmlns:r="http://schemas.openxmlformats.org/officeDocument/2006/relationships" xmlns:p="http://schemas.openxmlformats.org/presentationml/2006/main">
   <p:cSld name="Master">
     <p:bg>
       <p:bgRef idx="1001">
-        <a:schemeClr xmlns:a="http://schemas.openxmlformats.org/drawingml/2006/main" val="bg1"/>
+        <a:schemeClr val="bg1"/>
       </p:bgRef>
     </p:bg>
     <p:spTree>
@@ -719,34 +658,41 @@
         <p:nvPr/>
       </p:nvGrpSpPr>
       <p:grpSpPr>
-        <a:xfrm xmlns:a="http://schemas.openxmlformats.org/drawingml/2006/main"/>
+        <a:xfrm>
+          <a:off x="0" y="0"/>
+          <a:ext cx="0" cy="0"/>
+          <a:chOff x="0" y="0"/>
+          <a:chExt cx="0" cy="0"/>
+        </a:xfrm>
       </p:grpSpPr>
       <p:sp>
         <p:nvSpPr>
-          <p:cNvPr id="1" name="Slide Number Placeholder 5">
-            <a:extLst xmlns:a="http://schemas.openxmlformats.org/drawingml/2006/main">
-              <a:ext uri="{FF2B5EF4-FFF2-40B4-BE49-F238E27FC236}">
-                <a16:creationId xmlns:a16="http://schemas.microsoft.com/office/drawing/2014/main" id="{85D7C009-8784-47B6-8718-2EDA680679DB}"/>
-              </a:ext>
-            </a:extLst>
-          </p:cNvPr>
-          <p:cNvSpPr/>
+          <p:cNvPr id="2" name="Slide Number Placeholder 5">
+            <a:extLst>
+              <a:ext uri="{FF2B5EF4-FFF2-40B4-BE49-F238E27FC236}">
+                <a16:creationId xmlns:a16="http://schemas.microsoft.com/office/drawing/2014/main" id="{E7C2C053-82A8-4DFE-A276-527C2B6653A0}"/>
+              </a:ext>
+            </a:extLst>
+          </p:cNvPr>
+          <p:cNvSpPr>
+            <a:spLocks noGrp="1"/>
+          </p:cNvSpPr>
           <p:nvPr>
             <p:ph type="sldNum" idx="4"/>
           </p:nvPr>
         </p:nvSpPr>
         <p:spPr>
-          <a:xfrm xmlns:a="http://schemas.openxmlformats.org/drawingml/2006/main">
+          <a:xfrm>
             <a:off x="8610600" y="6356350"/>
             <a:ext cx="2743200" cy="365125"/>
           </a:xfrm>
-          <a:prstGeom xmlns:a="http://schemas.openxmlformats.org/drawingml/2006/main" prst="rect">
-            <a:avLst/>
-          </a:prstGeom>
-        </p:spPr>
-        <p:txBody>
-          <a:bodyPr xmlns:a="http://schemas.openxmlformats.org/drawingml/2006/main" vert="horz" lIns="91440" tIns="45720" rIns="91440" bIns="45720" anchor="ctr"/>
-          <a:lstStyle xmlns:a="http://schemas.openxmlformats.org/drawingml/2006/main">
+          <a:prstGeom prst="rect">
+            <a:avLst/>
+          </a:prstGeom>
+        </p:spPr>
+        <p:txBody>
+          <a:bodyPr vert="horz" lIns="91440" tIns="45720" rIns="91440" bIns="45720" anchor="ctr"/>
+          <a:lstStyle>
             <a:lvl1pPr algn="r">
               <a:buNone/>
               <a:defRPr sz="1200">
@@ -758,18 +704,20 @@
               </a:defRPr>
             </a:lvl1pPr>
           </a:lstStyle>
-          <a:p xmlns:a="http://schemas.openxmlformats.org/drawingml/2006/main"/>
+          <a:p>
+            <a:endParaRPr/>
+          </a:p>
         </p:txBody>
       </p:sp>
     </p:spTree>
   </p:cSld>
   <p:clrMap bg1="lt1" tx1="dk1" bg2="lt2" tx2="dk2" accent1="accent1" accent2="accent2" accent3="accent3" accent4="accent4" accent5="accent5" accent6="accent6" hlink="hlink" folHlink="folHlink"/>
   <p:sldLayoutIdLst>
-    <p:sldLayoutId xmlns:r="http://schemas.openxmlformats.org/officeDocument/2006/relationships" id="2147483649" r:id="Rcf29526a5aeb4f94"/>
+    <p:sldLayoutId id="2147483649" r:id="rId1"/>
   </p:sldLayoutIdLst>
   <p:txStyles>
     <p:titleStyle>
-      <a:lvl1pPr xmlns:a="http://schemas.openxmlformats.org/drawingml/2006/main" algn="l">
+      <a:lvl1pPr algn="l">
         <a:lnSpc>
           <a:spcPct val="90000"/>
         </a:lnSpc>
@@ -788,7 +736,7 @@
       </a:lvl1pPr>
     </p:titleStyle>
     <p:bodyStyle>
-      <a:lvl1pPr xmlns:a="http://schemas.openxmlformats.org/drawingml/2006/main" marL="228600" indent="-228600" algn="l">
+      <a:lvl1pPr marL="228600" indent="-228600" algn="l">
         <a:lnSpc>
           <a:spcPct val="90000"/>
         </a:lnSpc>
@@ -805,7 +753,7 @@
           <a:cs typeface="+mn-lt"/>
         </a:defRPr>
       </a:lvl1pPr>
-      <a:lvl2pPr xmlns:a="http://schemas.openxmlformats.org/drawingml/2006/main" marL="685800" indent="-228600" algn="l">
+      <a:lvl2pPr marL="685800" indent="-228600" algn="l">
         <a:lnSpc>
           <a:spcPct val="90000"/>
         </a:lnSpc>
@@ -822,7 +770,7 @@
           <a:cs typeface="+mn-lt"/>
         </a:defRPr>
       </a:lvl2pPr>
-      <a:lvl3pPr xmlns:a="http://schemas.openxmlformats.org/drawingml/2006/main" marL="1143000" indent="-228600" algn="l">
+      <a:lvl3pPr marL="1143000" indent="-228600" algn="l">
         <a:lnSpc>
           <a:spcPct val="90000"/>
         </a:lnSpc>
@@ -839,7 +787,7 @@
           <a:cs typeface="+mn-lt"/>
         </a:defRPr>
       </a:lvl3pPr>
-      <a:lvl4pPr xmlns:a="http://schemas.openxmlformats.org/drawingml/2006/main" marL="1600200" indent="-228600" algn="l">
+      <a:lvl4pPr marL="1600200" indent="-228600" algn="l">
         <a:lnSpc>
           <a:spcPct val="90000"/>
         </a:lnSpc>
@@ -856,7 +804,7 @@
           <a:cs typeface="+mn-lt"/>
         </a:defRPr>
       </a:lvl4pPr>
-      <a:lvl5pPr xmlns:a="http://schemas.openxmlformats.org/drawingml/2006/main" marL="2057400" indent="-228600" algn="l">
+      <a:lvl5pPr marL="2057400" indent="-228600" algn="l">
         <a:lnSpc>
           <a:spcPct val="90000"/>
         </a:lnSpc>
@@ -873,7 +821,7 @@
           <a:cs typeface="+mn-lt"/>
         </a:defRPr>
       </a:lvl5pPr>
-      <a:lvl6pPr xmlns:a="http://schemas.openxmlformats.org/drawingml/2006/main" marL="2514600" indent="-228600" algn="l">
+      <a:lvl6pPr marL="2514600" indent="-228600" algn="l">
         <a:lnSpc>
           <a:spcPct val="90000"/>
         </a:lnSpc>
@@ -890,7 +838,7 @@
           <a:cs typeface="+mn-lt"/>
         </a:defRPr>
       </a:lvl6pPr>
-      <a:lvl7pPr xmlns:a="http://schemas.openxmlformats.org/drawingml/2006/main" marL="2971800" indent="-228600" algn="l">
+      <a:lvl7pPr marL="2971800" indent="-228600" algn="l">
         <a:lnSpc>
           <a:spcPct val="90000"/>
         </a:lnSpc>
@@ -907,7 +855,7 @@
           <a:cs typeface="+mn-lt"/>
         </a:defRPr>
       </a:lvl7pPr>
-      <a:lvl8pPr xmlns:a="http://schemas.openxmlformats.org/drawingml/2006/main" marL="3429000" indent="-228600" algn="l">
+      <a:lvl8pPr marL="3429000" indent="-228600" algn="l">
         <a:lnSpc>
           <a:spcPct val="90000"/>
         </a:lnSpc>
@@ -924,7 +872,7 @@
           <a:cs typeface="+mn-lt"/>
         </a:defRPr>
       </a:lvl8pPr>
-      <a:lvl9pPr xmlns:a="http://schemas.openxmlformats.org/drawingml/2006/main" marL="3886200" indent="-228600" algn="l">
+      <a:lvl9pPr marL="3886200" indent="-228600" algn="l">
         <a:lnSpc>
           <a:spcPct val="90000"/>
         </a:lnSpc>
@@ -943,7 +891,7 @@
       </a:lvl9pPr>
     </p:bodyStyle>
     <p:otherStyle>
-      <a:lvl1pPr xmlns:a="http://schemas.openxmlformats.org/drawingml/2006/main" marL="0" algn="l">
+      <a:lvl1pPr marL="0" algn="l">
         <a:buNone/>
         <a:defRPr sz="1800">
           <a:solidFill>
@@ -954,7 +902,7 @@
           <a:cs typeface="+mn-lt"/>
         </a:defRPr>
       </a:lvl1pPr>
-      <a:lvl2pPr xmlns:a="http://schemas.openxmlformats.org/drawingml/2006/main" marL="457200" algn="l">
+      <a:lvl2pPr marL="457200" algn="l">
         <a:buNone/>
         <a:defRPr sz="1800">
           <a:solidFill>
@@ -965,7 +913,7 @@
           <a:cs typeface="+mn-lt"/>
         </a:defRPr>
       </a:lvl2pPr>
-      <a:lvl3pPr xmlns:a="http://schemas.openxmlformats.org/drawingml/2006/main" marL="914400" algn="l">
+      <a:lvl3pPr marL="914400" algn="l">
         <a:buNone/>
         <a:defRPr sz="1800">
           <a:solidFill>
@@ -976,7 +924,7 @@
           <a:cs typeface="+mn-lt"/>
         </a:defRPr>
       </a:lvl3pPr>
-      <a:lvl4pPr xmlns:a="http://schemas.openxmlformats.org/drawingml/2006/main" marL="1371600" algn="l">
+      <a:lvl4pPr marL="1371600" algn="l">
         <a:buNone/>
         <a:defRPr sz="1800">
           <a:solidFill>
@@ -987,7 +935,7 @@
           <a:cs typeface="+mn-lt"/>
         </a:defRPr>
       </a:lvl4pPr>
-      <a:lvl5pPr xmlns:a="http://schemas.openxmlformats.org/drawingml/2006/main" marL="1828800" algn="l">
+      <a:lvl5pPr marL="1828800" algn="l">
         <a:buNone/>
         <a:defRPr sz="1800">
           <a:solidFill>
@@ -998,7 +946,7 @@
           <a:cs typeface="+mn-lt"/>
         </a:defRPr>
       </a:lvl5pPr>
-      <a:lvl6pPr xmlns:a="http://schemas.openxmlformats.org/drawingml/2006/main" marL="2286000" algn="l">
+      <a:lvl6pPr marL="2286000" algn="l">
         <a:buNone/>
         <a:defRPr sz="1800">
           <a:solidFill>
@@ -1009,7 +957,7 @@
           <a:cs typeface="+mn-lt"/>
         </a:defRPr>
       </a:lvl6pPr>
-      <a:lvl7pPr xmlns:a="http://schemas.openxmlformats.org/drawingml/2006/main" marL="2743200" algn="l">
+      <a:lvl7pPr marL="2743200" algn="l">
         <a:buNone/>
         <a:defRPr sz="1800">
           <a:solidFill>
@@ -1020,7 +968,7 @@
           <a:cs typeface="+mn-lt"/>
         </a:defRPr>
       </a:lvl7pPr>
-      <a:lvl8pPr xmlns:a="http://schemas.openxmlformats.org/drawingml/2006/main" marL="3200400" algn="l">
+      <a:lvl8pPr marL="3200400" algn="l">
         <a:buNone/>
         <a:defRPr sz="1800">
           <a:solidFill>
@@ -1031,7 +979,7 @@
           <a:cs typeface="+mn-lt"/>
         </a:defRPr>
       </a:lvl8pPr>
-      <a:lvl9pPr xmlns:a="http://schemas.openxmlformats.org/drawingml/2006/main" marL="3657600" algn="l">
+      <a:lvl9pPr marL="3657600" algn="l">
         <a:buNone/>
         <a:defRPr sz="1800">
           <a:solidFill>
@@ -1048,13 +996,14 @@
 </file>
 
 <file path=ppt/slides/slide1.xml><?xml version="1.0" encoding="utf-8"?>
-<p:sld xmlns:p="http://schemas.openxmlformats.org/presentationml/2006/main">
+<p:sld xmlns:a="http://schemas.openxmlformats.org/drawingml/2006/main" xmlns:r="http://schemas.openxmlformats.org/officeDocument/2006/relationships" xmlns:p="http://schemas.openxmlformats.org/presentationml/2006/main">
   <p:cSld>
     <p:bg>
       <p:bgPr>
-        <a:solidFill xmlns:a="http://schemas.openxmlformats.org/drawingml/2006/main">
+        <a:solidFill>
           <a:srgbClr val="FFFFFF"/>
         </a:solidFill>
+        <a:effectLst/>
       </p:bgPr>
     </p:bg>
     <p:spTree>
@@ -1064,83 +1013,2967 @@
         <p:nvPr/>
       </p:nvGrpSpPr>
       <p:grpSpPr>
-        <a:xfrm xmlns:a="http://schemas.openxmlformats.org/drawingml/2006/main"/>
+        <a:xfrm>
+          <a:off x="0" y="0"/>
+          <a:ext cx="0" cy="0"/>
+          <a:chOff x="0" y="0"/>
+          <a:chExt cx="0" cy="0"/>
+        </a:xfrm>
       </p:grpSpPr>
-      <p:sp>
-        <p:nvSpPr>
-          <p:cNvPr id="1" name="Slide Number Placeholder 5">
-            <a:extLst xmlns:a="http://schemas.openxmlformats.org/drawingml/2006/main">
-              <a:ext uri="{FF2B5EF4-FFF2-40B4-BE49-F238E27FC236}">
-                <a16:creationId xmlns:a16="http://schemas.microsoft.com/office/drawing/2014/main" id="{EAF96064-9C18-412C-9CCF-EEE58A2F07D2}"/>
-              </a:ext>
-            </a:extLst>
-          </p:cNvPr>
-          <p:cNvSpPr>
-            <a:spLocks xmlns:a="http://schemas.openxmlformats.org/drawingml/2006/main" noGrp="1"/>
-          </p:cNvSpPr>
-          <p:nvPr>
-            <p:ph type="sldNum" idx="12"/>
-          </p:nvPr>
-        </p:nvSpPr>
-        <p:spPr>
-          <a:xfrm xmlns:a="http://schemas.openxmlformats.org/drawingml/2006/main">
-            <a:off x="1524000" y="1122363"/>
-            <a:ext cx="9144000" cy="2387600"/>
-          </a:xfrm>
-        </p:spPr>
-        <p:txBody>
-          <a:bodyPr xmlns:a="http://schemas.openxmlformats.org/drawingml/2006/main"/>
-          <a:lstStyle xmlns:a="http://schemas.openxmlformats.org/drawingml/2006/main"/>
-          <a:p xmlns:a="http://schemas.openxmlformats.org/drawingml/2006/main">
-            <a:r>
-              <a:t/>
-            </a:r>
-          </a:p>
-        </p:txBody>
-      </p:sp>
       <p:pic>
         <p:nvPicPr>
-          <p:cNvPr id="2" name=""/>
+          <p:cNvPr id="2" name="Grafik 1"/>
           <p:cNvPicPr>
-            <a:picLocks xmlns:a="http://schemas.openxmlformats.org/drawingml/2006/main" noChangeAspect="1"/>
+            <a:picLocks noChangeAspect="1"/>
           </p:cNvPicPr>
           <p:nvPr/>
         </p:nvPicPr>
         <p:blipFill>
-          <a:blip xmlns:r="http://schemas.openxmlformats.org/officeDocument/2006/relationships" xmlns:a="http://schemas.openxmlformats.org/drawingml/2006/main" r:embed="R866a793eb1a94672"/>
-          <a:srcRect xmlns:a="http://schemas.openxmlformats.org/drawingml/2006/main" l="0" t="0" r="0" b="0"/>
-          <a:stretch xmlns:a="http://schemas.openxmlformats.org/drawingml/2006/main">
-            <a:fillRect l="0" t="0" r="0" b="0"/>
-          </a:stretch>
+          <a:blip r:embed="rId3"/>
+          <a:stretch/>
         </p:blipFill>
         <p:spPr>
-          <a:xfrm xmlns:a="http://schemas.openxmlformats.org/drawingml/2006/main">
-            <a:off x="0" y="0"/>
-            <a:ext cx="12192000" cy="6858000"/>
-          </a:xfrm>
-          <a:prstGeom xmlns:a="http://schemas.openxmlformats.org/drawingml/2006/main" prst="rect">
+          <a:xfrm>
+            <a:off x="840201" y="533400"/>
+            <a:ext cx="1996248" cy="552450"/>
+          </a:xfrm>
+          <a:prstGeom prst="rect">
             <a:avLst/>
           </a:prstGeom>
         </p:spPr>
       </p:pic>
+      <p:pic>
+        <p:nvPicPr>
+          <p:cNvPr id="3" name="Grafik 2"/>
+          <p:cNvPicPr>
+            <a:picLocks noChangeAspect="1"/>
+          </p:cNvPicPr>
+          <p:nvPr/>
+        </p:nvPicPr>
+        <p:blipFill>
+          <a:blip r:embed="rId4"/>
+          <a:stretch/>
+        </p:blipFill>
+        <p:spPr>
+          <a:xfrm>
+            <a:off x="9791700" y="460356"/>
+            <a:ext cx="1619250" cy="946188"/>
+          </a:xfrm>
+          <a:prstGeom prst="rect">
+            <a:avLst/>
+          </a:prstGeom>
+        </p:spPr>
+      </p:pic>
+      <p:sp>
+        <p:nvSpPr>
+          <p:cNvPr id="4" name="Rechteck 3">
+            <a:extLst>
+              <a:ext uri="{FF2B5EF4-FFF2-40B4-BE49-F238E27FC236}">
+                <a16:creationId xmlns:a16="http://schemas.microsoft.com/office/drawing/2014/main" id="{AD27BF78-F996-4A18-9B58-0263D350C0E6}"/>
+              </a:ext>
+            </a:extLst>
+          </p:cNvPr>
+          <p:cNvSpPr>
+            <a:spLocks noGrp="1"/>
+          </p:cNvSpPr>
+          <p:nvPr/>
+        </p:nvSpPr>
+        <p:spPr>
+          <a:xfrm>
+            <a:off x="838200" y="1314450"/>
+            <a:ext cx="7429500" cy="228600"/>
+          </a:xfrm>
+          <a:prstGeom prst="rect">
+            <a:avLst/>
+          </a:prstGeom>
+          <a:solidFill>
+            <a:srgbClr val="FFFFFF">
+              <a:alpha val="0"/>
+            </a:srgbClr>
+          </a:solidFill>
+          <a:ln w="0">
+            <a:solidFill>
+              <a:srgbClr val="000000">
+                <a:alpha val="0"/>
+              </a:srgbClr>
+            </a:solidFill>
+            <a:prstDash val="solid"/>
+          </a:ln>
+        </p:spPr>
+        <p:txBody>
+          <a:bodyPr lIns="0" tIns="0" rIns="0" bIns="0" anchor="t"/>
+          <a:lstStyle/>
+          <a:p>
+            <a:pPr algn="l">
+              <a:defRPr sz="1125" b="1">
+                <a:solidFill>
+                  <a:srgbClr val="5E5E5D"/>
+                </a:solidFill>
+              </a:defRPr>
+            </a:pPr>
+            <a:r>
+              <a:rPr sz="1125" b="1">
+                <a:solidFill>
+                  <a:srgbClr val="5E5E5D"/>
+                </a:solidFill>
+              </a:rPr>
+              <a:t>Approach</a:t>
+            </a:r>
+          </a:p>
+        </p:txBody>
+      </p:sp>
+      <p:sp>
+        <p:nvSpPr>
+          <p:cNvPr id="5" name="Rechteck 4">
+            <a:extLst>
+              <a:ext uri="{FF2B5EF4-FFF2-40B4-BE49-F238E27FC236}">
+                <a16:creationId xmlns:a16="http://schemas.microsoft.com/office/drawing/2014/main" id="{E5CFAC11-4841-4EC3-B40C-B51435BD6C86}"/>
+              </a:ext>
+            </a:extLst>
+          </p:cNvPr>
+          <p:cNvSpPr>
+            <a:spLocks noGrp="1"/>
+          </p:cNvSpPr>
+          <p:nvPr/>
+        </p:nvSpPr>
+        <p:spPr>
+          <a:xfrm>
+            <a:off x="476250" y="6305550"/>
+            <a:ext cx="11315700" cy="19050"/>
+          </a:xfrm>
+          <a:prstGeom prst="rect">
+            <a:avLst/>
+          </a:prstGeom>
+          <a:solidFill>
+            <a:srgbClr val="910830"/>
+          </a:solidFill>
+          <a:ln w="0">
+            <a:solidFill>
+              <a:srgbClr val="000000">
+                <a:alpha val="0"/>
+              </a:srgbClr>
+            </a:solidFill>
+            <a:prstDash val="solid"/>
+          </a:ln>
+        </p:spPr>
+        <p:txBody>
+          <a:bodyPr/>
+          <a:lstStyle/>
+          <a:p>
+            <a:endParaRPr lang="en-US"/>
+          </a:p>
+        </p:txBody>
+      </p:sp>
+      <p:sp>
+        <p:nvSpPr>
+          <p:cNvPr id="6" name="Rechteck 5">
+            <a:extLst>
+              <a:ext uri="{FF2B5EF4-FFF2-40B4-BE49-F238E27FC236}">
+                <a16:creationId xmlns:a16="http://schemas.microsoft.com/office/drawing/2014/main" id="{7B96FE7B-6B61-4E14-A743-D6AFA5A4EF26}"/>
+              </a:ext>
+            </a:extLst>
+          </p:cNvPr>
+          <p:cNvSpPr>
+            <a:spLocks noGrp="1"/>
+          </p:cNvSpPr>
+          <p:nvPr/>
+        </p:nvSpPr>
+        <p:spPr>
+          <a:xfrm>
+            <a:off x="476250" y="6438900"/>
+            <a:ext cx="4953000" cy="228600"/>
+          </a:xfrm>
+          <a:prstGeom prst="rect">
+            <a:avLst/>
+          </a:prstGeom>
+          <a:solidFill>
+            <a:srgbClr val="FFFFFF">
+              <a:alpha val="0"/>
+            </a:srgbClr>
+          </a:solidFill>
+          <a:ln w="0">
+            <a:solidFill>
+              <a:srgbClr val="000000">
+                <a:alpha val="0"/>
+              </a:srgbClr>
+            </a:solidFill>
+            <a:prstDash val="solid"/>
+          </a:ln>
+        </p:spPr>
+        <p:txBody>
+          <a:bodyPr lIns="0" tIns="0" rIns="0" bIns="0" anchor="t"/>
+          <a:lstStyle/>
+          <a:p>
+            <a:pPr algn="l">
+              <a:defRPr sz="1050" b="1">
+                <a:solidFill>
+                  <a:srgbClr val="5E5E5D"/>
+                </a:solidFill>
+              </a:defRPr>
+            </a:pPr>
+            <a:r>
+              <a:rPr sz="1050" b="1">
+                <a:solidFill>
+                  <a:srgbClr val="5E5E5D"/>
+                </a:solidFill>
+              </a:rPr>
+              <a:t>Group 18 | Bike Count Estimation</a:t>
+            </a:r>
+          </a:p>
+        </p:txBody>
+      </p:sp>
+      <p:sp>
+        <p:nvSpPr>
+          <p:cNvPr id="7" name="Rechteck 6">
+            <a:extLst>
+              <a:ext uri="{FF2B5EF4-FFF2-40B4-BE49-F238E27FC236}">
+                <a16:creationId xmlns:a16="http://schemas.microsoft.com/office/drawing/2014/main" id="{2C2F0B9D-C8D3-4E2F-9414-820DA1A17F80}"/>
+              </a:ext>
+            </a:extLst>
+          </p:cNvPr>
+          <p:cNvSpPr>
+            <a:spLocks noGrp="1"/>
+          </p:cNvSpPr>
+          <p:nvPr/>
+        </p:nvSpPr>
+        <p:spPr>
+          <a:xfrm>
+            <a:off x="10668000" y="6438900"/>
+            <a:ext cx="1123950" cy="228600"/>
+          </a:xfrm>
+          <a:prstGeom prst="rect">
+            <a:avLst/>
+          </a:prstGeom>
+          <a:solidFill>
+            <a:srgbClr val="FFFFFF">
+              <a:alpha val="0"/>
+            </a:srgbClr>
+          </a:solidFill>
+          <a:ln w="0">
+            <a:solidFill>
+              <a:srgbClr val="000000">
+                <a:alpha val="0"/>
+              </a:srgbClr>
+            </a:solidFill>
+            <a:prstDash val="solid"/>
+          </a:ln>
+        </p:spPr>
+        <p:txBody>
+          <a:bodyPr lIns="0" tIns="0" rIns="0" bIns="0" anchor="t"/>
+          <a:lstStyle/>
+          <a:p>
+            <a:pPr algn="r">
+              <a:defRPr sz="1050" b="1">
+                <a:solidFill>
+                  <a:srgbClr val="5E5E5D"/>
+                </a:solidFill>
+              </a:defRPr>
+            </a:pPr>
+            <a:r>
+              <a:rPr sz="1050" b="1">
+                <a:solidFill>
+                  <a:srgbClr val="5E5E5D"/>
+                </a:solidFill>
+              </a:rPr>
+              <a:t>1 / 2</a:t>
+            </a:r>
+          </a:p>
+        </p:txBody>
+      </p:sp>
+      <p:sp>
+        <p:nvSpPr>
+          <p:cNvPr id="8" name="Rechteck 7">
+            <a:extLst>
+              <a:ext uri="{FF2B5EF4-FFF2-40B4-BE49-F238E27FC236}">
+                <a16:creationId xmlns:a16="http://schemas.microsoft.com/office/drawing/2014/main" id="{7C4A689E-2464-4BA0-92D1-B09BCC39D72C}"/>
+              </a:ext>
+            </a:extLst>
+          </p:cNvPr>
+          <p:cNvSpPr>
+            <a:spLocks noGrp="1"/>
+          </p:cNvSpPr>
+          <p:nvPr/>
+        </p:nvSpPr>
+        <p:spPr>
+          <a:xfrm>
+            <a:off x="838200" y="1695450"/>
+            <a:ext cx="9715500" cy="552450"/>
+          </a:xfrm>
+          <a:prstGeom prst="rect">
+            <a:avLst/>
+          </a:prstGeom>
+          <a:solidFill>
+            <a:srgbClr val="FFFFFF">
+              <a:alpha val="0"/>
+            </a:srgbClr>
+          </a:solidFill>
+          <a:ln w="0">
+            <a:solidFill>
+              <a:srgbClr val="000000">
+                <a:alpha val="0"/>
+              </a:srgbClr>
+            </a:solidFill>
+            <a:prstDash val="solid"/>
+          </a:ln>
+        </p:spPr>
+        <p:txBody>
+          <a:bodyPr lIns="0" tIns="0" rIns="0" bIns="0" anchor="t">
+            <a:normAutofit/>
+          </a:bodyPr>
+          <a:lstStyle/>
+          <a:p>
+            <a:pPr algn="l">
+              <a:defRPr sz="2250" b="1">
+                <a:solidFill>
+                  <a:srgbClr val="910830"/>
+                </a:solidFill>
+              </a:defRPr>
+            </a:pPr>
+            <a:r>
+              <a:rPr sz="2250" b="1">
+                <a:solidFill>
+                  <a:srgbClr val="910830"/>
+                </a:solidFill>
+              </a:rPr>
+              <a:t>Approach: leakage-safe direct forecasts</a:t>
+            </a:r>
+          </a:p>
+        </p:txBody>
+      </p:sp>
+      <p:sp>
+        <p:nvSpPr>
+          <p:cNvPr id="9" name="Rechteck 8">
+            <a:extLst>
+              <a:ext uri="{FF2B5EF4-FFF2-40B4-BE49-F238E27FC236}">
+                <a16:creationId xmlns:a16="http://schemas.microsoft.com/office/drawing/2014/main" id="{11D57C0E-CB70-4779-90C2-DFC27178321F}"/>
+              </a:ext>
+            </a:extLst>
+          </p:cNvPr>
+          <p:cNvSpPr>
+            <a:spLocks noGrp="1"/>
+          </p:cNvSpPr>
+          <p:nvPr/>
+        </p:nvSpPr>
+        <p:spPr>
+          <a:xfrm>
+            <a:off x="857250" y="2266950"/>
+            <a:ext cx="9906000" cy="361950"/>
+          </a:xfrm>
+          <a:prstGeom prst="rect">
+            <a:avLst/>
+          </a:prstGeom>
+          <a:solidFill>
+            <a:srgbClr val="FFFFFF">
+              <a:alpha val="0"/>
+            </a:srgbClr>
+          </a:solidFill>
+          <a:ln w="0">
+            <a:solidFill>
+              <a:srgbClr val="000000">
+                <a:alpha val="0"/>
+              </a:srgbClr>
+            </a:solidFill>
+            <a:prstDash val="solid"/>
+          </a:ln>
+        </p:spPr>
+        <p:txBody>
+          <a:bodyPr lIns="0" tIns="0" rIns="0" bIns="0" anchor="t"/>
+          <a:lstStyle/>
+          <a:p>
+            <a:pPr algn="l">
+              <a:defRPr sz="1200" b="0">
+                <a:solidFill>
+                  <a:srgbClr val="5E5E5D"/>
+                </a:solidFill>
+              </a:defRPr>
+            </a:pPr>
+            <a:r>
+              <a:rPr sz="1200" b="0">
+                <a:solidFill>
+                  <a:srgbClr val="5E5E5D"/>
+                </a:solidFill>
+              </a:rPr>
+              <a:t>We frame the challenge as tabular time-series regression, compare the required model families, and select models with rolling-origin CV.</a:t>
+            </a:r>
+          </a:p>
+        </p:txBody>
+      </p:sp>
+      <p:sp>
+        <p:nvSpPr>
+          <p:cNvPr id="10" name="Abgerundetes Rechteck 9">
+            <a:extLst>
+              <a:ext uri="{FF2B5EF4-FFF2-40B4-BE49-F238E27FC236}">
+                <a16:creationId xmlns:a16="http://schemas.microsoft.com/office/drawing/2014/main" id="{D96639A9-E168-42EF-84FE-2BEDEEED5556}"/>
+              </a:ext>
+            </a:extLst>
+          </p:cNvPr>
+          <p:cNvSpPr>
+            <a:spLocks noGrp="1"/>
+          </p:cNvSpPr>
+          <p:nvPr/>
+        </p:nvSpPr>
+        <p:spPr>
+          <a:xfrm>
+            <a:off x="838200" y="2724150"/>
+            <a:ext cx="3143250" cy="1181100"/>
+          </a:xfrm>
+          <a:prstGeom prst="roundRect">
+            <a:avLst>
+              <a:gd name="adj" fmla="val 9000"/>
+            </a:avLst>
+          </a:prstGeom>
+          <a:solidFill>
+            <a:srgbClr val="FFFFFF"/>
+          </a:solidFill>
+          <a:ln w="11430">
+            <a:solidFill>
+              <a:srgbClr val="EEF0F2"/>
+            </a:solidFill>
+            <a:prstDash val="solid"/>
+          </a:ln>
+        </p:spPr>
+        <p:txBody>
+          <a:bodyPr/>
+          <a:lstStyle/>
+          <a:p>
+            <a:endParaRPr lang="en-US"/>
+          </a:p>
+        </p:txBody>
+      </p:sp>
+      <p:sp>
+        <p:nvSpPr>
+          <p:cNvPr id="11" name="Rechteck 10">
+            <a:extLst>
+              <a:ext uri="{FF2B5EF4-FFF2-40B4-BE49-F238E27FC236}">
+                <a16:creationId xmlns:a16="http://schemas.microsoft.com/office/drawing/2014/main" id="{86F3BCBA-FFFC-47F3-8DF7-330E0A4DB22F}"/>
+              </a:ext>
+            </a:extLst>
+          </p:cNvPr>
+          <p:cNvSpPr>
+            <a:spLocks noGrp="1"/>
+          </p:cNvSpPr>
+          <p:nvPr/>
+        </p:nvSpPr>
+        <p:spPr>
+          <a:xfrm>
+            <a:off x="838200" y="2724150"/>
+            <a:ext cx="76200" cy="1181100"/>
+          </a:xfrm>
+          <a:prstGeom prst="rect">
+            <a:avLst/>
+          </a:prstGeom>
+          <a:solidFill>
+            <a:srgbClr val="910830"/>
+          </a:solidFill>
+          <a:ln w="0">
+            <a:solidFill>
+              <a:srgbClr val="000000">
+                <a:alpha val="0"/>
+              </a:srgbClr>
+            </a:solidFill>
+            <a:prstDash val="solid"/>
+          </a:ln>
+        </p:spPr>
+        <p:txBody>
+          <a:bodyPr/>
+          <a:lstStyle/>
+          <a:p>
+            <a:endParaRPr lang="en-US"/>
+          </a:p>
+        </p:txBody>
+      </p:sp>
+      <p:sp>
+        <p:nvSpPr>
+          <p:cNvPr id="12" name="Rechteck 11">
+            <a:extLst>
+              <a:ext uri="{FF2B5EF4-FFF2-40B4-BE49-F238E27FC236}">
+                <a16:creationId xmlns:a16="http://schemas.microsoft.com/office/drawing/2014/main" id="{2DF96427-C1D1-4037-A451-2A8312A14DDD}"/>
+              </a:ext>
+            </a:extLst>
+          </p:cNvPr>
+          <p:cNvSpPr>
+            <a:spLocks noGrp="1"/>
+          </p:cNvSpPr>
+          <p:nvPr/>
+        </p:nvSpPr>
+        <p:spPr>
+          <a:xfrm>
+            <a:off x="1047750" y="2933700"/>
+            <a:ext cx="323850" cy="342900"/>
+          </a:xfrm>
+          <a:prstGeom prst="rect">
+            <a:avLst/>
+          </a:prstGeom>
+          <a:solidFill>
+            <a:srgbClr val="FFFFFF">
+              <a:alpha val="0"/>
+            </a:srgbClr>
+          </a:solidFill>
+          <a:ln w="0">
+            <a:solidFill>
+              <a:srgbClr val="000000">
+                <a:alpha val="0"/>
+              </a:srgbClr>
+            </a:solidFill>
+            <a:prstDash val="solid"/>
+          </a:ln>
+        </p:spPr>
+        <p:txBody>
+          <a:bodyPr lIns="0" tIns="0" rIns="0" bIns="0" anchor="ctr"/>
+          <a:lstStyle/>
+          <a:p>
+            <a:pPr algn="ctr">
+              <a:defRPr sz="1500" b="1">
+                <a:solidFill>
+                  <a:srgbClr val="910830"/>
+                </a:solidFill>
+              </a:defRPr>
+            </a:pPr>
+            <a:r>
+              <a:rPr sz="1500" b="1">
+                <a:solidFill>
+                  <a:srgbClr val="910830"/>
+                </a:solidFill>
+              </a:rPr>
+              <a:t>1</a:t>
+            </a:r>
+          </a:p>
+        </p:txBody>
+      </p:sp>
+      <p:sp>
+        <p:nvSpPr>
+          <p:cNvPr id="13" name="Rechteck 12">
+            <a:extLst>
+              <a:ext uri="{FF2B5EF4-FFF2-40B4-BE49-F238E27FC236}">
+                <a16:creationId xmlns:a16="http://schemas.microsoft.com/office/drawing/2014/main" id="{EFC82CD3-3B9D-449A-8F4C-D532DE031D24}"/>
+              </a:ext>
+            </a:extLst>
+          </p:cNvPr>
+          <p:cNvSpPr>
+            <a:spLocks noGrp="1"/>
+          </p:cNvSpPr>
+          <p:nvPr/>
+        </p:nvSpPr>
+        <p:spPr>
+          <a:xfrm>
+            <a:off x="1485900" y="2914650"/>
+            <a:ext cx="2324100" cy="304800"/>
+          </a:xfrm>
+          <a:prstGeom prst="rect">
+            <a:avLst/>
+          </a:prstGeom>
+          <a:solidFill>
+            <a:srgbClr val="FFFFFF">
+              <a:alpha val="0"/>
+            </a:srgbClr>
+          </a:solidFill>
+          <a:ln w="0">
+            <a:solidFill>
+              <a:srgbClr val="000000">
+                <a:alpha val="0"/>
+              </a:srgbClr>
+            </a:solidFill>
+            <a:prstDash val="solid"/>
+          </a:ln>
+        </p:spPr>
+        <p:txBody>
+          <a:bodyPr lIns="0" tIns="0" rIns="0" bIns="0" anchor="t"/>
+          <a:lstStyle/>
+          <a:p>
+            <a:pPr algn="l">
+              <a:defRPr sz="1350" b="1">
+                <a:solidFill>
+                  <a:srgbClr val="1F252B"/>
+                </a:solidFill>
+              </a:defRPr>
+            </a:pPr>
+            <a:r>
+              <a:rPr sz="1350" b="1">
+                <a:solidFill>
+                  <a:srgbClr val="1F252B"/>
+                </a:solidFill>
+              </a:rPr>
+              <a:t>Direct forecast targets</a:t>
+            </a:r>
+          </a:p>
+        </p:txBody>
+      </p:sp>
+      <p:sp>
+        <p:nvSpPr>
+          <p:cNvPr id="14" name="Rechteck 13">
+            <a:extLst>
+              <a:ext uri="{FF2B5EF4-FFF2-40B4-BE49-F238E27FC236}">
+                <a16:creationId xmlns:a16="http://schemas.microsoft.com/office/drawing/2014/main" id="{6106F744-ED4A-4207-8AD2-EF505BECE60F}"/>
+              </a:ext>
+            </a:extLst>
+          </p:cNvPr>
+          <p:cNvSpPr>
+            <a:spLocks noGrp="1"/>
+          </p:cNvSpPr>
+          <p:nvPr/>
+        </p:nvSpPr>
+        <p:spPr>
+          <a:xfrm>
+            <a:off x="1485900" y="3257550"/>
+            <a:ext cx="2247900" cy="552450"/>
+          </a:xfrm>
+          <a:prstGeom prst="rect">
+            <a:avLst/>
+          </a:prstGeom>
+          <a:solidFill>
+            <a:srgbClr val="FFFFFF">
+              <a:alpha val="0"/>
+            </a:srgbClr>
+          </a:solidFill>
+          <a:ln w="0">
+            <a:solidFill>
+              <a:srgbClr val="000000">
+                <a:alpha val="0"/>
+              </a:srgbClr>
+            </a:solidFill>
+            <a:prstDash val="solid"/>
+          </a:ln>
+        </p:spPr>
+        <p:txBody>
+          <a:bodyPr lIns="0" tIns="0" rIns="0" bIns="0" anchor="t"/>
+          <a:lstStyle/>
+          <a:p>
+            <a:pPr algn="l">
+              <a:defRPr sz="975" b="0">
+                <a:solidFill>
+                  <a:srgbClr val="5E5E5D"/>
+                </a:solidFill>
+              </a:defRPr>
+            </a:pPr>
+            <a:r>
+              <a:rPr sz="975" b="0">
+                <a:solidFill>
+                  <a:srgbClr val="5E5E5D"/>
+                </a:solidFill>
+              </a:rPr>
+              <a:t>For horizon h, target = BikeCount(t+h). We evaluate one-hour and next-day hourly forecasts.</a:t>
+            </a:r>
+          </a:p>
+        </p:txBody>
+      </p:sp>
+      <p:sp>
+        <p:nvSpPr>
+          <p:cNvPr id="15" name="Abgerundetes Rechteck 14">
+            <a:extLst>
+              <a:ext uri="{FF2B5EF4-FFF2-40B4-BE49-F238E27FC236}">
+                <a16:creationId xmlns:a16="http://schemas.microsoft.com/office/drawing/2014/main" id="{7D5ABEAE-8B37-457F-9EE3-7CD43A40BBE2}"/>
+              </a:ext>
+            </a:extLst>
+          </p:cNvPr>
+          <p:cNvSpPr>
+            <a:spLocks noGrp="1"/>
+          </p:cNvSpPr>
+          <p:nvPr/>
+        </p:nvSpPr>
+        <p:spPr>
+          <a:xfrm>
+            <a:off x="4305300" y="2724150"/>
+            <a:ext cx="3143250" cy="1181100"/>
+          </a:xfrm>
+          <a:prstGeom prst="roundRect">
+            <a:avLst>
+              <a:gd name="adj" fmla="val 9000"/>
+            </a:avLst>
+          </a:prstGeom>
+          <a:solidFill>
+            <a:srgbClr val="FFFFFF"/>
+          </a:solidFill>
+          <a:ln w="11430">
+            <a:solidFill>
+              <a:srgbClr val="EEF0F2"/>
+            </a:solidFill>
+            <a:prstDash val="solid"/>
+          </a:ln>
+        </p:spPr>
+        <p:txBody>
+          <a:bodyPr/>
+          <a:lstStyle/>
+          <a:p>
+            <a:endParaRPr lang="en-US"/>
+          </a:p>
+        </p:txBody>
+      </p:sp>
+      <p:sp>
+        <p:nvSpPr>
+          <p:cNvPr id="16" name="Rechteck 15">
+            <a:extLst>
+              <a:ext uri="{FF2B5EF4-FFF2-40B4-BE49-F238E27FC236}">
+                <a16:creationId xmlns:a16="http://schemas.microsoft.com/office/drawing/2014/main" id="{BAFA6735-9F34-4CB2-8955-6E349F9E1736}"/>
+              </a:ext>
+            </a:extLst>
+          </p:cNvPr>
+          <p:cNvSpPr>
+            <a:spLocks noGrp="1"/>
+          </p:cNvSpPr>
+          <p:nvPr/>
+        </p:nvSpPr>
+        <p:spPr>
+          <a:xfrm>
+            <a:off x="4305300" y="2724150"/>
+            <a:ext cx="76200" cy="1181100"/>
+          </a:xfrm>
+          <a:prstGeom prst="rect">
+            <a:avLst/>
+          </a:prstGeom>
+          <a:solidFill>
+            <a:srgbClr val="143164"/>
+          </a:solidFill>
+          <a:ln w="0">
+            <a:solidFill>
+              <a:srgbClr val="000000">
+                <a:alpha val="0"/>
+              </a:srgbClr>
+            </a:solidFill>
+            <a:prstDash val="solid"/>
+          </a:ln>
+        </p:spPr>
+        <p:txBody>
+          <a:bodyPr/>
+          <a:lstStyle/>
+          <a:p>
+            <a:endParaRPr lang="en-US"/>
+          </a:p>
+        </p:txBody>
+      </p:sp>
+      <p:sp>
+        <p:nvSpPr>
+          <p:cNvPr id="17" name="Rechteck 16">
+            <a:extLst>
+              <a:ext uri="{FF2B5EF4-FFF2-40B4-BE49-F238E27FC236}">
+                <a16:creationId xmlns:a16="http://schemas.microsoft.com/office/drawing/2014/main" id="{D2C20C1F-E929-4DA1-AA57-96BDC2B90D5C}"/>
+              </a:ext>
+            </a:extLst>
+          </p:cNvPr>
+          <p:cNvSpPr>
+            <a:spLocks noGrp="1"/>
+          </p:cNvSpPr>
+          <p:nvPr/>
+        </p:nvSpPr>
+        <p:spPr>
+          <a:xfrm>
+            <a:off x="4514850" y="2933700"/>
+            <a:ext cx="323850" cy="342900"/>
+          </a:xfrm>
+          <a:prstGeom prst="rect">
+            <a:avLst/>
+          </a:prstGeom>
+          <a:solidFill>
+            <a:srgbClr val="FFFFFF">
+              <a:alpha val="0"/>
+            </a:srgbClr>
+          </a:solidFill>
+          <a:ln w="0">
+            <a:solidFill>
+              <a:srgbClr val="000000">
+                <a:alpha val="0"/>
+              </a:srgbClr>
+            </a:solidFill>
+            <a:prstDash val="solid"/>
+          </a:ln>
+        </p:spPr>
+        <p:txBody>
+          <a:bodyPr lIns="0" tIns="0" rIns="0" bIns="0" anchor="ctr"/>
+          <a:lstStyle/>
+          <a:p>
+            <a:pPr algn="ctr">
+              <a:defRPr sz="1500" b="1">
+                <a:solidFill>
+                  <a:srgbClr val="143164"/>
+                </a:solidFill>
+              </a:defRPr>
+            </a:pPr>
+            <a:r>
+              <a:rPr sz="1500" b="1">
+                <a:solidFill>
+                  <a:srgbClr val="143164"/>
+                </a:solidFill>
+              </a:rPr>
+              <a:t>2</a:t>
+            </a:r>
+          </a:p>
+        </p:txBody>
+      </p:sp>
+      <p:sp>
+        <p:nvSpPr>
+          <p:cNvPr id="18" name="Rechteck 17">
+            <a:extLst>
+              <a:ext uri="{FF2B5EF4-FFF2-40B4-BE49-F238E27FC236}">
+                <a16:creationId xmlns:a16="http://schemas.microsoft.com/office/drawing/2014/main" id="{2C1D7A95-DAF2-44F2-AB2A-51A230EC4DEB}"/>
+              </a:ext>
+            </a:extLst>
+          </p:cNvPr>
+          <p:cNvSpPr>
+            <a:spLocks noGrp="1"/>
+          </p:cNvSpPr>
+          <p:nvPr/>
+        </p:nvSpPr>
+        <p:spPr>
+          <a:xfrm>
+            <a:off x="4953000" y="2914650"/>
+            <a:ext cx="2324100" cy="304800"/>
+          </a:xfrm>
+          <a:prstGeom prst="rect">
+            <a:avLst/>
+          </a:prstGeom>
+          <a:solidFill>
+            <a:srgbClr val="FFFFFF">
+              <a:alpha val="0"/>
+            </a:srgbClr>
+          </a:solidFill>
+          <a:ln w="0">
+            <a:solidFill>
+              <a:srgbClr val="000000">
+                <a:alpha val="0"/>
+              </a:srgbClr>
+            </a:solidFill>
+            <a:prstDash val="solid"/>
+          </a:ln>
+        </p:spPr>
+        <p:txBody>
+          <a:bodyPr lIns="0" tIns="0" rIns="0" bIns="0" anchor="t"/>
+          <a:lstStyle/>
+          <a:p>
+            <a:pPr algn="l">
+              <a:defRPr sz="1350" b="1">
+                <a:solidFill>
+                  <a:srgbClr val="1F252B"/>
+                </a:solidFill>
+              </a:defRPr>
+            </a:pPr>
+            <a:r>
+              <a:rPr sz="1350" b="1">
+                <a:solidFill>
+                  <a:srgbClr val="1F252B"/>
+                </a:solidFill>
+              </a:rPr>
+              <a:t>Required model families</a:t>
+            </a:r>
+          </a:p>
+        </p:txBody>
+      </p:sp>
+      <p:sp>
+        <p:nvSpPr>
+          <p:cNvPr id="19" name="Rechteck 18">
+            <a:extLst>
+              <a:ext uri="{FF2B5EF4-FFF2-40B4-BE49-F238E27FC236}">
+                <a16:creationId xmlns:a16="http://schemas.microsoft.com/office/drawing/2014/main" id="{4415DB54-4B2F-4CB1-BDDF-E5C404D8501F}"/>
+              </a:ext>
+            </a:extLst>
+          </p:cNvPr>
+          <p:cNvSpPr>
+            <a:spLocks noGrp="1"/>
+          </p:cNvSpPr>
+          <p:nvPr/>
+        </p:nvSpPr>
+        <p:spPr>
+          <a:xfrm>
+            <a:off x="4953000" y="3257550"/>
+            <a:ext cx="2247900" cy="552450"/>
+          </a:xfrm>
+          <a:prstGeom prst="rect">
+            <a:avLst/>
+          </a:prstGeom>
+          <a:solidFill>
+            <a:srgbClr val="FFFFFF">
+              <a:alpha val="0"/>
+            </a:srgbClr>
+          </a:solidFill>
+          <a:ln w="0">
+            <a:solidFill>
+              <a:srgbClr val="000000">
+                <a:alpha val="0"/>
+              </a:srgbClr>
+            </a:solidFill>
+            <a:prstDash val="solid"/>
+          </a:ln>
+        </p:spPr>
+        <p:txBody>
+          <a:bodyPr lIns="0" tIns="0" rIns="0" bIns="0" anchor="t"/>
+          <a:lstStyle/>
+          <a:p>
+            <a:pPr algn="l">
+              <a:defRPr sz="975" b="0">
+                <a:solidFill>
+                  <a:srgbClr val="5E5E5D"/>
+                </a:solidFill>
+              </a:defRPr>
+            </a:pPr>
+            <a:r>
+              <a:rPr sz="975" b="0">
+                <a:solidFill>
+                  <a:srgbClr val="5E5E5D"/>
+                </a:solidFill>
+              </a:rPr>
+              <a:t>Ridge covers linear regression, RandomForest / XGBoost cover tree-based models, and MLP covers neural networks.</a:t>
+            </a:r>
+          </a:p>
+        </p:txBody>
+      </p:sp>
+      <p:sp>
+        <p:nvSpPr>
+          <p:cNvPr id="20" name="Abgerundetes Rechteck 19">
+            <a:extLst>
+              <a:ext uri="{FF2B5EF4-FFF2-40B4-BE49-F238E27FC236}">
+                <a16:creationId xmlns:a16="http://schemas.microsoft.com/office/drawing/2014/main" id="{D6CBDC3D-27A3-4E2C-A825-7C533A7C665F}"/>
+              </a:ext>
+            </a:extLst>
+          </p:cNvPr>
+          <p:cNvSpPr>
+            <a:spLocks noGrp="1"/>
+          </p:cNvSpPr>
+          <p:nvPr/>
+        </p:nvSpPr>
+        <p:spPr>
+          <a:xfrm>
+            <a:off x="7772400" y="2724150"/>
+            <a:ext cx="3143250" cy="1181100"/>
+          </a:xfrm>
+          <a:prstGeom prst="roundRect">
+            <a:avLst>
+              <a:gd name="adj" fmla="val 9000"/>
+            </a:avLst>
+          </a:prstGeom>
+          <a:solidFill>
+            <a:srgbClr val="FFFFFF"/>
+          </a:solidFill>
+          <a:ln w="11430">
+            <a:solidFill>
+              <a:srgbClr val="EEF0F2"/>
+            </a:solidFill>
+            <a:prstDash val="solid"/>
+          </a:ln>
+        </p:spPr>
+        <p:txBody>
+          <a:bodyPr/>
+          <a:lstStyle/>
+          <a:p>
+            <a:endParaRPr lang="en-US"/>
+          </a:p>
+        </p:txBody>
+      </p:sp>
+      <p:sp>
+        <p:nvSpPr>
+          <p:cNvPr id="21" name="Rechteck 20">
+            <a:extLst>
+              <a:ext uri="{FF2B5EF4-FFF2-40B4-BE49-F238E27FC236}">
+                <a16:creationId xmlns:a16="http://schemas.microsoft.com/office/drawing/2014/main" id="{16F4EAA2-4E56-4F24-9AB4-65BE1EA387D6}"/>
+              </a:ext>
+            </a:extLst>
+          </p:cNvPr>
+          <p:cNvSpPr>
+            <a:spLocks noGrp="1"/>
+          </p:cNvSpPr>
+          <p:nvPr/>
+        </p:nvSpPr>
+        <p:spPr>
+          <a:xfrm>
+            <a:off x="7772400" y="2724150"/>
+            <a:ext cx="76200" cy="1181100"/>
+          </a:xfrm>
+          <a:prstGeom prst="rect">
+            <a:avLst/>
+          </a:prstGeom>
+          <a:solidFill>
+            <a:srgbClr val="87BF2A"/>
+          </a:solidFill>
+          <a:ln w="0">
+            <a:solidFill>
+              <a:srgbClr val="000000">
+                <a:alpha val="0"/>
+              </a:srgbClr>
+            </a:solidFill>
+            <a:prstDash val="solid"/>
+          </a:ln>
+        </p:spPr>
+        <p:txBody>
+          <a:bodyPr/>
+          <a:lstStyle/>
+          <a:p>
+            <a:endParaRPr lang="en-US"/>
+          </a:p>
+        </p:txBody>
+      </p:sp>
+      <p:sp>
+        <p:nvSpPr>
+          <p:cNvPr id="22" name="Rechteck 21">
+            <a:extLst>
+              <a:ext uri="{FF2B5EF4-FFF2-40B4-BE49-F238E27FC236}">
+                <a16:creationId xmlns:a16="http://schemas.microsoft.com/office/drawing/2014/main" id="{80F9AC5A-26D8-49CE-888E-B88814C0DC3B}"/>
+              </a:ext>
+            </a:extLst>
+          </p:cNvPr>
+          <p:cNvSpPr>
+            <a:spLocks noGrp="1"/>
+          </p:cNvSpPr>
+          <p:nvPr/>
+        </p:nvSpPr>
+        <p:spPr>
+          <a:xfrm>
+            <a:off x="7981950" y="2933700"/>
+            <a:ext cx="323850" cy="342900"/>
+          </a:xfrm>
+          <a:prstGeom prst="rect">
+            <a:avLst/>
+          </a:prstGeom>
+          <a:solidFill>
+            <a:srgbClr val="FFFFFF">
+              <a:alpha val="0"/>
+            </a:srgbClr>
+          </a:solidFill>
+          <a:ln w="0">
+            <a:solidFill>
+              <a:srgbClr val="000000">
+                <a:alpha val="0"/>
+              </a:srgbClr>
+            </a:solidFill>
+            <a:prstDash val="solid"/>
+          </a:ln>
+        </p:spPr>
+        <p:txBody>
+          <a:bodyPr lIns="0" tIns="0" rIns="0" bIns="0" anchor="ctr"/>
+          <a:lstStyle/>
+          <a:p>
+            <a:pPr algn="ctr">
+              <a:defRPr sz="1500" b="1">
+                <a:solidFill>
+                  <a:srgbClr val="87BF2A"/>
+                </a:solidFill>
+              </a:defRPr>
+            </a:pPr>
+            <a:r>
+              <a:rPr sz="1500" b="1">
+                <a:solidFill>
+                  <a:srgbClr val="87BF2A"/>
+                </a:solidFill>
+              </a:rPr>
+              <a:t>3</a:t>
+            </a:r>
+          </a:p>
+        </p:txBody>
+      </p:sp>
+      <p:sp>
+        <p:nvSpPr>
+          <p:cNvPr id="23" name="Rechteck 22">
+            <a:extLst>
+              <a:ext uri="{FF2B5EF4-FFF2-40B4-BE49-F238E27FC236}">
+                <a16:creationId xmlns:a16="http://schemas.microsoft.com/office/drawing/2014/main" id="{FA07AC30-B5EB-40E1-AB17-616BF64980B7}"/>
+              </a:ext>
+            </a:extLst>
+          </p:cNvPr>
+          <p:cNvSpPr>
+            <a:spLocks noGrp="1"/>
+          </p:cNvSpPr>
+          <p:nvPr/>
+        </p:nvSpPr>
+        <p:spPr>
+          <a:xfrm>
+            <a:off x="8420100" y="2914650"/>
+            <a:ext cx="2324100" cy="304800"/>
+          </a:xfrm>
+          <a:prstGeom prst="rect">
+            <a:avLst/>
+          </a:prstGeom>
+          <a:solidFill>
+            <a:srgbClr val="FFFFFF">
+              <a:alpha val="0"/>
+            </a:srgbClr>
+          </a:solidFill>
+          <a:ln w="0">
+            <a:solidFill>
+              <a:srgbClr val="000000">
+                <a:alpha val="0"/>
+              </a:srgbClr>
+            </a:solidFill>
+            <a:prstDash val="solid"/>
+          </a:ln>
+        </p:spPr>
+        <p:txBody>
+          <a:bodyPr lIns="0" tIns="0" rIns="0" bIns="0" anchor="t"/>
+          <a:lstStyle/>
+          <a:p>
+            <a:pPr algn="l">
+              <a:defRPr sz="1350" b="1">
+                <a:solidFill>
+                  <a:srgbClr val="1F252B"/>
+                </a:solidFill>
+              </a:defRPr>
+            </a:pPr>
+            <a:r>
+              <a:rPr sz="1350" b="1">
+                <a:solidFill>
+                  <a:srgbClr val="1F252B"/>
+                </a:solidFill>
+              </a:rPr>
+              <a:t>Time-series validation</a:t>
+            </a:r>
+          </a:p>
+        </p:txBody>
+      </p:sp>
+      <p:sp>
+        <p:nvSpPr>
+          <p:cNvPr id="24" name="Rechteck 23">
+            <a:extLst>
+              <a:ext uri="{FF2B5EF4-FFF2-40B4-BE49-F238E27FC236}">
+                <a16:creationId xmlns:a16="http://schemas.microsoft.com/office/drawing/2014/main" id="{F4760219-1D41-404D-90B1-8CF8E37B5EA7}"/>
+              </a:ext>
+            </a:extLst>
+          </p:cNvPr>
+          <p:cNvSpPr>
+            <a:spLocks noGrp="1"/>
+          </p:cNvSpPr>
+          <p:nvPr/>
+        </p:nvSpPr>
+        <p:spPr>
+          <a:xfrm>
+            <a:off x="8420100" y="3257550"/>
+            <a:ext cx="2247900" cy="552450"/>
+          </a:xfrm>
+          <a:prstGeom prst="rect">
+            <a:avLst/>
+          </a:prstGeom>
+          <a:solidFill>
+            <a:srgbClr val="FFFFFF">
+              <a:alpha val="0"/>
+            </a:srgbClr>
+          </a:solidFill>
+          <a:ln w="0">
+            <a:solidFill>
+              <a:srgbClr val="000000">
+                <a:alpha val="0"/>
+              </a:srgbClr>
+            </a:solidFill>
+            <a:prstDash val="solid"/>
+          </a:ln>
+        </p:spPr>
+        <p:txBody>
+          <a:bodyPr lIns="0" tIns="0" rIns="0" bIns="0" anchor="t"/>
+          <a:lstStyle/>
+          <a:p>
+            <a:pPr algn="l">
+              <a:defRPr sz="975" b="0">
+                <a:solidFill>
+                  <a:srgbClr val="5E5E5D"/>
+                </a:solidFill>
+              </a:defRPr>
+            </a:pPr>
+            <a:r>
+              <a:rPr sz="975" b="0">
+                <a:solidFill>
+                  <a:srgbClr val="5E5E5D"/>
+                </a:solidFill>
+              </a:rPr>
+              <a:t>Rolling-origin CV uses chronological 14-day forecast windows for model selection.</a:t>
+            </a:r>
+          </a:p>
+        </p:txBody>
+      </p:sp>
+      <p:sp>
+        <p:nvSpPr>
+          <p:cNvPr id="25" name="Abgerundetes Rechteck 24">
+            <a:extLst>
+              <a:ext uri="{FF2B5EF4-FFF2-40B4-BE49-F238E27FC236}">
+                <a16:creationId xmlns:a16="http://schemas.microsoft.com/office/drawing/2014/main" id="{B0307C43-1A84-4715-83AA-30E93A02CC91}"/>
+              </a:ext>
+            </a:extLst>
+          </p:cNvPr>
+          <p:cNvSpPr>
+            <a:spLocks noGrp="1"/>
+          </p:cNvSpPr>
+          <p:nvPr/>
+        </p:nvSpPr>
+        <p:spPr>
+          <a:xfrm>
+            <a:off x="838200" y="4114800"/>
+            <a:ext cx="5086350" cy="1485900"/>
+          </a:xfrm>
+          <a:prstGeom prst="roundRect">
+            <a:avLst>
+              <a:gd name="adj" fmla="val 9000"/>
+            </a:avLst>
+          </a:prstGeom>
+          <a:solidFill>
+            <a:srgbClr val="FAFAFA"/>
+          </a:solidFill>
+          <a:ln w="10478">
+            <a:solidFill>
+              <a:srgbClr val="EEF0F2"/>
+            </a:solidFill>
+            <a:prstDash val="solid"/>
+          </a:ln>
+        </p:spPr>
+        <p:txBody>
+          <a:bodyPr/>
+          <a:lstStyle/>
+          <a:p>
+            <a:endParaRPr lang="en-US"/>
+          </a:p>
+        </p:txBody>
+      </p:sp>
+      <p:sp>
+        <p:nvSpPr>
+          <p:cNvPr id="26" name="Rechteck 25">
+            <a:extLst>
+              <a:ext uri="{FF2B5EF4-FFF2-40B4-BE49-F238E27FC236}">
+                <a16:creationId xmlns:a16="http://schemas.microsoft.com/office/drawing/2014/main" id="{DDEFA251-7A4C-4E7B-B614-28D41A83A239}"/>
+              </a:ext>
+            </a:extLst>
+          </p:cNvPr>
+          <p:cNvSpPr>
+            <a:spLocks noGrp="1"/>
+          </p:cNvSpPr>
+          <p:nvPr/>
+        </p:nvSpPr>
+        <p:spPr>
+          <a:xfrm>
+            <a:off x="1104900" y="4286250"/>
+            <a:ext cx="2095500" cy="228600"/>
+          </a:xfrm>
+          <a:prstGeom prst="rect">
+            <a:avLst/>
+          </a:prstGeom>
+          <a:solidFill>
+            <a:srgbClr val="FFFFFF">
+              <a:alpha val="0"/>
+            </a:srgbClr>
+          </a:solidFill>
+          <a:ln w="0">
+            <a:solidFill>
+              <a:srgbClr val="000000">
+                <a:alpha val="0"/>
+              </a:srgbClr>
+            </a:solidFill>
+            <a:prstDash val="solid"/>
+          </a:ln>
+        </p:spPr>
+        <p:txBody>
+          <a:bodyPr lIns="0" tIns="0" rIns="0" bIns="0" anchor="t"/>
+          <a:lstStyle/>
+          <a:p>
+            <a:pPr algn="l">
+              <a:defRPr sz="1350" b="1">
+                <a:solidFill>
+                  <a:srgbClr val="1F252B"/>
+                </a:solidFill>
+              </a:defRPr>
+            </a:pPr>
+            <a:r>
+              <a:rPr sz="1350" b="1">
+                <a:solidFill>
+                  <a:srgbClr val="1F252B"/>
+                </a:solidFill>
+              </a:rPr>
+              <a:t>Feature engineering</a:t>
+            </a:r>
+          </a:p>
+        </p:txBody>
+      </p:sp>
+      <p:sp>
+        <p:nvSpPr>
+          <p:cNvPr id="27" name="Rechteck 26">
+            <a:extLst>
+              <a:ext uri="{FF2B5EF4-FFF2-40B4-BE49-F238E27FC236}">
+                <a16:creationId xmlns:a16="http://schemas.microsoft.com/office/drawing/2014/main" id="{D056143B-871E-4C42-A7CE-8B5F79E546CE}"/>
+              </a:ext>
+            </a:extLst>
+          </p:cNvPr>
+          <p:cNvSpPr>
+            <a:spLocks noGrp="1"/>
+          </p:cNvSpPr>
+          <p:nvPr/>
+        </p:nvSpPr>
+        <p:spPr>
+          <a:xfrm>
+            <a:off x="1104900" y="4617265"/>
+            <a:ext cx="66675" cy="66675"/>
+          </a:xfrm>
+          <a:prstGeom prst="rect">
+            <a:avLst/>
+          </a:prstGeom>
+          <a:solidFill>
+            <a:srgbClr val="910830"/>
+          </a:solidFill>
+          <a:ln w="0">
+            <a:solidFill>
+              <a:srgbClr val="000000">
+                <a:alpha val="0"/>
+              </a:srgbClr>
+            </a:solidFill>
+            <a:prstDash val="solid"/>
+          </a:ln>
+        </p:spPr>
+        <p:txBody>
+          <a:bodyPr/>
+          <a:lstStyle/>
+          <a:p>
+            <a:endParaRPr lang="en-US"/>
+          </a:p>
+        </p:txBody>
+      </p:sp>
+      <p:sp>
+        <p:nvSpPr>
+          <p:cNvPr id="28" name="Rechteck 27">
+            <a:extLst>
+              <a:ext uri="{FF2B5EF4-FFF2-40B4-BE49-F238E27FC236}">
+                <a16:creationId xmlns:a16="http://schemas.microsoft.com/office/drawing/2014/main" id="{7AA5921E-F28D-415E-AD0D-07F04DCBF161}"/>
+              </a:ext>
+            </a:extLst>
+          </p:cNvPr>
+          <p:cNvSpPr>
+            <a:spLocks noGrp="1"/>
+          </p:cNvSpPr>
+          <p:nvPr/>
+        </p:nvSpPr>
+        <p:spPr>
+          <a:xfrm>
+            <a:off x="1276350" y="4581525"/>
+            <a:ext cx="1047750" cy="190500"/>
+          </a:xfrm>
+          <a:prstGeom prst="rect">
+            <a:avLst/>
+          </a:prstGeom>
+          <a:solidFill>
+            <a:srgbClr val="FFFFFF">
+              <a:alpha val="0"/>
+            </a:srgbClr>
+          </a:solidFill>
+          <a:ln w="0">
+            <a:solidFill>
+              <a:srgbClr val="000000">
+                <a:alpha val="0"/>
+              </a:srgbClr>
+            </a:solidFill>
+            <a:prstDash val="solid"/>
+          </a:ln>
+        </p:spPr>
+        <p:txBody>
+          <a:bodyPr lIns="0" tIns="0" rIns="0" bIns="0" anchor="t"/>
+          <a:lstStyle/>
+          <a:p>
+            <a:pPr algn="l">
+              <a:defRPr sz="975" b="1">
+                <a:solidFill>
+                  <a:srgbClr val="910830"/>
+                </a:solidFill>
+              </a:defRPr>
+            </a:pPr>
+            <a:r>
+              <a:rPr sz="975" b="1" dirty="0">
+                <a:solidFill>
+                  <a:srgbClr val="910830"/>
+                </a:solidFill>
+              </a:rPr>
+              <a:t>Calendar</a:t>
+            </a:r>
+          </a:p>
+        </p:txBody>
+      </p:sp>
+      <p:sp>
+        <p:nvSpPr>
+          <p:cNvPr id="29" name="Rechteck 28">
+            <a:extLst>
+              <a:ext uri="{FF2B5EF4-FFF2-40B4-BE49-F238E27FC236}">
+                <a16:creationId xmlns:a16="http://schemas.microsoft.com/office/drawing/2014/main" id="{CAE3D226-BF73-4FD3-B71B-FA949653E337}"/>
+              </a:ext>
+            </a:extLst>
+          </p:cNvPr>
+          <p:cNvSpPr>
+            <a:spLocks noGrp="1"/>
+          </p:cNvSpPr>
+          <p:nvPr/>
+        </p:nvSpPr>
+        <p:spPr>
+          <a:xfrm>
+            <a:off x="2305050" y="4581525"/>
+            <a:ext cx="3143250" cy="247650"/>
+          </a:xfrm>
+          <a:prstGeom prst="rect">
+            <a:avLst/>
+          </a:prstGeom>
+          <a:solidFill>
+            <a:srgbClr val="FFFFFF">
+              <a:alpha val="0"/>
+            </a:srgbClr>
+          </a:solidFill>
+          <a:ln w="0">
+            <a:solidFill>
+              <a:srgbClr val="000000">
+                <a:alpha val="0"/>
+              </a:srgbClr>
+            </a:solidFill>
+            <a:prstDash val="solid"/>
+          </a:ln>
+        </p:spPr>
+        <p:txBody>
+          <a:bodyPr lIns="0" tIns="0" rIns="0" bIns="0" anchor="t"/>
+          <a:lstStyle/>
+          <a:p>
+            <a:pPr algn="l">
+              <a:defRPr sz="900" b="0">
+                <a:solidFill>
+                  <a:srgbClr val="5E5E5D"/>
+                </a:solidFill>
+              </a:defRPr>
+            </a:pPr>
+            <a:r>
+              <a:rPr sz="900" b="0">
+                <a:solidFill>
+                  <a:srgbClr val="5E5E5D"/>
+                </a:solidFill>
+              </a:rPr>
+              <a:t>target hour, weekday, month, weekend</a:t>
+            </a:r>
+          </a:p>
+        </p:txBody>
+      </p:sp>
+      <p:sp>
+        <p:nvSpPr>
+          <p:cNvPr id="30" name="Rechteck 29">
+            <a:extLst>
+              <a:ext uri="{FF2B5EF4-FFF2-40B4-BE49-F238E27FC236}">
+                <a16:creationId xmlns:a16="http://schemas.microsoft.com/office/drawing/2014/main" id="{4539DF61-CEE8-4208-96CB-2B0EE3187897}"/>
+              </a:ext>
+            </a:extLst>
+          </p:cNvPr>
+          <p:cNvSpPr>
+            <a:spLocks noGrp="1"/>
+          </p:cNvSpPr>
+          <p:nvPr/>
+        </p:nvSpPr>
+        <p:spPr>
+          <a:xfrm>
+            <a:off x="1104900" y="4864915"/>
+            <a:ext cx="66675" cy="66675"/>
+          </a:xfrm>
+          <a:prstGeom prst="rect">
+            <a:avLst/>
+          </a:prstGeom>
+          <a:solidFill>
+            <a:srgbClr val="143164"/>
+          </a:solidFill>
+          <a:ln w="0">
+            <a:solidFill>
+              <a:srgbClr val="000000">
+                <a:alpha val="0"/>
+              </a:srgbClr>
+            </a:solidFill>
+            <a:prstDash val="solid"/>
+          </a:ln>
+        </p:spPr>
+        <p:txBody>
+          <a:bodyPr/>
+          <a:lstStyle/>
+          <a:p>
+            <a:endParaRPr lang="en-US"/>
+          </a:p>
+        </p:txBody>
+      </p:sp>
+      <p:sp>
+        <p:nvSpPr>
+          <p:cNvPr id="31" name="Rechteck 30">
+            <a:extLst>
+              <a:ext uri="{FF2B5EF4-FFF2-40B4-BE49-F238E27FC236}">
+                <a16:creationId xmlns:a16="http://schemas.microsoft.com/office/drawing/2014/main" id="{24C8FF33-6A69-413B-9F87-E90E0B835C6C}"/>
+              </a:ext>
+            </a:extLst>
+          </p:cNvPr>
+          <p:cNvSpPr>
+            <a:spLocks noGrp="1"/>
+          </p:cNvSpPr>
+          <p:nvPr/>
+        </p:nvSpPr>
+        <p:spPr>
+          <a:xfrm>
+            <a:off x="1276350" y="4829175"/>
+            <a:ext cx="1047750" cy="190500"/>
+          </a:xfrm>
+          <a:prstGeom prst="rect">
+            <a:avLst/>
+          </a:prstGeom>
+          <a:solidFill>
+            <a:srgbClr val="FFFFFF">
+              <a:alpha val="0"/>
+            </a:srgbClr>
+          </a:solidFill>
+          <a:ln w="0">
+            <a:solidFill>
+              <a:srgbClr val="000000">
+                <a:alpha val="0"/>
+              </a:srgbClr>
+            </a:solidFill>
+            <a:prstDash val="solid"/>
+          </a:ln>
+        </p:spPr>
+        <p:txBody>
+          <a:bodyPr lIns="0" tIns="0" rIns="0" bIns="0" anchor="t"/>
+          <a:lstStyle/>
+          <a:p>
+            <a:pPr algn="l">
+              <a:defRPr sz="975" b="1">
+                <a:solidFill>
+                  <a:srgbClr val="143164"/>
+                </a:solidFill>
+              </a:defRPr>
+            </a:pPr>
+            <a:r>
+              <a:rPr sz="975" b="1">
+                <a:solidFill>
+                  <a:srgbClr val="143164"/>
+                </a:solidFill>
+              </a:rPr>
+              <a:t>Cyclical</a:t>
+            </a:r>
+          </a:p>
+        </p:txBody>
+      </p:sp>
+      <p:sp>
+        <p:nvSpPr>
+          <p:cNvPr id="32" name="Rechteck 31">
+            <a:extLst>
+              <a:ext uri="{FF2B5EF4-FFF2-40B4-BE49-F238E27FC236}">
+                <a16:creationId xmlns:a16="http://schemas.microsoft.com/office/drawing/2014/main" id="{D41C7A30-C265-43E5-B1AD-21E410A1DE97}"/>
+              </a:ext>
+            </a:extLst>
+          </p:cNvPr>
+          <p:cNvSpPr>
+            <a:spLocks noGrp="1"/>
+          </p:cNvSpPr>
+          <p:nvPr/>
+        </p:nvSpPr>
+        <p:spPr>
+          <a:xfrm>
+            <a:off x="2305050" y="4829175"/>
+            <a:ext cx="3143250" cy="247650"/>
+          </a:xfrm>
+          <a:prstGeom prst="rect">
+            <a:avLst/>
+          </a:prstGeom>
+          <a:solidFill>
+            <a:srgbClr val="FFFFFF">
+              <a:alpha val="0"/>
+            </a:srgbClr>
+          </a:solidFill>
+          <a:ln w="0">
+            <a:solidFill>
+              <a:srgbClr val="000000">
+                <a:alpha val="0"/>
+              </a:srgbClr>
+            </a:solidFill>
+            <a:prstDash val="solid"/>
+          </a:ln>
+        </p:spPr>
+        <p:txBody>
+          <a:bodyPr lIns="0" tIns="0" rIns="0" bIns="0" anchor="t"/>
+          <a:lstStyle/>
+          <a:p>
+            <a:pPr algn="l">
+              <a:defRPr sz="900" b="0">
+                <a:solidFill>
+                  <a:srgbClr val="5E5E5D"/>
+                </a:solidFill>
+              </a:defRPr>
+            </a:pPr>
+            <a:r>
+              <a:rPr sz="900" b="0">
+                <a:solidFill>
+                  <a:srgbClr val="5E5E5D"/>
+                </a:solidFill>
+              </a:rPr>
+              <a:t>sin/cos encodes hour and month cycles</a:t>
+            </a:r>
+          </a:p>
+        </p:txBody>
+      </p:sp>
+      <p:sp>
+        <p:nvSpPr>
+          <p:cNvPr id="33" name="Rechteck 32">
+            <a:extLst>
+              <a:ext uri="{FF2B5EF4-FFF2-40B4-BE49-F238E27FC236}">
+                <a16:creationId xmlns:a16="http://schemas.microsoft.com/office/drawing/2014/main" id="{080E8F5C-07EA-4E92-8382-31C8DC8784B9}"/>
+              </a:ext>
+            </a:extLst>
+          </p:cNvPr>
+          <p:cNvSpPr>
+            <a:spLocks noGrp="1"/>
+          </p:cNvSpPr>
+          <p:nvPr/>
+        </p:nvSpPr>
+        <p:spPr>
+          <a:xfrm>
+            <a:off x="1104900" y="5112565"/>
+            <a:ext cx="66675" cy="66675"/>
+          </a:xfrm>
+          <a:prstGeom prst="rect">
+            <a:avLst/>
+          </a:prstGeom>
+          <a:solidFill>
+            <a:srgbClr val="87BF2A"/>
+          </a:solidFill>
+          <a:ln w="0">
+            <a:solidFill>
+              <a:srgbClr val="000000">
+                <a:alpha val="0"/>
+              </a:srgbClr>
+            </a:solidFill>
+            <a:prstDash val="solid"/>
+          </a:ln>
+        </p:spPr>
+        <p:txBody>
+          <a:bodyPr/>
+          <a:lstStyle/>
+          <a:p>
+            <a:endParaRPr lang="en-US"/>
+          </a:p>
+        </p:txBody>
+      </p:sp>
+      <p:sp>
+        <p:nvSpPr>
+          <p:cNvPr id="34" name="Rechteck 33">
+            <a:extLst>
+              <a:ext uri="{FF2B5EF4-FFF2-40B4-BE49-F238E27FC236}">
+                <a16:creationId xmlns:a16="http://schemas.microsoft.com/office/drawing/2014/main" id="{A7138FFE-904F-4F98-8DB7-67AF2B2CD566}"/>
+              </a:ext>
+            </a:extLst>
+          </p:cNvPr>
+          <p:cNvSpPr>
+            <a:spLocks noGrp="1"/>
+          </p:cNvSpPr>
+          <p:nvPr/>
+        </p:nvSpPr>
+        <p:spPr>
+          <a:xfrm>
+            <a:off x="1276350" y="5076825"/>
+            <a:ext cx="1047750" cy="190500"/>
+          </a:xfrm>
+          <a:prstGeom prst="rect">
+            <a:avLst/>
+          </a:prstGeom>
+          <a:solidFill>
+            <a:srgbClr val="FFFFFF">
+              <a:alpha val="0"/>
+            </a:srgbClr>
+          </a:solidFill>
+          <a:ln w="0">
+            <a:solidFill>
+              <a:srgbClr val="000000">
+                <a:alpha val="0"/>
+              </a:srgbClr>
+            </a:solidFill>
+            <a:prstDash val="solid"/>
+          </a:ln>
+        </p:spPr>
+        <p:txBody>
+          <a:bodyPr lIns="0" tIns="0" rIns="0" bIns="0" anchor="t"/>
+          <a:lstStyle/>
+          <a:p>
+            <a:pPr algn="l">
+              <a:defRPr sz="975" b="1">
+                <a:solidFill>
+                  <a:srgbClr val="87BF2A"/>
+                </a:solidFill>
+              </a:defRPr>
+            </a:pPr>
+            <a:r>
+              <a:rPr sz="975" b="1">
+                <a:solidFill>
+                  <a:srgbClr val="87BF2A"/>
+                </a:solidFill>
+              </a:rPr>
+              <a:t>Weather</a:t>
+            </a:r>
+          </a:p>
+        </p:txBody>
+      </p:sp>
+      <p:sp>
+        <p:nvSpPr>
+          <p:cNvPr id="35" name="Rechteck 34">
+            <a:extLst>
+              <a:ext uri="{FF2B5EF4-FFF2-40B4-BE49-F238E27FC236}">
+                <a16:creationId xmlns:a16="http://schemas.microsoft.com/office/drawing/2014/main" id="{5A900B4D-C43E-45C7-B39D-E3B612C7DD57}"/>
+              </a:ext>
+            </a:extLst>
+          </p:cNvPr>
+          <p:cNvSpPr>
+            <a:spLocks noGrp="1"/>
+          </p:cNvSpPr>
+          <p:nvPr/>
+        </p:nvSpPr>
+        <p:spPr>
+          <a:xfrm>
+            <a:off x="2305050" y="5076825"/>
+            <a:ext cx="3143250" cy="247650"/>
+          </a:xfrm>
+          <a:prstGeom prst="rect">
+            <a:avLst/>
+          </a:prstGeom>
+          <a:solidFill>
+            <a:srgbClr val="FFFFFF">
+              <a:alpha val="0"/>
+            </a:srgbClr>
+          </a:solidFill>
+          <a:ln w="0">
+            <a:solidFill>
+              <a:srgbClr val="000000">
+                <a:alpha val="0"/>
+              </a:srgbClr>
+            </a:solidFill>
+            <a:prstDash val="solid"/>
+          </a:ln>
+        </p:spPr>
+        <p:txBody>
+          <a:bodyPr lIns="0" tIns="0" rIns="0" bIns="0" anchor="t"/>
+          <a:lstStyle/>
+          <a:p>
+            <a:pPr algn="l">
+              <a:defRPr sz="900" b="0">
+                <a:solidFill>
+                  <a:srgbClr val="5E5E5D"/>
+                </a:solidFill>
+              </a:defRPr>
+            </a:pPr>
+            <a:r>
+              <a:rPr sz="900" b="0">
+                <a:solidFill>
+                  <a:srgbClr val="5E5E5D"/>
+                </a:solidFill>
+              </a:rPr>
+              <a:t>target-hour weather buckets + measurements</a:t>
+            </a:r>
+          </a:p>
+        </p:txBody>
+      </p:sp>
+      <p:sp>
+        <p:nvSpPr>
+          <p:cNvPr id="36" name="Rechteck 35">
+            <a:extLst>
+              <a:ext uri="{FF2B5EF4-FFF2-40B4-BE49-F238E27FC236}">
+                <a16:creationId xmlns:a16="http://schemas.microsoft.com/office/drawing/2014/main" id="{775EE2E3-2E34-4AE6-BD43-F05E9F630F09}"/>
+              </a:ext>
+            </a:extLst>
+          </p:cNvPr>
+          <p:cNvSpPr>
+            <a:spLocks noGrp="1"/>
+          </p:cNvSpPr>
+          <p:nvPr/>
+        </p:nvSpPr>
+        <p:spPr>
+          <a:xfrm>
+            <a:off x="1104900" y="5360215"/>
+            <a:ext cx="66675" cy="66675"/>
+          </a:xfrm>
+          <a:prstGeom prst="rect">
+            <a:avLst/>
+          </a:prstGeom>
+          <a:solidFill>
+            <a:srgbClr val="E77C12"/>
+          </a:solidFill>
+          <a:ln w="0">
+            <a:solidFill>
+              <a:srgbClr val="000000">
+                <a:alpha val="0"/>
+              </a:srgbClr>
+            </a:solidFill>
+            <a:prstDash val="solid"/>
+          </a:ln>
+        </p:spPr>
+        <p:txBody>
+          <a:bodyPr/>
+          <a:lstStyle/>
+          <a:p>
+            <a:endParaRPr lang="en-US"/>
+          </a:p>
+        </p:txBody>
+      </p:sp>
+      <p:sp>
+        <p:nvSpPr>
+          <p:cNvPr id="37" name="Rechteck 36">
+            <a:extLst>
+              <a:ext uri="{FF2B5EF4-FFF2-40B4-BE49-F238E27FC236}">
+                <a16:creationId xmlns:a16="http://schemas.microsoft.com/office/drawing/2014/main" id="{5BF0A13D-7D14-49B4-BA67-C835860B1F52}"/>
+              </a:ext>
+            </a:extLst>
+          </p:cNvPr>
+          <p:cNvSpPr>
+            <a:spLocks noGrp="1"/>
+          </p:cNvSpPr>
+          <p:nvPr/>
+        </p:nvSpPr>
+        <p:spPr>
+          <a:xfrm>
+            <a:off x="1276350" y="5324475"/>
+            <a:ext cx="1047750" cy="190500"/>
+          </a:xfrm>
+          <a:prstGeom prst="rect">
+            <a:avLst/>
+          </a:prstGeom>
+          <a:solidFill>
+            <a:srgbClr val="FFFFFF">
+              <a:alpha val="0"/>
+            </a:srgbClr>
+          </a:solidFill>
+          <a:ln w="0">
+            <a:solidFill>
+              <a:srgbClr val="000000">
+                <a:alpha val="0"/>
+              </a:srgbClr>
+            </a:solidFill>
+            <a:prstDash val="solid"/>
+          </a:ln>
+        </p:spPr>
+        <p:txBody>
+          <a:bodyPr lIns="0" tIns="0" rIns="0" bIns="0" anchor="t"/>
+          <a:lstStyle/>
+          <a:p>
+            <a:pPr algn="l">
+              <a:defRPr sz="975" b="1">
+                <a:solidFill>
+                  <a:srgbClr val="E77C12"/>
+                </a:solidFill>
+              </a:defRPr>
+            </a:pPr>
+            <a:r>
+              <a:rPr sz="975" b="1">
+                <a:solidFill>
+                  <a:srgbClr val="E77C12"/>
+                </a:solidFill>
+              </a:rPr>
+              <a:t>BikeCount</a:t>
+            </a:r>
+          </a:p>
+        </p:txBody>
+      </p:sp>
+      <p:sp>
+        <p:nvSpPr>
+          <p:cNvPr id="38" name="Rechteck 37">
+            <a:extLst>
+              <a:ext uri="{FF2B5EF4-FFF2-40B4-BE49-F238E27FC236}">
+                <a16:creationId xmlns:a16="http://schemas.microsoft.com/office/drawing/2014/main" id="{8F5020B0-DE90-4E05-ADE1-B5D85CB310EC}"/>
+              </a:ext>
+            </a:extLst>
+          </p:cNvPr>
+          <p:cNvSpPr>
+            <a:spLocks noGrp="1"/>
+          </p:cNvSpPr>
+          <p:nvPr/>
+        </p:nvSpPr>
+        <p:spPr>
+          <a:xfrm>
+            <a:off x="2305050" y="5324475"/>
+            <a:ext cx="3143250" cy="247650"/>
+          </a:xfrm>
+          <a:prstGeom prst="rect">
+            <a:avLst/>
+          </a:prstGeom>
+          <a:solidFill>
+            <a:srgbClr val="FFFFFF">
+              <a:alpha val="0"/>
+            </a:srgbClr>
+          </a:solidFill>
+          <a:ln w="0">
+            <a:solidFill>
+              <a:srgbClr val="000000">
+                <a:alpha val="0"/>
+              </a:srgbClr>
+            </a:solidFill>
+            <a:prstDash val="solid"/>
+          </a:ln>
+        </p:spPr>
+        <p:txBody>
+          <a:bodyPr lIns="0" tIns="0" rIns="0" bIns="0" anchor="t"/>
+          <a:lstStyle/>
+          <a:p>
+            <a:pPr algn="l">
+              <a:defRPr sz="900" b="0">
+                <a:solidFill>
+                  <a:srgbClr val="5E5E5D"/>
+                </a:solidFill>
+              </a:defRPr>
+            </a:pPr>
+            <a:r>
+              <a:rPr sz="900" b="0">
+                <a:solidFill>
+                  <a:srgbClr val="5E5E5D"/>
+                </a:solidFill>
+              </a:rPr>
+              <a:t>horizon-aware lags and rolling means only</a:t>
+            </a:r>
+          </a:p>
+        </p:txBody>
+      </p:sp>
+      <p:sp>
+        <p:nvSpPr>
+          <p:cNvPr id="39" name="Abgerundetes Rechteck 38">
+            <a:extLst>
+              <a:ext uri="{FF2B5EF4-FFF2-40B4-BE49-F238E27FC236}">
+                <a16:creationId xmlns:a16="http://schemas.microsoft.com/office/drawing/2014/main" id="{D2CF30BA-E35F-4CCF-80D5-B5B4D354BEC2}"/>
+              </a:ext>
+            </a:extLst>
+          </p:cNvPr>
+          <p:cNvSpPr>
+            <a:spLocks noGrp="1"/>
+          </p:cNvSpPr>
+          <p:nvPr/>
+        </p:nvSpPr>
+        <p:spPr>
+          <a:xfrm>
+            <a:off x="6191250" y="4114800"/>
+            <a:ext cx="4724400" cy="1485900"/>
+          </a:xfrm>
+          <a:prstGeom prst="roundRect">
+            <a:avLst>
+              <a:gd name="adj" fmla="val 9000"/>
+            </a:avLst>
+          </a:prstGeom>
+          <a:solidFill>
+            <a:srgbClr val="FAFAFA"/>
+          </a:solidFill>
+          <a:ln w="10478">
+            <a:solidFill>
+              <a:srgbClr val="EEF0F2"/>
+            </a:solidFill>
+            <a:prstDash val="solid"/>
+          </a:ln>
+        </p:spPr>
+        <p:txBody>
+          <a:bodyPr/>
+          <a:lstStyle/>
+          <a:p>
+            <a:endParaRPr lang="en-US"/>
+          </a:p>
+        </p:txBody>
+      </p:sp>
+      <p:sp>
+        <p:nvSpPr>
+          <p:cNvPr id="40" name="Rechteck 39">
+            <a:extLst>
+              <a:ext uri="{FF2B5EF4-FFF2-40B4-BE49-F238E27FC236}">
+                <a16:creationId xmlns:a16="http://schemas.microsoft.com/office/drawing/2014/main" id="{87958C8B-5E43-4758-86B4-116D0D97119C}"/>
+              </a:ext>
+            </a:extLst>
+          </p:cNvPr>
+          <p:cNvSpPr>
+            <a:spLocks noGrp="1"/>
+          </p:cNvSpPr>
+          <p:nvPr/>
+        </p:nvSpPr>
+        <p:spPr>
+          <a:xfrm>
+            <a:off x="6457950" y="4286250"/>
+            <a:ext cx="2762250" cy="228600"/>
+          </a:xfrm>
+          <a:prstGeom prst="rect">
+            <a:avLst/>
+          </a:prstGeom>
+          <a:solidFill>
+            <a:srgbClr val="FFFFFF">
+              <a:alpha val="0"/>
+            </a:srgbClr>
+          </a:solidFill>
+          <a:ln w="0">
+            <a:solidFill>
+              <a:srgbClr val="000000">
+                <a:alpha val="0"/>
+              </a:srgbClr>
+            </a:solidFill>
+            <a:prstDash val="solid"/>
+          </a:ln>
+        </p:spPr>
+        <p:txBody>
+          <a:bodyPr lIns="0" tIns="0" rIns="0" bIns="0" anchor="t"/>
+          <a:lstStyle/>
+          <a:p>
+            <a:pPr algn="l">
+              <a:defRPr sz="1350" b="1">
+                <a:solidFill>
+                  <a:srgbClr val="1F252B"/>
+                </a:solidFill>
+              </a:defRPr>
+            </a:pPr>
+            <a:r>
+              <a:rPr sz="1350" b="1">
+                <a:solidFill>
+                  <a:srgbClr val="1F252B"/>
+                </a:solidFill>
+              </a:rPr>
+              <a:t>Leakage controls &amp; assumptions</a:t>
+            </a:r>
+          </a:p>
+        </p:txBody>
+      </p:sp>
+      <p:sp>
+        <p:nvSpPr>
+          <p:cNvPr id="41" name="Rechteck 40">
+            <a:extLst>
+              <a:ext uri="{FF2B5EF4-FFF2-40B4-BE49-F238E27FC236}">
+                <a16:creationId xmlns:a16="http://schemas.microsoft.com/office/drawing/2014/main" id="{817BFCFF-6D38-40FB-A98B-EEAB9EB9B114}"/>
+              </a:ext>
+            </a:extLst>
+          </p:cNvPr>
+          <p:cNvSpPr>
+            <a:spLocks noGrp="1"/>
+          </p:cNvSpPr>
+          <p:nvPr/>
+        </p:nvSpPr>
+        <p:spPr>
+          <a:xfrm>
+            <a:off x="6457950" y="4636315"/>
+            <a:ext cx="66675" cy="66675"/>
+          </a:xfrm>
+          <a:prstGeom prst="rect">
+            <a:avLst/>
+          </a:prstGeom>
+          <a:solidFill>
+            <a:srgbClr val="910830"/>
+          </a:solidFill>
+          <a:ln w="0">
+            <a:solidFill>
+              <a:srgbClr val="000000">
+                <a:alpha val="0"/>
+              </a:srgbClr>
+            </a:solidFill>
+            <a:prstDash val="solid"/>
+          </a:ln>
+        </p:spPr>
+        <p:txBody>
+          <a:bodyPr/>
+          <a:lstStyle/>
+          <a:p>
+            <a:endParaRPr lang="en-US"/>
+          </a:p>
+        </p:txBody>
+      </p:sp>
+      <p:sp>
+        <p:nvSpPr>
+          <p:cNvPr id="42" name="Rechteck 41">
+            <a:extLst>
+              <a:ext uri="{FF2B5EF4-FFF2-40B4-BE49-F238E27FC236}">
+                <a16:creationId xmlns:a16="http://schemas.microsoft.com/office/drawing/2014/main" id="{8430B561-793C-4562-BA57-E4DB9431C0E3}"/>
+              </a:ext>
+            </a:extLst>
+          </p:cNvPr>
+          <p:cNvSpPr>
+            <a:spLocks noGrp="1"/>
+          </p:cNvSpPr>
+          <p:nvPr/>
+        </p:nvSpPr>
+        <p:spPr>
+          <a:xfrm>
+            <a:off x="6629400" y="4600575"/>
+            <a:ext cx="1047750" cy="190500"/>
+          </a:xfrm>
+          <a:prstGeom prst="rect">
+            <a:avLst/>
+          </a:prstGeom>
+          <a:solidFill>
+            <a:srgbClr val="FFFFFF">
+              <a:alpha val="0"/>
+            </a:srgbClr>
+          </a:solidFill>
+          <a:ln w="0">
+            <a:solidFill>
+              <a:srgbClr val="000000">
+                <a:alpha val="0"/>
+              </a:srgbClr>
+            </a:solidFill>
+            <a:prstDash val="solid"/>
+          </a:ln>
+        </p:spPr>
+        <p:txBody>
+          <a:bodyPr lIns="0" tIns="0" rIns="0" bIns="0" anchor="t"/>
+          <a:lstStyle/>
+          <a:p>
+            <a:pPr algn="l">
+              <a:defRPr sz="975" b="1">
+                <a:solidFill>
+                  <a:srgbClr val="910830"/>
+                </a:solidFill>
+              </a:defRPr>
+            </a:pPr>
+            <a:r>
+              <a:rPr sz="975" b="1">
+                <a:solidFill>
+                  <a:srgbClr val="910830"/>
+                </a:solidFill>
+              </a:rPr>
+              <a:t>BikeCount</a:t>
+            </a:r>
+          </a:p>
+        </p:txBody>
+      </p:sp>
+      <p:sp>
+        <p:nvSpPr>
+          <p:cNvPr id="43" name="Rechteck 42">
+            <a:extLst>
+              <a:ext uri="{FF2B5EF4-FFF2-40B4-BE49-F238E27FC236}">
+                <a16:creationId xmlns:a16="http://schemas.microsoft.com/office/drawing/2014/main" id="{0F94B5AC-907A-47CE-86F2-9C2ED6852144}"/>
+              </a:ext>
+            </a:extLst>
+          </p:cNvPr>
+          <p:cNvSpPr>
+            <a:spLocks noGrp="1"/>
+          </p:cNvSpPr>
+          <p:nvPr/>
+        </p:nvSpPr>
+        <p:spPr>
+          <a:xfrm>
+            <a:off x="7658100" y="4600575"/>
+            <a:ext cx="3143250" cy="247650"/>
+          </a:xfrm>
+          <a:prstGeom prst="rect">
+            <a:avLst/>
+          </a:prstGeom>
+          <a:solidFill>
+            <a:srgbClr val="FFFFFF">
+              <a:alpha val="0"/>
+            </a:srgbClr>
+          </a:solidFill>
+          <a:ln w="0">
+            <a:solidFill>
+              <a:srgbClr val="000000">
+                <a:alpha val="0"/>
+              </a:srgbClr>
+            </a:solidFill>
+            <a:prstDash val="solid"/>
+          </a:ln>
+        </p:spPr>
+        <p:txBody>
+          <a:bodyPr lIns="0" tIns="0" rIns="0" bIns="0" anchor="t"/>
+          <a:lstStyle/>
+          <a:p>
+            <a:pPr algn="l">
+              <a:defRPr sz="900" b="0">
+                <a:solidFill>
+                  <a:srgbClr val="5E5E5D"/>
+                </a:solidFill>
+              </a:defRPr>
+            </a:pPr>
+            <a:r>
+              <a:rPr sz="900" b="0">
+                <a:solidFill>
+                  <a:srgbClr val="5E5E5D"/>
+                </a:solidFill>
+              </a:rPr>
+              <a:t>horizon-aware lags from known history</a:t>
+            </a:r>
+          </a:p>
+        </p:txBody>
+      </p:sp>
+      <p:sp>
+        <p:nvSpPr>
+          <p:cNvPr id="44" name="Rechteck 43">
+            <a:extLst>
+              <a:ext uri="{FF2B5EF4-FFF2-40B4-BE49-F238E27FC236}">
+                <a16:creationId xmlns:a16="http://schemas.microsoft.com/office/drawing/2014/main" id="{A33040F0-754D-4007-99E5-7B207392F8FB}"/>
+              </a:ext>
+            </a:extLst>
+          </p:cNvPr>
+          <p:cNvSpPr>
+            <a:spLocks noGrp="1"/>
+          </p:cNvSpPr>
+          <p:nvPr/>
+        </p:nvSpPr>
+        <p:spPr>
+          <a:xfrm>
+            <a:off x="6457950" y="4960165"/>
+            <a:ext cx="66675" cy="66675"/>
+          </a:xfrm>
+          <a:prstGeom prst="rect">
+            <a:avLst/>
+          </a:prstGeom>
+          <a:solidFill>
+            <a:srgbClr val="143164"/>
+          </a:solidFill>
+          <a:ln w="0">
+            <a:solidFill>
+              <a:srgbClr val="000000">
+                <a:alpha val="0"/>
+              </a:srgbClr>
+            </a:solidFill>
+            <a:prstDash val="solid"/>
+          </a:ln>
+        </p:spPr>
+        <p:txBody>
+          <a:bodyPr/>
+          <a:lstStyle/>
+          <a:p>
+            <a:endParaRPr lang="en-US"/>
+          </a:p>
+        </p:txBody>
+      </p:sp>
+      <p:sp>
+        <p:nvSpPr>
+          <p:cNvPr id="45" name="Rechteck 44">
+            <a:extLst>
+              <a:ext uri="{FF2B5EF4-FFF2-40B4-BE49-F238E27FC236}">
+                <a16:creationId xmlns:a16="http://schemas.microsoft.com/office/drawing/2014/main" id="{4FC82AC8-43DF-420C-A167-8E2B10AD59DD}"/>
+              </a:ext>
+            </a:extLst>
+          </p:cNvPr>
+          <p:cNvSpPr>
+            <a:spLocks noGrp="1"/>
+          </p:cNvSpPr>
+          <p:nvPr/>
+        </p:nvSpPr>
+        <p:spPr>
+          <a:xfrm>
+            <a:off x="6629400" y="4924425"/>
+            <a:ext cx="1047750" cy="190500"/>
+          </a:xfrm>
+          <a:prstGeom prst="rect">
+            <a:avLst/>
+          </a:prstGeom>
+          <a:solidFill>
+            <a:srgbClr val="FFFFFF">
+              <a:alpha val="0"/>
+            </a:srgbClr>
+          </a:solidFill>
+          <a:ln w="0">
+            <a:solidFill>
+              <a:srgbClr val="000000">
+                <a:alpha val="0"/>
+              </a:srgbClr>
+            </a:solidFill>
+            <a:prstDash val="solid"/>
+          </a:ln>
+        </p:spPr>
+        <p:txBody>
+          <a:bodyPr lIns="0" tIns="0" rIns="0" bIns="0" anchor="t"/>
+          <a:lstStyle/>
+          <a:p>
+            <a:pPr algn="l">
+              <a:defRPr sz="975" b="1">
+                <a:solidFill>
+                  <a:srgbClr val="143164"/>
+                </a:solidFill>
+              </a:defRPr>
+            </a:pPr>
+            <a:r>
+              <a:rPr sz="975" b="1">
+                <a:solidFill>
+                  <a:srgbClr val="143164"/>
+                </a:solidFill>
+              </a:rPr>
+              <a:t>Weather</a:t>
+            </a:r>
+          </a:p>
+        </p:txBody>
+      </p:sp>
+      <p:sp>
+        <p:nvSpPr>
+          <p:cNvPr id="46" name="Rechteck 45">
+            <a:extLst>
+              <a:ext uri="{FF2B5EF4-FFF2-40B4-BE49-F238E27FC236}">
+                <a16:creationId xmlns:a16="http://schemas.microsoft.com/office/drawing/2014/main" id="{5A425C54-5330-4790-90E8-C54D0D2D3EFA}"/>
+              </a:ext>
+            </a:extLst>
+          </p:cNvPr>
+          <p:cNvSpPr>
+            <a:spLocks noGrp="1"/>
+          </p:cNvSpPr>
+          <p:nvPr/>
+        </p:nvSpPr>
+        <p:spPr>
+          <a:xfrm>
+            <a:off x="7658100" y="4924425"/>
+            <a:ext cx="3143250" cy="247650"/>
+          </a:xfrm>
+          <a:prstGeom prst="rect">
+            <a:avLst/>
+          </a:prstGeom>
+          <a:solidFill>
+            <a:srgbClr val="FFFFFF">
+              <a:alpha val="0"/>
+            </a:srgbClr>
+          </a:solidFill>
+          <a:ln w="0">
+            <a:solidFill>
+              <a:srgbClr val="000000">
+                <a:alpha val="0"/>
+              </a:srgbClr>
+            </a:solidFill>
+            <a:prstDash val="solid"/>
+          </a:ln>
+        </p:spPr>
+        <p:txBody>
+          <a:bodyPr lIns="0" tIns="0" rIns="0" bIns="0" anchor="t"/>
+          <a:lstStyle/>
+          <a:p>
+            <a:pPr algn="l">
+              <a:defRPr sz="900" b="0">
+                <a:solidFill>
+                  <a:srgbClr val="5E5E5D"/>
+                </a:solidFill>
+              </a:defRPr>
+            </a:pPr>
+            <a:r>
+              <a:rPr sz="900" b="0">
+                <a:solidFill>
+                  <a:srgbClr val="5E5E5D"/>
+                </a:solidFill>
+              </a:rPr>
+              <a:t>target-hour values treated as exogenous input</a:t>
+            </a:r>
+          </a:p>
+        </p:txBody>
+      </p:sp>
+      <p:sp>
+        <p:nvSpPr>
+          <p:cNvPr id="47" name="Rechteck 46">
+            <a:extLst>
+              <a:ext uri="{FF2B5EF4-FFF2-40B4-BE49-F238E27FC236}">
+                <a16:creationId xmlns:a16="http://schemas.microsoft.com/office/drawing/2014/main" id="{0091FF00-5A1A-4488-8747-170724E654D3}"/>
+              </a:ext>
+            </a:extLst>
+          </p:cNvPr>
+          <p:cNvSpPr>
+            <a:spLocks noGrp="1"/>
+          </p:cNvSpPr>
+          <p:nvPr/>
+        </p:nvSpPr>
+        <p:spPr>
+          <a:xfrm>
+            <a:off x="6457950" y="5284015"/>
+            <a:ext cx="66675" cy="66675"/>
+          </a:xfrm>
+          <a:prstGeom prst="rect">
+            <a:avLst/>
+          </a:prstGeom>
+          <a:solidFill>
+            <a:srgbClr val="87BF2A"/>
+          </a:solidFill>
+          <a:ln w="0">
+            <a:solidFill>
+              <a:srgbClr val="000000">
+                <a:alpha val="0"/>
+              </a:srgbClr>
+            </a:solidFill>
+            <a:prstDash val="solid"/>
+          </a:ln>
+        </p:spPr>
+        <p:txBody>
+          <a:bodyPr/>
+          <a:lstStyle/>
+          <a:p>
+            <a:endParaRPr lang="en-US"/>
+          </a:p>
+        </p:txBody>
+      </p:sp>
+      <p:sp>
+        <p:nvSpPr>
+          <p:cNvPr id="48" name="Rechteck 47">
+            <a:extLst>
+              <a:ext uri="{FF2B5EF4-FFF2-40B4-BE49-F238E27FC236}">
+                <a16:creationId xmlns:a16="http://schemas.microsoft.com/office/drawing/2014/main" id="{8667804E-08CD-4AA3-9980-32AFF2505A47}"/>
+              </a:ext>
+            </a:extLst>
+          </p:cNvPr>
+          <p:cNvSpPr>
+            <a:spLocks noGrp="1"/>
+          </p:cNvSpPr>
+          <p:nvPr/>
+        </p:nvSpPr>
+        <p:spPr>
+          <a:xfrm>
+            <a:off x="6629400" y="5248275"/>
+            <a:ext cx="1047750" cy="190500"/>
+          </a:xfrm>
+          <a:prstGeom prst="rect">
+            <a:avLst/>
+          </a:prstGeom>
+          <a:solidFill>
+            <a:srgbClr val="FFFFFF">
+              <a:alpha val="0"/>
+            </a:srgbClr>
+          </a:solidFill>
+          <a:ln w="0">
+            <a:solidFill>
+              <a:srgbClr val="000000">
+                <a:alpha val="0"/>
+              </a:srgbClr>
+            </a:solidFill>
+            <a:prstDash val="solid"/>
+          </a:ln>
+        </p:spPr>
+        <p:txBody>
+          <a:bodyPr lIns="0" tIns="0" rIns="0" bIns="0" anchor="t"/>
+          <a:lstStyle/>
+          <a:p>
+            <a:pPr algn="l">
+              <a:defRPr sz="975" b="1">
+                <a:solidFill>
+                  <a:srgbClr val="87BF2A"/>
+                </a:solidFill>
+              </a:defRPr>
+            </a:pPr>
+            <a:r>
+              <a:rPr sz="975" b="1">
+                <a:solidFill>
+                  <a:srgbClr val="87BF2A"/>
+                </a:solidFill>
+              </a:rPr>
+              <a:t>Validation</a:t>
+            </a:r>
+          </a:p>
+        </p:txBody>
+      </p:sp>
+      <p:sp>
+        <p:nvSpPr>
+          <p:cNvPr id="49" name="Rechteck 48">
+            <a:extLst>
+              <a:ext uri="{FF2B5EF4-FFF2-40B4-BE49-F238E27FC236}">
+                <a16:creationId xmlns:a16="http://schemas.microsoft.com/office/drawing/2014/main" id="{56D8B6FD-C7BF-44A0-AC0F-CD9B2ECD0957}"/>
+              </a:ext>
+            </a:extLst>
+          </p:cNvPr>
+          <p:cNvSpPr>
+            <a:spLocks noGrp="1"/>
+          </p:cNvSpPr>
+          <p:nvPr/>
+        </p:nvSpPr>
+        <p:spPr>
+          <a:xfrm>
+            <a:off x="7658100" y="5248275"/>
+            <a:ext cx="3143250" cy="247650"/>
+          </a:xfrm>
+          <a:prstGeom prst="rect">
+            <a:avLst/>
+          </a:prstGeom>
+          <a:solidFill>
+            <a:srgbClr val="FFFFFF">
+              <a:alpha val="0"/>
+            </a:srgbClr>
+          </a:solidFill>
+          <a:ln w="0">
+            <a:solidFill>
+              <a:srgbClr val="000000">
+                <a:alpha val="0"/>
+              </a:srgbClr>
+            </a:solidFill>
+            <a:prstDash val="solid"/>
+          </a:ln>
+        </p:spPr>
+        <p:txBody>
+          <a:bodyPr lIns="0" tIns="0" rIns="0" bIns="0" anchor="t"/>
+          <a:lstStyle/>
+          <a:p>
+            <a:pPr algn="l">
+              <a:defRPr sz="900" b="0">
+                <a:solidFill>
+                  <a:srgbClr val="5E5E5D"/>
+                </a:solidFill>
+              </a:defRPr>
+            </a:pPr>
+            <a:r>
+              <a:rPr sz="900" b="0">
+                <a:solidFill>
+                  <a:srgbClr val="5E5E5D"/>
+                </a:solidFill>
+              </a:rPr>
+              <a:t>chronological rolling-origin CV</a:t>
+            </a:r>
+          </a:p>
+        </p:txBody>
+      </p:sp>
+      <p:sp>
+        <p:nvSpPr>
+          <p:cNvPr id="50" name="Abgerundetes Rechteck 49">
+            <a:extLst>
+              <a:ext uri="{FF2B5EF4-FFF2-40B4-BE49-F238E27FC236}">
+                <a16:creationId xmlns:a16="http://schemas.microsoft.com/office/drawing/2014/main" id="{2CCED4A2-AD72-47D1-8ECA-AA05782F3F9D}"/>
+              </a:ext>
+            </a:extLst>
+          </p:cNvPr>
+          <p:cNvSpPr>
+            <a:spLocks noGrp="1"/>
+          </p:cNvSpPr>
+          <p:nvPr/>
+        </p:nvSpPr>
+        <p:spPr>
+          <a:xfrm>
+            <a:off x="838200" y="5715000"/>
+            <a:ext cx="1466850" cy="514350"/>
+          </a:xfrm>
+          <a:prstGeom prst="roundRect">
+            <a:avLst>
+              <a:gd name="adj" fmla="val 9000"/>
+            </a:avLst>
+          </a:prstGeom>
+          <a:solidFill>
+            <a:srgbClr val="FFFFFF"/>
+          </a:solidFill>
+          <a:ln w="10478">
+            <a:solidFill>
+              <a:srgbClr val="EEF0F2"/>
+            </a:solidFill>
+            <a:prstDash val="solid"/>
+          </a:ln>
+        </p:spPr>
+        <p:txBody>
+          <a:bodyPr/>
+          <a:lstStyle/>
+          <a:p>
+            <a:endParaRPr lang="en-US"/>
+          </a:p>
+        </p:txBody>
+      </p:sp>
+      <p:sp>
+        <p:nvSpPr>
+          <p:cNvPr id="51" name="Rechteck 50">
+            <a:extLst>
+              <a:ext uri="{FF2B5EF4-FFF2-40B4-BE49-F238E27FC236}">
+                <a16:creationId xmlns:a16="http://schemas.microsoft.com/office/drawing/2014/main" id="{17DA67C2-8EE4-4C60-87BB-24B8A33232A8}"/>
+              </a:ext>
+            </a:extLst>
+          </p:cNvPr>
+          <p:cNvSpPr>
+            <a:spLocks noGrp="1"/>
+          </p:cNvSpPr>
+          <p:nvPr/>
+        </p:nvSpPr>
+        <p:spPr>
+          <a:xfrm>
+            <a:off x="990600" y="5762625"/>
+            <a:ext cx="1104900" cy="228600"/>
+          </a:xfrm>
+          <a:prstGeom prst="rect">
+            <a:avLst/>
+          </a:prstGeom>
+          <a:solidFill>
+            <a:srgbClr val="FFFFFF">
+              <a:alpha val="0"/>
+            </a:srgbClr>
+          </a:solidFill>
+          <a:ln w="0">
+            <a:solidFill>
+              <a:srgbClr val="000000">
+                <a:alpha val="0"/>
+              </a:srgbClr>
+            </a:solidFill>
+            <a:prstDash val="solid"/>
+          </a:ln>
+        </p:spPr>
+        <p:txBody>
+          <a:bodyPr lIns="0" tIns="0" rIns="0" bIns="0" anchor="t"/>
+          <a:lstStyle/>
+          <a:p>
+            <a:pPr algn="l">
+              <a:defRPr sz="1575" b="1">
+                <a:solidFill>
+                  <a:srgbClr val="910830"/>
+                </a:solidFill>
+              </a:defRPr>
+            </a:pPr>
+            <a:r>
+              <a:rPr sz="1575" b="1">
+                <a:solidFill>
+                  <a:srgbClr val="910830"/>
+                </a:solidFill>
+              </a:rPr>
+              <a:t>8,759</a:t>
+            </a:r>
+          </a:p>
+        </p:txBody>
+      </p:sp>
+      <p:sp>
+        <p:nvSpPr>
+          <p:cNvPr id="52" name="Rechteck 51">
+            <a:extLst>
+              <a:ext uri="{FF2B5EF4-FFF2-40B4-BE49-F238E27FC236}">
+                <a16:creationId xmlns:a16="http://schemas.microsoft.com/office/drawing/2014/main" id="{9850067A-F48D-4DCC-B7F2-8F7682850210}"/>
+              </a:ext>
+            </a:extLst>
+          </p:cNvPr>
+          <p:cNvSpPr>
+            <a:spLocks noGrp="1"/>
+          </p:cNvSpPr>
+          <p:nvPr/>
+        </p:nvSpPr>
+        <p:spPr>
+          <a:xfrm>
+            <a:off x="990600" y="6019800"/>
+            <a:ext cx="1104900" cy="171450"/>
+          </a:xfrm>
+          <a:prstGeom prst="rect">
+            <a:avLst/>
+          </a:prstGeom>
+          <a:solidFill>
+            <a:srgbClr val="FFFFFF">
+              <a:alpha val="0"/>
+            </a:srgbClr>
+          </a:solidFill>
+          <a:ln w="0">
+            <a:solidFill>
+              <a:srgbClr val="000000">
+                <a:alpha val="0"/>
+              </a:srgbClr>
+            </a:solidFill>
+            <a:prstDash val="solid"/>
+          </a:ln>
+        </p:spPr>
+        <p:txBody>
+          <a:bodyPr lIns="0" tIns="0" rIns="0" bIns="0" anchor="t"/>
+          <a:lstStyle/>
+          <a:p>
+            <a:pPr algn="l">
+              <a:defRPr sz="825" b="0">
+                <a:solidFill>
+                  <a:srgbClr val="5E5E5D"/>
+                </a:solidFill>
+              </a:defRPr>
+            </a:pPr>
+            <a:r>
+              <a:rPr sz="825" b="0">
+                <a:solidFill>
+                  <a:srgbClr val="5E5E5D"/>
+                </a:solidFill>
+              </a:rPr>
+              <a:t>clean rows</a:t>
+            </a:r>
+          </a:p>
+        </p:txBody>
+      </p:sp>
+      <p:sp>
+        <p:nvSpPr>
+          <p:cNvPr id="53" name="Abgerundetes Rechteck 52">
+            <a:extLst>
+              <a:ext uri="{FF2B5EF4-FFF2-40B4-BE49-F238E27FC236}">
+                <a16:creationId xmlns:a16="http://schemas.microsoft.com/office/drawing/2014/main" id="{95485292-D4BD-420A-AE56-3CF79E99E498}"/>
+              </a:ext>
+            </a:extLst>
+          </p:cNvPr>
+          <p:cNvSpPr>
+            <a:spLocks noGrp="1"/>
+          </p:cNvSpPr>
+          <p:nvPr/>
+        </p:nvSpPr>
+        <p:spPr>
+          <a:xfrm>
+            <a:off x="2495550" y="5715000"/>
+            <a:ext cx="1466850" cy="514350"/>
+          </a:xfrm>
+          <a:prstGeom prst="roundRect">
+            <a:avLst>
+              <a:gd name="adj" fmla="val 9000"/>
+            </a:avLst>
+          </a:prstGeom>
+          <a:solidFill>
+            <a:srgbClr val="FFFFFF"/>
+          </a:solidFill>
+          <a:ln w="10478">
+            <a:solidFill>
+              <a:srgbClr val="EEF0F2"/>
+            </a:solidFill>
+            <a:prstDash val="solid"/>
+          </a:ln>
+        </p:spPr>
+        <p:txBody>
+          <a:bodyPr/>
+          <a:lstStyle/>
+          <a:p>
+            <a:endParaRPr lang="en-US"/>
+          </a:p>
+        </p:txBody>
+      </p:sp>
+      <p:sp>
+        <p:nvSpPr>
+          <p:cNvPr id="54" name="Rechteck 53">
+            <a:extLst>
+              <a:ext uri="{FF2B5EF4-FFF2-40B4-BE49-F238E27FC236}">
+                <a16:creationId xmlns:a16="http://schemas.microsoft.com/office/drawing/2014/main" id="{220CD736-3F6C-428D-A8A1-8B5868738F8C}"/>
+              </a:ext>
+            </a:extLst>
+          </p:cNvPr>
+          <p:cNvSpPr>
+            <a:spLocks noGrp="1"/>
+          </p:cNvSpPr>
+          <p:nvPr/>
+        </p:nvSpPr>
+        <p:spPr>
+          <a:xfrm>
+            <a:off x="2647950" y="5762625"/>
+            <a:ext cx="1104900" cy="228600"/>
+          </a:xfrm>
+          <a:prstGeom prst="rect">
+            <a:avLst/>
+          </a:prstGeom>
+          <a:solidFill>
+            <a:srgbClr val="FFFFFF">
+              <a:alpha val="0"/>
+            </a:srgbClr>
+          </a:solidFill>
+          <a:ln w="0">
+            <a:solidFill>
+              <a:srgbClr val="000000">
+                <a:alpha val="0"/>
+              </a:srgbClr>
+            </a:solidFill>
+            <a:prstDash val="solid"/>
+          </a:ln>
+        </p:spPr>
+        <p:txBody>
+          <a:bodyPr lIns="0" tIns="0" rIns="0" bIns="0" anchor="t"/>
+          <a:lstStyle/>
+          <a:p>
+            <a:pPr algn="l">
+              <a:defRPr sz="1575" b="1">
+                <a:solidFill>
+                  <a:srgbClr val="143164"/>
+                </a:solidFill>
+              </a:defRPr>
+            </a:pPr>
+            <a:r>
+              <a:rPr sz="1575" b="1">
+                <a:solidFill>
+                  <a:srgbClr val="143164"/>
+                </a:solidFill>
+              </a:rPr>
+              <a:t>7</a:t>
+            </a:r>
+          </a:p>
+        </p:txBody>
+      </p:sp>
+      <p:sp>
+        <p:nvSpPr>
+          <p:cNvPr id="55" name="Rechteck 54">
+            <a:extLst>
+              <a:ext uri="{FF2B5EF4-FFF2-40B4-BE49-F238E27FC236}">
+                <a16:creationId xmlns:a16="http://schemas.microsoft.com/office/drawing/2014/main" id="{5DB3E6F0-5AD6-4F9A-AA7C-0ED0D4FE8039}"/>
+              </a:ext>
+            </a:extLst>
+          </p:cNvPr>
+          <p:cNvSpPr>
+            <a:spLocks noGrp="1"/>
+          </p:cNvSpPr>
+          <p:nvPr/>
+        </p:nvSpPr>
+        <p:spPr>
+          <a:xfrm>
+            <a:off x="2647950" y="6019800"/>
+            <a:ext cx="1104900" cy="171450"/>
+          </a:xfrm>
+          <a:prstGeom prst="rect">
+            <a:avLst/>
+          </a:prstGeom>
+          <a:solidFill>
+            <a:srgbClr val="FFFFFF">
+              <a:alpha val="0"/>
+            </a:srgbClr>
+          </a:solidFill>
+          <a:ln w="0">
+            <a:solidFill>
+              <a:srgbClr val="000000">
+                <a:alpha val="0"/>
+              </a:srgbClr>
+            </a:solidFill>
+            <a:prstDash val="solid"/>
+          </a:ln>
+        </p:spPr>
+        <p:txBody>
+          <a:bodyPr lIns="0" tIns="0" rIns="0" bIns="0" anchor="t"/>
+          <a:lstStyle/>
+          <a:p>
+            <a:pPr algn="l">
+              <a:defRPr sz="825" b="0">
+                <a:solidFill>
+                  <a:srgbClr val="5E5E5D"/>
+                </a:solidFill>
+              </a:defRPr>
+            </a:pPr>
+            <a:r>
+              <a:rPr sz="825" b="0">
+                <a:solidFill>
+                  <a:srgbClr val="5E5E5D"/>
+                </a:solidFill>
+              </a:rPr>
+              <a:t>model candidates</a:t>
+            </a:r>
+          </a:p>
+        </p:txBody>
+      </p:sp>
+      <p:sp>
+        <p:nvSpPr>
+          <p:cNvPr id="56" name="Abgerundetes Rechteck 55">
+            <a:extLst>
+              <a:ext uri="{FF2B5EF4-FFF2-40B4-BE49-F238E27FC236}">
+                <a16:creationId xmlns:a16="http://schemas.microsoft.com/office/drawing/2014/main" id="{25A4B556-988A-4F9D-95AA-C914031B8BD1}"/>
+              </a:ext>
+            </a:extLst>
+          </p:cNvPr>
+          <p:cNvSpPr>
+            <a:spLocks noGrp="1"/>
+          </p:cNvSpPr>
+          <p:nvPr/>
+        </p:nvSpPr>
+        <p:spPr>
+          <a:xfrm>
+            <a:off x="4152900" y="5715000"/>
+            <a:ext cx="1466850" cy="514350"/>
+          </a:xfrm>
+          <a:prstGeom prst="roundRect">
+            <a:avLst>
+              <a:gd name="adj" fmla="val 9000"/>
+            </a:avLst>
+          </a:prstGeom>
+          <a:solidFill>
+            <a:srgbClr val="FFFFFF"/>
+          </a:solidFill>
+          <a:ln w="10478">
+            <a:solidFill>
+              <a:srgbClr val="EEF0F2"/>
+            </a:solidFill>
+            <a:prstDash val="solid"/>
+          </a:ln>
+        </p:spPr>
+        <p:txBody>
+          <a:bodyPr/>
+          <a:lstStyle/>
+          <a:p>
+            <a:endParaRPr lang="en-US"/>
+          </a:p>
+        </p:txBody>
+      </p:sp>
+      <p:sp>
+        <p:nvSpPr>
+          <p:cNvPr id="57" name="Rechteck 56">
+            <a:extLst>
+              <a:ext uri="{FF2B5EF4-FFF2-40B4-BE49-F238E27FC236}">
+                <a16:creationId xmlns:a16="http://schemas.microsoft.com/office/drawing/2014/main" id="{1E1CE550-B121-449A-8FEB-BBEE82FE930C}"/>
+              </a:ext>
+            </a:extLst>
+          </p:cNvPr>
+          <p:cNvSpPr>
+            <a:spLocks noGrp="1"/>
+          </p:cNvSpPr>
+          <p:nvPr/>
+        </p:nvSpPr>
+        <p:spPr>
+          <a:xfrm>
+            <a:off x="4305300" y="5762625"/>
+            <a:ext cx="1104900" cy="228600"/>
+          </a:xfrm>
+          <a:prstGeom prst="rect">
+            <a:avLst/>
+          </a:prstGeom>
+          <a:solidFill>
+            <a:srgbClr val="FFFFFF">
+              <a:alpha val="0"/>
+            </a:srgbClr>
+          </a:solidFill>
+          <a:ln w="0">
+            <a:solidFill>
+              <a:srgbClr val="000000">
+                <a:alpha val="0"/>
+              </a:srgbClr>
+            </a:solidFill>
+            <a:prstDash val="solid"/>
+          </a:ln>
+        </p:spPr>
+        <p:txBody>
+          <a:bodyPr lIns="0" tIns="0" rIns="0" bIns="0" anchor="t"/>
+          <a:lstStyle/>
+          <a:p>
+            <a:pPr algn="l">
+              <a:defRPr sz="1575" b="1">
+                <a:solidFill>
+                  <a:srgbClr val="87BF2A"/>
+                </a:solidFill>
+              </a:defRPr>
+            </a:pPr>
+            <a:r>
+              <a:rPr sz="1575" b="1">
+                <a:solidFill>
+                  <a:srgbClr val="87BF2A"/>
+                </a:solidFill>
+              </a:rPr>
+              <a:t>14</a:t>
+            </a:r>
+          </a:p>
+        </p:txBody>
+      </p:sp>
+      <p:sp>
+        <p:nvSpPr>
+          <p:cNvPr id="58" name="Rechteck 57">
+            <a:extLst>
+              <a:ext uri="{FF2B5EF4-FFF2-40B4-BE49-F238E27FC236}">
+                <a16:creationId xmlns:a16="http://schemas.microsoft.com/office/drawing/2014/main" id="{6D222C3C-8D5E-495D-902A-696F50AF3690}"/>
+              </a:ext>
+            </a:extLst>
+          </p:cNvPr>
+          <p:cNvSpPr>
+            <a:spLocks noGrp="1"/>
+          </p:cNvSpPr>
+          <p:nvPr/>
+        </p:nvSpPr>
+        <p:spPr>
+          <a:xfrm>
+            <a:off x="4305300" y="6019800"/>
+            <a:ext cx="1104900" cy="171450"/>
+          </a:xfrm>
+          <a:prstGeom prst="rect">
+            <a:avLst/>
+          </a:prstGeom>
+          <a:solidFill>
+            <a:srgbClr val="FFFFFF">
+              <a:alpha val="0"/>
+            </a:srgbClr>
+          </a:solidFill>
+          <a:ln w="0">
+            <a:solidFill>
+              <a:srgbClr val="000000">
+                <a:alpha val="0"/>
+              </a:srgbClr>
+            </a:solidFill>
+            <a:prstDash val="solid"/>
+          </a:ln>
+        </p:spPr>
+        <p:txBody>
+          <a:bodyPr lIns="0" tIns="0" rIns="0" bIns="0" anchor="t"/>
+          <a:lstStyle/>
+          <a:p>
+            <a:pPr algn="l">
+              <a:defRPr sz="825" b="0">
+                <a:solidFill>
+                  <a:srgbClr val="5E5E5D"/>
+                </a:solidFill>
+              </a:defRPr>
+            </a:pPr>
+            <a:r>
+              <a:rPr sz="825" b="0">
+                <a:solidFill>
+                  <a:srgbClr val="5E5E5D"/>
+                </a:solidFill>
+              </a:rPr>
+              <a:t>CV windows / horizon</a:t>
+            </a:r>
+          </a:p>
+        </p:txBody>
+      </p:sp>
     </p:spTree>
     <p:extLst>
       <p:ext uri="{BB962C8B-B14F-4D97-AF65-F5344CB8AC3E}">
-        <p14:creationId xmlns:p14="http://schemas.microsoft.com/office/powerpoint/2010/main" val="1087381422"/>
+        <p14:creationId xmlns:p14="http://schemas.microsoft.com/office/powerpoint/2010/main" val="1403712751"/>
       </p:ext>
     </p:extLst>
   </p:cSld>
+  <p:clrMapOvr>
+    <a:masterClrMapping/>
+  </p:clrMapOvr>
 </p:sld>
 </file>
 
 <file path=ppt/slides/slide2.xml><?xml version="1.0" encoding="utf-8"?>
-<p:sld xmlns:p="http://schemas.openxmlformats.org/presentationml/2006/main">
+<p:sld xmlns:a="http://schemas.openxmlformats.org/drawingml/2006/main" xmlns:r="http://schemas.openxmlformats.org/officeDocument/2006/relationships" xmlns:p="http://schemas.openxmlformats.org/presentationml/2006/main">
   <p:cSld>
     <p:bg>
       <p:bgPr>
-        <a:solidFill xmlns:a="http://schemas.openxmlformats.org/drawingml/2006/main">
+        <a:solidFill>
           <a:srgbClr val="FFFFFF"/>
         </a:solidFill>
+        <a:effectLst/>
       </p:bgPr>
     </p:bg>
     <p:spTree>
@@ -1150,84 +3983,4107 @@
         <p:nvPr/>
       </p:nvGrpSpPr>
       <p:grpSpPr>
-        <a:xfrm xmlns:a="http://schemas.openxmlformats.org/drawingml/2006/main"/>
+        <a:xfrm>
+          <a:off x="0" y="0"/>
+          <a:ext cx="0" cy="0"/>
+          <a:chOff x="0" y="0"/>
+          <a:chExt cx="0" cy="0"/>
+        </a:xfrm>
       </p:grpSpPr>
-      <p:sp>
-        <p:nvSpPr>
-          <p:cNvPr id="1" name="Slide Number Placeholder 5">
-            <a:extLst xmlns:a="http://schemas.openxmlformats.org/drawingml/2006/main">
-              <a:ext uri="{FF2B5EF4-FFF2-40B4-BE49-F238E27FC236}">
-                <a16:creationId xmlns:a16="http://schemas.microsoft.com/office/drawing/2014/main" id="{EAF96064-9C18-412C-9CCF-EEE58A2F07D2}"/>
-              </a:ext>
-            </a:extLst>
-          </p:cNvPr>
-          <p:cNvSpPr>
-            <a:spLocks xmlns:a="http://schemas.openxmlformats.org/drawingml/2006/main" noGrp="1"/>
-          </p:cNvSpPr>
-          <p:nvPr>
-            <p:ph type="sldNum" idx="12"/>
-          </p:nvPr>
-        </p:nvSpPr>
-        <p:spPr>
-          <a:xfrm xmlns:a="http://schemas.openxmlformats.org/drawingml/2006/main">
-            <a:off x="1524000" y="1122363"/>
-            <a:ext cx="9144000" cy="2387600"/>
-          </a:xfrm>
-        </p:spPr>
-        <p:txBody>
-          <a:bodyPr xmlns:a="http://schemas.openxmlformats.org/drawingml/2006/main"/>
-          <a:lstStyle xmlns:a="http://schemas.openxmlformats.org/drawingml/2006/main"/>
-          <a:p xmlns:a="http://schemas.openxmlformats.org/drawingml/2006/main">
-            <a:r>
-              <a:t/>
-            </a:r>
-          </a:p>
-        </p:txBody>
-      </p:sp>
       <p:pic>
         <p:nvPicPr>
-          <p:cNvPr id="2" name=""/>
+          <p:cNvPr id="2" name="Grafik 1"/>
           <p:cNvPicPr>
-            <a:picLocks xmlns:a="http://schemas.openxmlformats.org/drawingml/2006/main" noChangeAspect="1"/>
+            <a:picLocks noChangeAspect="1"/>
           </p:cNvPicPr>
           <p:nvPr/>
         </p:nvPicPr>
         <p:blipFill>
-          <a:blip xmlns:r="http://schemas.openxmlformats.org/officeDocument/2006/relationships" xmlns:a="http://schemas.openxmlformats.org/drawingml/2006/main" r:embed="R99135f3b74d34467"/>
-          <a:srcRect xmlns:a="http://schemas.openxmlformats.org/drawingml/2006/main" l="0" t="0" r="0" b="0"/>
-          <a:stretch xmlns:a="http://schemas.openxmlformats.org/drawingml/2006/main">
-            <a:fillRect l="0" t="0" r="0" b="0"/>
-          </a:stretch>
+          <a:blip r:embed="rId3"/>
+          <a:stretch/>
         </p:blipFill>
         <p:spPr>
-          <a:xfrm xmlns:a="http://schemas.openxmlformats.org/drawingml/2006/main">
-            <a:off x="0" y="0"/>
-            <a:ext cx="12192000" cy="6858000"/>
-          </a:xfrm>
-          <a:prstGeom xmlns:a="http://schemas.openxmlformats.org/drawingml/2006/main" prst="rect">
+          <a:xfrm>
+            <a:off x="840201" y="533400"/>
+            <a:ext cx="1996248" cy="552450"/>
+          </a:xfrm>
+          <a:prstGeom prst="rect">
             <a:avLst/>
           </a:prstGeom>
         </p:spPr>
       </p:pic>
+      <p:pic>
+        <p:nvPicPr>
+          <p:cNvPr id="3" name="Grafik 2"/>
+          <p:cNvPicPr>
+            <a:picLocks noChangeAspect="1"/>
+          </p:cNvPicPr>
+          <p:nvPr/>
+        </p:nvPicPr>
+        <p:blipFill>
+          <a:blip r:embed="rId4"/>
+          <a:stretch/>
+        </p:blipFill>
+        <p:spPr>
+          <a:xfrm>
+            <a:off x="9791700" y="460356"/>
+            <a:ext cx="1619250" cy="946188"/>
+          </a:xfrm>
+          <a:prstGeom prst="rect">
+            <a:avLst/>
+          </a:prstGeom>
+        </p:spPr>
+      </p:pic>
+      <p:sp>
+        <p:nvSpPr>
+          <p:cNvPr id="4" name="Rechteck 3">
+            <a:extLst>
+              <a:ext uri="{FF2B5EF4-FFF2-40B4-BE49-F238E27FC236}">
+                <a16:creationId xmlns:a16="http://schemas.microsoft.com/office/drawing/2014/main" id="{98EA5031-3B8A-444B-8A7B-AF477D0C444A}"/>
+              </a:ext>
+            </a:extLst>
+          </p:cNvPr>
+          <p:cNvSpPr>
+            <a:spLocks noGrp="1"/>
+          </p:cNvSpPr>
+          <p:nvPr/>
+        </p:nvSpPr>
+        <p:spPr>
+          <a:xfrm>
+            <a:off x="838200" y="1314450"/>
+            <a:ext cx="7429500" cy="228600"/>
+          </a:xfrm>
+          <a:prstGeom prst="rect">
+            <a:avLst/>
+          </a:prstGeom>
+          <a:solidFill>
+            <a:srgbClr val="FFFFFF">
+              <a:alpha val="0"/>
+            </a:srgbClr>
+          </a:solidFill>
+          <a:ln w="0">
+            <a:solidFill>
+              <a:srgbClr val="000000">
+                <a:alpha val="0"/>
+              </a:srgbClr>
+            </a:solidFill>
+            <a:prstDash val="solid"/>
+          </a:ln>
+        </p:spPr>
+        <p:txBody>
+          <a:bodyPr lIns="0" tIns="0" rIns="0" bIns="0" anchor="t"/>
+          <a:lstStyle/>
+          <a:p>
+            <a:pPr algn="l">
+              <a:defRPr sz="1125" b="1">
+                <a:solidFill>
+                  <a:srgbClr val="5E5E5D"/>
+                </a:solidFill>
+              </a:defRPr>
+            </a:pPr>
+            <a:r>
+              <a:rPr sz="1125" b="1">
+                <a:solidFill>
+                  <a:srgbClr val="5E5E5D"/>
+                </a:solidFill>
+              </a:rPr>
+              <a:t>Results</a:t>
+            </a:r>
+          </a:p>
+        </p:txBody>
+      </p:sp>
+      <p:sp>
+        <p:nvSpPr>
+          <p:cNvPr id="5" name="Rechteck 4">
+            <a:extLst>
+              <a:ext uri="{FF2B5EF4-FFF2-40B4-BE49-F238E27FC236}">
+                <a16:creationId xmlns:a16="http://schemas.microsoft.com/office/drawing/2014/main" id="{7576AC9A-8EB2-4252-8069-8AFA00062C47}"/>
+              </a:ext>
+            </a:extLst>
+          </p:cNvPr>
+          <p:cNvSpPr>
+            <a:spLocks noGrp="1"/>
+          </p:cNvSpPr>
+          <p:nvPr/>
+        </p:nvSpPr>
+        <p:spPr>
+          <a:xfrm>
+            <a:off x="476250" y="6305550"/>
+            <a:ext cx="11315700" cy="19050"/>
+          </a:xfrm>
+          <a:prstGeom prst="rect">
+            <a:avLst/>
+          </a:prstGeom>
+          <a:solidFill>
+            <a:srgbClr val="910830"/>
+          </a:solidFill>
+          <a:ln w="0">
+            <a:solidFill>
+              <a:srgbClr val="000000">
+                <a:alpha val="0"/>
+              </a:srgbClr>
+            </a:solidFill>
+            <a:prstDash val="solid"/>
+          </a:ln>
+        </p:spPr>
+        <p:txBody>
+          <a:bodyPr/>
+          <a:lstStyle/>
+          <a:p>
+            <a:endParaRPr lang="en-US"/>
+          </a:p>
+        </p:txBody>
+      </p:sp>
+      <p:sp>
+        <p:nvSpPr>
+          <p:cNvPr id="6" name="Rechteck 5">
+            <a:extLst>
+              <a:ext uri="{FF2B5EF4-FFF2-40B4-BE49-F238E27FC236}">
+                <a16:creationId xmlns:a16="http://schemas.microsoft.com/office/drawing/2014/main" id="{496D2B64-64BD-4DDD-AFDD-BA729CBD4993}"/>
+              </a:ext>
+            </a:extLst>
+          </p:cNvPr>
+          <p:cNvSpPr>
+            <a:spLocks noGrp="1"/>
+          </p:cNvSpPr>
+          <p:nvPr/>
+        </p:nvSpPr>
+        <p:spPr>
+          <a:xfrm>
+            <a:off x="476250" y="6438900"/>
+            <a:ext cx="4953000" cy="228600"/>
+          </a:xfrm>
+          <a:prstGeom prst="rect">
+            <a:avLst/>
+          </a:prstGeom>
+          <a:solidFill>
+            <a:srgbClr val="FFFFFF">
+              <a:alpha val="0"/>
+            </a:srgbClr>
+          </a:solidFill>
+          <a:ln w="0">
+            <a:solidFill>
+              <a:srgbClr val="000000">
+                <a:alpha val="0"/>
+              </a:srgbClr>
+            </a:solidFill>
+            <a:prstDash val="solid"/>
+          </a:ln>
+        </p:spPr>
+        <p:txBody>
+          <a:bodyPr lIns="0" tIns="0" rIns="0" bIns="0" anchor="t"/>
+          <a:lstStyle/>
+          <a:p>
+            <a:pPr algn="l">
+              <a:defRPr sz="1050" b="1">
+                <a:solidFill>
+                  <a:srgbClr val="5E5E5D"/>
+                </a:solidFill>
+              </a:defRPr>
+            </a:pPr>
+            <a:r>
+              <a:rPr sz="1050" b="1">
+                <a:solidFill>
+                  <a:srgbClr val="5E5E5D"/>
+                </a:solidFill>
+              </a:rPr>
+              <a:t>Group 18 | Bike Count Estimation</a:t>
+            </a:r>
+          </a:p>
+        </p:txBody>
+      </p:sp>
+      <p:sp>
+        <p:nvSpPr>
+          <p:cNvPr id="7" name="Rechteck 6">
+            <a:extLst>
+              <a:ext uri="{FF2B5EF4-FFF2-40B4-BE49-F238E27FC236}">
+                <a16:creationId xmlns:a16="http://schemas.microsoft.com/office/drawing/2014/main" id="{4F0BEDD3-2F3B-4C9C-915F-A5C564344333}"/>
+              </a:ext>
+            </a:extLst>
+          </p:cNvPr>
+          <p:cNvSpPr>
+            <a:spLocks noGrp="1"/>
+          </p:cNvSpPr>
+          <p:nvPr/>
+        </p:nvSpPr>
+        <p:spPr>
+          <a:xfrm>
+            <a:off x="10668000" y="6438900"/>
+            <a:ext cx="1123950" cy="228600"/>
+          </a:xfrm>
+          <a:prstGeom prst="rect">
+            <a:avLst/>
+          </a:prstGeom>
+          <a:solidFill>
+            <a:srgbClr val="FFFFFF">
+              <a:alpha val="0"/>
+            </a:srgbClr>
+          </a:solidFill>
+          <a:ln w="0">
+            <a:solidFill>
+              <a:srgbClr val="000000">
+                <a:alpha val="0"/>
+              </a:srgbClr>
+            </a:solidFill>
+            <a:prstDash val="solid"/>
+          </a:ln>
+        </p:spPr>
+        <p:txBody>
+          <a:bodyPr lIns="0" tIns="0" rIns="0" bIns="0" anchor="t"/>
+          <a:lstStyle/>
+          <a:p>
+            <a:pPr algn="r">
+              <a:defRPr sz="1050" b="1">
+                <a:solidFill>
+                  <a:srgbClr val="5E5E5D"/>
+                </a:solidFill>
+              </a:defRPr>
+            </a:pPr>
+            <a:r>
+              <a:rPr sz="1050" b="1">
+                <a:solidFill>
+                  <a:srgbClr val="5E5E5D"/>
+                </a:solidFill>
+              </a:rPr>
+              <a:t>2 / 2</a:t>
+            </a:r>
+          </a:p>
+        </p:txBody>
+      </p:sp>
+      <p:sp>
+        <p:nvSpPr>
+          <p:cNvPr id="8" name="Rechteck 7">
+            <a:extLst>
+              <a:ext uri="{FF2B5EF4-FFF2-40B4-BE49-F238E27FC236}">
+                <a16:creationId xmlns:a16="http://schemas.microsoft.com/office/drawing/2014/main" id="{DD6BF0C5-420B-4A8D-9BC4-113038561A59}"/>
+              </a:ext>
+            </a:extLst>
+          </p:cNvPr>
+          <p:cNvSpPr>
+            <a:spLocks noGrp="1"/>
+          </p:cNvSpPr>
+          <p:nvPr/>
+        </p:nvSpPr>
+        <p:spPr>
+          <a:xfrm>
+            <a:off x="838200" y="1695450"/>
+            <a:ext cx="9906000" cy="514350"/>
+          </a:xfrm>
+          <a:prstGeom prst="rect">
+            <a:avLst/>
+          </a:prstGeom>
+          <a:solidFill>
+            <a:srgbClr val="FFFFFF">
+              <a:alpha val="0"/>
+            </a:srgbClr>
+          </a:solidFill>
+          <a:ln w="0">
+            <a:solidFill>
+              <a:srgbClr val="000000">
+                <a:alpha val="0"/>
+              </a:srgbClr>
+            </a:solidFill>
+            <a:prstDash val="solid"/>
+          </a:ln>
+        </p:spPr>
+        <p:txBody>
+          <a:bodyPr lIns="0" tIns="0" rIns="0" bIns="0" anchor="t">
+            <a:normAutofit/>
+          </a:bodyPr>
+          <a:lstStyle/>
+          <a:p>
+            <a:pPr algn="l">
+              <a:defRPr sz="2250" b="1">
+                <a:solidFill>
+                  <a:srgbClr val="910830"/>
+                </a:solidFill>
+              </a:defRPr>
+            </a:pPr>
+            <a:r>
+              <a:rPr sz="2250" b="1">
+                <a:solidFill>
+                  <a:srgbClr val="910830"/>
+                </a:solidFill>
+              </a:rPr>
+              <a:t>From model comparison to final XGBoost</a:t>
+            </a:r>
+          </a:p>
+        </p:txBody>
+      </p:sp>
+      <p:sp>
+        <p:nvSpPr>
+          <p:cNvPr id="9" name="Rechteck 8">
+            <a:extLst>
+              <a:ext uri="{FF2B5EF4-FFF2-40B4-BE49-F238E27FC236}">
+                <a16:creationId xmlns:a16="http://schemas.microsoft.com/office/drawing/2014/main" id="{3E5CEFC7-704A-4B4D-9B9F-437377569D78}"/>
+              </a:ext>
+            </a:extLst>
+          </p:cNvPr>
+          <p:cNvSpPr>
+            <a:spLocks noGrp="1"/>
+          </p:cNvSpPr>
+          <p:nvPr/>
+        </p:nvSpPr>
+        <p:spPr>
+          <a:xfrm>
+            <a:off x="857250" y="2266950"/>
+            <a:ext cx="9906000" cy="361950"/>
+          </a:xfrm>
+          <a:prstGeom prst="rect">
+            <a:avLst/>
+          </a:prstGeom>
+          <a:solidFill>
+            <a:srgbClr val="FFFFFF">
+              <a:alpha val="0"/>
+            </a:srgbClr>
+          </a:solidFill>
+          <a:ln w="0">
+            <a:solidFill>
+              <a:srgbClr val="000000">
+                <a:alpha val="0"/>
+              </a:srgbClr>
+            </a:solidFill>
+            <a:prstDash val="solid"/>
+          </a:ln>
+        </p:spPr>
+        <p:txBody>
+          <a:bodyPr lIns="0" tIns="0" rIns="0" bIns="0" anchor="t"/>
+          <a:lstStyle/>
+          <a:p>
+            <a:pPr algn="l">
+              <a:defRPr sz="1200" b="0">
+                <a:solidFill>
+                  <a:srgbClr val="5E5E5D"/>
+                </a:solidFill>
+              </a:defRPr>
+            </a:pPr>
+            <a:r>
+              <a:rPr sz="1200" b="0">
+                <a:solidFill>
+                  <a:srgbClr val="5E5E5D"/>
+                </a:solidFill>
+              </a:rPr>
+              <a:t>We first compared simple baselines and required model families, then selected the strongest cross-validation performer.</a:t>
+            </a:r>
+          </a:p>
+        </p:txBody>
+      </p:sp>
+      <p:sp>
+        <p:nvSpPr>
+          <p:cNvPr id="10" name="Rechteck 9">
+            <a:extLst>
+              <a:ext uri="{FF2B5EF4-FFF2-40B4-BE49-F238E27FC236}">
+                <a16:creationId xmlns:a16="http://schemas.microsoft.com/office/drawing/2014/main" id="{B027A00E-1956-42A5-9776-089FFB08EE90}"/>
+              </a:ext>
+            </a:extLst>
+          </p:cNvPr>
+          <p:cNvSpPr>
+            <a:spLocks noGrp="1"/>
+          </p:cNvSpPr>
+          <p:nvPr/>
+        </p:nvSpPr>
+        <p:spPr>
+          <a:xfrm>
+            <a:off x="838200" y="2857500"/>
+            <a:ext cx="2095500" cy="228600"/>
+          </a:xfrm>
+          <a:prstGeom prst="rect">
+            <a:avLst/>
+          </a:prstGeom>
+          <a:solidFill>
+            <a:srgbClr val="FFFFFF">
+              <a:alpha val="0"/>
+            </a:srgbClr>
+          </a:solidFill>
+          <a:ln w="0">
+            <a:solidFill>
+              <a:srgbClr val="000000">
+                <a:alpha val="0"/>
+              </a:srgbClr>
+            </a:solidFill>
+            <a:prstDash val="solid"/>
+          </a:ln>
+        </p:spPr>
+        <p:txBody>
+          <a:bodyPr lIns="0" tIns="0" rIns="0" bIns="0" anchor="t"/>
+          <a:lstStyle/>
+          <a:p>
+            <a:pPr algn="l">
+              <a:defRPr sz="1350" b="1">
+                <a:solidFill>
+                  <a:srgbClr val="1F252B"/>
+                </a:solidFill>
+              </a:defRPr>
+            </a:pPr>
+            <a:r>
+              <a:rPr sz="1350" b="1">
+                <a:solidFill>
+                  <a:srgbClr val="1F252B"/>
+                </a:solidFill>
+              </a:rPr>
+              <a:t>Selection funnel</a:t>
+            </a:r>
+          </a:p>
+        </p:txBody>
+      </p:sp>
+      <p:sp>
+        <p:nvSpPr>
+          <p:cNvPr id="11" name="Abgerundetes Rechteck 10">
+            <a:extLst>
+              <a:ext uri="{FF2B5EF4-FFF2-40B4-BE49-F238E27FC236}">
+                <a16:creationId xmlns:a16="http://schemas.microsoft.com/office/drawing/2014/main" id="{98BB31E6-DE2E-4420-8214-644F31B40601}"/>
+              </a:ext>
+            </a:extLst>
+          </p:cNvPr>
+          <p:cNvSpPr>
+            <a:spLocks noGrp="1"/>
+          </p:cNvSpPr>
+          <p:nvPr/>
+        </p:nvSpPr>
+        <p:spPr>
+          <a:xfrm>
+            <a:off x="838200" y="3162300"/>
+            <a:ext cx="4191000" cy="685800"/>
+          </a:xfrm>
+          <a:prstGeom prst="roundRect">
+            <a:avLst>
+              <a:gd name="adj" fmla="val 9000"/>
+            </a:avLst>
+          </a:prstGeom>
+          <a:solidFill>
+            <a:srgbClr val="FFFFFF"/>
+          </a:solidFill>
+          <a:ln w="10478">
+            <a:solidFill>
+              <a:srgbClr val="EEF0F2"/>
+            </a:solidFill>
+            <a:prstDash val="solid"/>
+          </a:ln>
+        </p:spPr>
+        <p:txBody>
+          <a:bodyPr/>
+          <a:lstStyle/>
+          <a:p>
+            <a:endParaRPr lang="en-US"/>
+          </a:p>
+        </p:txBody>
+      </p:sp>
+      <p:sp>
+        <p:nvSpPr>
+          <p:cNvPr id="12" name="Rechteck 11">
+            <a:extLst>
+              <a:ext uri="{FF2B5EF4-FFF2-40B4-BE49-F238E27FC236}">
+                <a16:creationId xmlns:a16="http://schemas.microsoft.com/office/drawing/2014/main" id="{0986D13B-1712-49DD-A18E-83B72C0D7FBA}"/>
+              </a:ext>
+            </a:extLst>
+          </p:cNvPr>
+          <p:cNvSpPr>
+            <a:spLocks noGrp="1"/>
+          </p:cNvSpPr>
+          <p:nvPr/>
+        </p:nvSpPr>
+        <p:spPr>
+          <a:xfrm>
+            <a:off x="838200" y="3162300"/>
+            <a:ext cx="66675" cy="685800"/>
+          </a:xfrm>
+          <a:prstGeom prst="rect">
+            <a:avLst/>
+          </a:prstGeom>
+          <a:solidFill>
+            <a:srgbClr val="910830"/>
+          </a:solidFill>
+          <a:ln w="0">
+            <a:solidFill>
+              <a:srgbClr val="000000">
+                <a:alpha val="0"/>
+              </a:srgbClr>
+            </a:solidFill>
+            <a:prstDash val="solid"/>
+          </a:ln>
+        </p:spPr>
+        <p:txBody>
+          <a:bodyPr/>
+          <a:lstStyle/>
+          <a:p>
+            <a:endParaRPr lang="en-US"/>
+          </a:p>
+        </p:txBody>
+      </p:sp>
+      <p:sp>
+        <p:nvSpPr>
+          <p:cNvPr id="13" name="Rechteck 12">
+            <a:extLst>
+              <a:ext uri="{FF2B5EF4-FFF2-40B4-BE49-F238E27FC236}">
+                <a16:creationId xmlns:a16="http://schemas.microsoft.com/office/drawing/2014/main" id="{CE5BA416-4402-4333-878D-BC2179EB7CCB}"/>
+              </a:ext>
+            </a:extLst>
+          </p:cNvPr>
+          <p:cNvSpPr>
+            <a:spLocks noGrp="1"/>
+          </p:cNvSpPr>
+          <p:nvPr/>
+        </p:nvSpPr>
+        <p:spPr>
+          <a:xfrm>
+            <a:off x="1009650" y="3324225"/>
+            <a:ext cx="304800" cy="285750"/>
+          </a:xfrm>
+          <a:prstGeom prst="rect">
+            <a:avLst/>
+          </a:prstGeom>
+          <a:solidFill>
+            <a:srgbClr val="FFFFFF">
+              <a:alpha val="0"/>
+            </a:srgbClr>
+          </a:solidFill>
+          <a:ln w="0">
+            <a:solidFill>
+              <a:srgbClr val="000000">
+                <a:alpha val="0"/>
+              </a:srgbClr>
+            </a:solidFill>
+            <a:prstDash val="solid"/>
+          </a:ln>
+        </p:spPr>
+        <p:txBody>
+          <a:bodyPr lIns="0" tIns="0" rIns="0" bIns="0" anchor="ctr"/>
+          <a:lstStyle/>
+          <a:p>
+            <a:pPr algn="ctr">
+              <a:defRPr sz="1350" b="1">
+                <a:solidFill>
+                  <a:srgbClr val="910830"/>
+                </a:solidFill>
+              </a:defRPr>
+            </a:pPr>
+            <a:r>
+              <a:rPr sz="1350" b="1">
+                <a:solidFill>
+                  <a:srgbClr val="910830"/>
+                </a:solidFill>
+              </a:rPr>
+              <a:t>1</a:t>
+            </a:r>
+          </a:p>
+        </p:txBody>
+      </p:sp>
+      <p:sp>
+        <p:nvSpPr>
+          <p:cNvPr id="14" name="Rechteck 13">
+            <a:extLst>
+              <a:ext uri="{FF2B5EF4-FFF2-40B4-BE49-F238E27FC236}">
+                <a16:creationId xmlns:a16="http://schemas.microsoft.com/office/drawing/2014/main" id="{F47DF326-FE1C-45DA-8476-B26D6674857A}"/>
+              </a:ext>
+            </a:extLst>
+          </p:cNvPr>
+          <p:cNvSpPr>
+            <a:spLocks noGrp="1"/>
+          </p:cNvSpPr>
+          <p:nvPr/>
+        </p:nvSpPr>
+        <p:spPr>
+          <a:xfrm>
+            <a:off x="1428750" y="3295650"/>
+            <a:ext cx="3390900" cy="228600"/>
+          </a:xfrm>
+          <a:prstGeom prst="rect">
+            <a:avLst/>
+          </a:prstGeom>
+          <a:solidFill>
+            <a:srgbClr val="FFFFFF">
+              <a:alpha val="0"/>
+            </a:srgbClr>
+          </a:solidFill>
+          <a:ln w="0">
+            <a:solidFill>
+              <a:srgbClr val="000000">
+                <a:alpha val="0"/>
+              </a:srgbClr>
+            </a:solidFill>
+            <a:prstDash val="solid"/>
+          </a:ln>
+        </p:spPr>
+        <p:txBody>
+          <a:bodyPr lIns="0" tIns="0" rIns="0" bIns="0" anchor="t">
+            <a:normAutofit/>
+          </a:bodyPr>
+          <a:lstStyle/>
+          <a:p>
+            <a:pPr algn="l">
+              <a:defRPr sz="1125" b="1">
+                <a:solidFill>
+                  <a:srgbClr val="1F252B"/>
+                </a:solidFill>
+              </a:defRPr>
+            </a:pPr>
+            <a:r>
+              <a:rPr sz="1125" b="1">
+                <a:solidFill>
+                  <a:srgbClr val="1F252B"/>
+                </a:solidFill>
+              </a:rPr>
+              <a:t>Compare model families</a:t>
+            </a:r>
+          </a:p>
+        </p:txBody>
+      </p:sp>
+      <p:sp>
+        <p:nvSpPr>
+          <p:cNvPr id="15" name="Rechteck 14">
+            <a:extLst>
+              <a:ext uri="{FF2B5EF4-FFF2-40B4-BE49-F238E27FC236}">
+                <a16:creationId xmlns:a16="http://schemas.microsoft.com/office/drawing/2014/main" id="{3585567E-57E7-4E14-A647-93787CD001BF}"/>
+              </a:ext>
+            </a:extLst>
+          </p:cNvPr>
+          <p:cNvSpPr>
+            <a:spLocks noGrp="1"/>
+          </p:cNvSpPr>
+          <p:nvPr/>
+        </p:nvSpPr>
+        <p:spPr>
+          <a:xfrm>
+            <a:off x="1428750" y="3543300"/>
+            <a:ext cx="3390900" cy="247650"/>
+          </a:xfrm>
+          <a:prstGeom prst="rect">
+            <a:avLst/>
+          </a:prstGeom>
+          <a:solidFill>
+            <a:srgbClr val="FFFFFF">
+              <a:alpha val="0"/>
+            </a:srgbClr>
+          </a:solidFill>
+          <a:ln w="0">
+            <a:solidFill>
+              <a:srgbClr val="000000">
+                <a:alpha val="0"/>
+              </a:srgbClr>
+            </a:solidFill>
+            <a:prstDash val="solid"/>
+          </a:ln>
+        </p:spPr>
+        <p:txBody>
+          <a:bodyPr lIns="0" tIns="0" rIns="0" bIns="0" anchor="t">
+            <a:normAutofit fontScale="99063"/>
+          </a:bodyPr>
+          <a:lstStyle/>
+          <a:p>
+            <a:pPr algn="l">
+              <a:defRPr sz="825" b="0">
+                <a:solidFill>
+                  <a:srgbClr val="5E5E5D"/>
+                </a:solidFill>
+              </a:defRPr>
+            </a:pPr>
+            <a:r>
+              <a:rPr sz="825" b="0">
+                <a:solidFill>
+                  <a:srgbClr val="5E5E5D"/>
+                </a:solidFill>
+              </a:rPr>
+              <a:t>Ridge, RandomForest, XGBoost and MLP cover the required linear, tree-based and neural-network approaches.</a:t>
+            </a:r>
+          </a:p>
+        </p:txBody>
+      </p:sp>
+      <p:sp>
+        <p:nvSpPr>
+          <p:cNvPr id="16" name="Pfeil nach unten 15">
+            <a:extLst>
+              <a:ext uri="{FF2B5EF4-FFF2-40B4-BE49-F238E27FC236}">
+                <a16:creationId xmlns:a16="http://schemas.microsoft.com/office/drawing/2014/main" id="{67E9C838-E4B4-41CB-BBF9-389286C2766D}"/>
+              </a:ext>
+            </a:extLst>
+          </p:cNvPr>
+          <p:cNvSpPr>
+            <a:spLocks noGrp="1"/>
+          </p:cNvSpPr>
+          <p:nvPr/>
+        </p:nvSpPr>
+        <p:spPr>
+          <a:xfrm>
+            <a:off x="2895600" y="3905250"/>
+            <a:ext cx="323850" cy="228600"/>
+          </a:xfrm>
+          <a:prstGeom prst="downArrow">
+            <a:avLst/>
+          </a:prstGeom>
+          <a:solidFill>
+            <a:srgbClr val="8797A3"/>
+          </a:solidFill>
+          <a:ln w="0">
+            <a:solidFill>
+              <a:srgbClr val="8797A3"/>
+            </a:solidFill>
+            <a:prstDash val="solid"/>
+          </a:ln>
+        </p:spPr>
+        <p:txBody>
+          <a:bodyPr/>
+          <a:lstStyle/>
+          <a:p>
+            <a:endParaRPr lang="en-US"/>
+          </a:p>
+        </p:txBody>
+      </p:sp>
+      <p:sp>
+        <p:nvSpPr>
+          <p:cNvPr id="17" name="Abgerundetes Rechteck 16">
+            <a:extLst>
+              <a:ext uri="{FF2B5EF4-FFF2-40B4-BE49-F238E27FC236}">
+                <a16:creationId xmlns:a16="http://schemas.microsoft.com/office/drawing/2014/main" id="{A1AC9508-AEA2-4009-A15C-20D7767770EA}"/>
+              </a:ext>
+            </a:extLst>
+          </p:cNvPr>
+          <p:cNvSpPr>
+            <a:spLocks noGrp="1"/>
+          </p:cNvSpPr>
+          <p:nvPr/>
+        </p:nvSpPr>
+        <p:spPr>
+          <a:xfrm>
+            <a:off x="1200150" y="4171950"/>
+            <a:ext cx="3467100" cy="647700"/>
+          </a:xfrm>
+          <a:prstGeom prst="roundRect">
+            <a:avLst>
+              <a:gd name="adj" fmla="val 9000"/>
+            </a:avLst>
+          </a:prstGeom>
+          <a:solidFill>
+            <a:srgbClr val="FFFFFF"/>
+          </a:solidFill>
+          <a:ln w="10478">
+            <a:solidFill>
+              <a:srgbClr val="EEF0F2"/>
+            </a:solidFill>
+            <a:prstDash val="solid"/>
+          </a:ln>
+        </p:spPr>
+        <p:txBody>
+          <a:bodyPr/>
+          <a:lstStyle/>
+          <a:p>
+            <a:endParaRPr lang="en-US"/>
+          </a:p>
+        </p:txBody>
+      </p:sp>
+      <p:sp>
+        <p:nvSpPr>
+          <p:cNvPr id="18" name="Rechteck 17">
+            <a:extLst>
+              <a:ext uri="{FF2B5EF4-FFF2-40B4-BE49-F238E27FC236}">
+                <a16:creationId xmlns:a16="http://schemas.microsoft.com/office/drawing/2014/main" id="{A1ED70F2-FAA1-4CFA-B929-F611357A30F4}"/>
+              </a:ext>
+            </a:extLst>
+          </p:cNvPr>
+          <p:cNvSpPr>
+            <a:spLocks noGrp="1"/>
+          </p:cNvSpPr>
+          <p:nvPr/>
+        </p:nvSpPr>
+        <p:spPr>
+          <a:xfrm>
+            <a:off x="1200150" y="4171950"/>
+            <a:ext cx="66675" cy="647700"/>
+          </a:xfrm>
+          <a:prstGeom prst="rect">
+            <a:avLst/>
+          </a:prstGeom>
+          <a:solidFill>
+            <a:srgbClr val="143164"/>
+          </a:solidFill>
+          <a:ln w="0">
+            <a:solidFill>
+              <a:srgbClr val="000000">
+                <a:alpha val="0"/>
+              </a:srgbClr>
+            </a:solidFill>
+            <a:prstDash val="solid"/>
+          </a:ln>
+        </p:spPr>
+        <p:txBody>
+          <a:bodyPr/>
+          <a:lstStyle/>
+          <a:p>
+            <a:endParaRPr lang="en-US"/>
+          </a:p>
+        </p:txBody>
+      </p:sp>
+      <p:sp>
+        <p:nvSpPr>
+          <p:cNvPr id="19" name="Rechteck 18">
+            <a:extLst>
+              <a:ext uri="{FF2B5EF4-FFF2-40B4-BE49-F238E27FC236}">
+                <a16:creationId xmlns:a16="http://schemas.microsoft.com/office/drawing/2014/main" id="{A770EAC6-7503-49A0-B7BD-9D93F53DF66B}"/>
+              </a:ext>
+            </a:extLst>
+          </p:cNvPr>
+          <p:cNvSpPr>
+            <a:spLocks noGrp="1"/>
+          </p:cNvSpPr>
+          <p:nvPr/>
+        </p:nvSpPr>
+        <p:spPr>
+          <a:xfrm>
+            <a:off x="1371600" y="4333875"/>
+            <a:ext cx="304800" cy="285750"/>
+          </a:xfrm>
+          <a:prstGeom prst="rect">
+            <a:avLst/>
+          </a:prstGeom>
+          <a:solidFill>
+            <a:srgbClr val="FFFFFF">
+              <a:alpha val="0"/>
+            </a:srgbClr>
+          </a:solidFill>
+          <a:ln w="0">
+            <a:solidFill>
+              <a:srgbClr val="000000">
+                <a:alpha val="0"/>
+              </a:srgbClr>
+            </a:solidFill>
+            <a:prstDash val="solid"/>
+          </a:ln>
+        </p:spPr>
+        <p:txBody>
+          <a:bodyPr lIns="0" tIns="0" rIns="0" bIns="0" anchor="ctr"/>
+          <a:lstStyle/>
+          <a:p>
+            <a:pPr algn="ctr">
+              <a:defRPr sz="1350" b="1">
+                <a:solidFill>
+                  <a:srgbClr val="143164"/>
+                </a:solidFill>
+              </a:defRPr>
+            </a:pPr>
+            <a:r>
+              <a:rPr sz="1350" b="1">
+                <a:solidFill>
+                  <a:srgbClr val="143164"/>
+                </a:solidFill>
+              </a:rPr>
+              <a:t>2</a:t>
+            </a:r>
+          </a:p>
+        </p:txBody>
+      </p:sp>
+      <p:sp>
+        <p:nvSpPr>
+          <p:cNvPr id="20" name="Rechteck 19">
+            <a:extLst>
+              <a:ext uri="{FF2B5EF4-FFF2-40B4-BE49-F238E27FC236}">
+                <a16:creationId xmlns:a16="http://schemas.microsoft.com/office/drawing/2014/main" id="{F205D10C-4F47-4684-A5B4-E3AD845D9238}"/>
+              </a:ext>
+            </a:extLst>
+          </p:cNvPr>
+          <p:cNvSpPr>
+            <a:spLocks noGrp="1"/>
+          </p:cNvSpPr>
+          <p:nvPr/>
+        </p:nvSpPr>
+        <p:spPr>
+          <a:xfrm>
+            <a:off x="1790700" y="4305300"/>
+            <a:ext cx="2667000" cy="228600"/>
+          </a:xfrm>
+          <a:prstGeom prst="rect">
+            <a:avLst/>
+          </a:prstGeom>
+          <a:solidFill>
+            <a:srgbClr val="FFFFFF">
+              <a:alpha val="0"/>
+            </a:srgbClr>
+          </a:solidFill>
+          <a:ln w="0">
+            <a:solidFill>
+              <a:srgbClr val="000000">
+                <a:alpha val="0"/>
+              </a:srgbClr>
+            </a:solidFill>
+            <a:prstDash val="solid"/>
+          </a:ln>
+        </p:spPr>
+        <p:txBody>
+          <a:bodyPr lIns="0" tIns="0" rIns="0" bIns="0" anchor="t">
+            <a:normAutofit/>
+          </a:bodyPr>
+          <a:lstStyle/>
+          <a:p>
+            <a:pPr algn="l">
+              <a:defRPr sz="1125" b="1">
+                <a:solidFill>
+                  <a:srgbClr val="1F252B"/>
+                </a:solidFill>
+              </a:defRPr>
+            </a:pPr>
+            <a:r>
+              <a:rPr sz="1125" b="1">
+                <a:solidFill>
+                  <a:srgbClr val="1F252B"/>
+                </a:solidFill>
+              </a:rPr>
+              <a:t>Identify strongest candidate</a:t>
+            </a:r>
+          </a:p>
+        </p:txBody>
+      </p:sp>
+      <p:sp>
+        <p:nvSpPr>
+          <p:cNvPr id="21" name="Rechteck 20">
+            <a:extLst>
+              <a:ext uri="{FF2B5EF4-FFF2-40B4-BE49-F238E27FC236}">
+                <a16:creationId xmlns:a16="http://schemas.microsoft.com/office/drawing/2014/main" id="{307B14A7-6E84-4E62-8478-3DB6925DD044}"/>
+              </a:ext>
+            </a:extLst>
+          </p:cNvPr>
+          <p:cNvSpPr>
+            <a:spLocks noGrp="1"/>
+          </p:cNvSpPr>
+          <p:nvPr/>
+        </p:nvSpPr>
+        <p:spPr>
+          <a:xfrm>
+            <a:off x="1790700" y="4552950"/>
+            <a:ext cx="2667000" cy="209550"/>
+          </a:xfrm>
+          <a:prstGeom prst="rect">
+            <a:avLst/>
+          </a:prstGeom>
+          <a:solidFill>
+            <a:srgbClr val="FFFFFF">
+              <a:alpha val="0"/>
+            </a:srgbClr>
+          </a:solidFill>
+          <a:ln w="0">
+            <a:solidFill>
+              <a:srgbClr val="000000">
+                <a:alpha val="0"/>
+              </a:srgbClr>
+            </a:solidFill>
+            <a:prstDash val="solid"/>
+          </a:ln>
+        </p:spPr>
+        <p:txBody>
+          <a:bodyPr lIns="0" tIns="0" rIns="0" bIns="0" anchor="t">
+            <a:normAutofit fontScale="96259"/>
+          </a:bodyPr>
+          <a:lstStyle/>
+          <a:p>
+            <a:pPr algn="l">
+              <a:defRPr sz="825" b="0">
+                <a:solidFill>
+                  <a:srgbClr val="5E5E5D"/>
+                </a:solidFill>
+              </a:defRPr>
+            </a:pPr>
+            <a:r>
+              <a:rPr sz="825" b="0">
+                <a:solidFill>
+                  <a:srgbClr val="5E5E5D"/>
+                </a:solidFill>
+              </a:rPr>
+              <a:t>XGBoost is strongest across the rolling validation windows.</a:t>
+            </a:r>
+          </a:p>
+        </p:txBody>
+      </p:sp>
+      <p:sp>
+        <p:nvSpPr>
+          <p:cNvPr id="22" name="Pfeil nach unten 21">
+            <a:extLst>
+              <a:ext uri="{FF2B5EF4-FFF2-40B4-BE49-F238E27FC236}">
+                <a16:creationId xmlns:a16="http://schemas.microsoft.com/office/drawing/2014/main" id="{6196980D-B4FC-459E-A2BF-82981972B252}"/>
+              </a:ext>
+            </a:extLst>
+          </p:cNvPr>
+          <p:cNvSpPr>
+            <a:spLocks noGrp="1"/>
+          </p:cNvSpPr>
+          <p:nvPr/>
+        </p:nvSpPr>
+        <p:spPr>
+          <a:xfrm>
+            <a:off x="2895600" y="4876800"/>
+            <a:ext cx="323850" cy="228600"/>
+          </a:xfrm>
+          <a:prstGeom prst="downArrow">
+            <a:avLst/>
+          </a:prstGeom>
+          <a:solidFill>
+            <a:srgbClr val="8797A3"/>
+          </a:solidFill>
+          <a:ln w="0">
+            <a:solidFill>
+              <a:srgbClr val="8797A3"/>
+            </a:solidFill>
+            <a:prstDash val="solid"/>
+          </a:ln>
+        </p:spPr>
+        <p:txBody>
+          <a:bodyPr/>
+          <a:lstStyle/>
+          <a:p>
+            <a:endParaRPr lang="en-US"/>
+          </a:p>
+        </p:txBody>
+      </p:sp>
+      <p:sp>
+        <p:nvSpPr>
+          <p:cNvPr id="23" name="Abgerundetes Rechteck 22">
+            <a:extLst>
+              <a:ext uri="{FF2B5EF4-FFF2-40B4-BE49-F238E27FC236}">
+                <a16:creationId xmlns:a16="http://schemas.microsoft.com/office/drawing/2014/main" id="{C95224FC-93C2-4A6D-BA98-8453E9DC46B7}"/>
+              </a:ext>
+            </a:extLst>
+          </p:cNvPr>
+          <p:cNvSpPr>
+            <a:spLocks noGrp="1"/>
+          </p:cNvSpPr>
+          <p:nvPr/>
+        </p:nvSpPr>
+        <p:spPr>
+          <a:xfrm>
+            <a:off x="1562100" y="5067300"/>
+            <a:ext cx="2743200" cy="647700"/>
+          </a:xfrm>
+          <a:prstGeom prst="roundRect">
+            <a:avLst>
+              <a:gd name="adj" fmla="val 9000"/>
+            </a:avLst>
+          </a:prstGeom>
+          <a:solidFill>
+            <a:srgbClr val="FFFFFF"/>
+          </a:solidFill>
+          <a:ln w="10478">
+            <a:solidFill>
+              <a:srgbClr val="EEF0F2"/>
+            </a:solidFill>
+            <a:prstDash val="solid"/>
+          </a:ln>
+        </p:spPr>
+        <p:txBody>
+          <a:bodyPr/>
+          <a:lstStyle/>
+          <a:p>
+            <a:endParaRPr lang="en-US"/>
+          </a:p>
+        </p:txBody>
+      </p:sp>
+      <p:sp>
+        <p:nvSpPr>
+          <p:cNvPr id="24" name="Rechteck 23">
+            <a:extLst>
+              <a:ext uri="{FF2B5EF4-FFF2-40B4-BE49-F238E27FC236}">
+                <a16:creationId xmlns:a16="http://schemas.microsoft.com/office/drawing/2014/main" id="{8D557B49-361E-4068-87D7-19E9A5BF6104}"/>
+              </a:ext>
+            </a:extLst>
+          </p:cNvPr>
+          <p:cNvSpPr>
+            <a:spLocks noGrp="1"/>
+          </p:cNvSpPr>
+          <p:nvPr/>
+        </p:nvSpPr>
+        <p:spPr>
+          <a:xfrm>
+            <a:off x="1562100" y="5067300"/>
+            <a:ext cx="66675" cy="647700"/>
+          </a:xfrm>
+          <a:prstGeom prst="rect">
+            <a:avLst/>
+          </a:prstGeom>
+          <a:solidFill>
+            <a:srgbClr val="87BF2A"/>
+          </a:solidFill>
+          <a:ln w="0">
+            <a:solidFill>
+              <a:srgbClr val="000000">
+                <a:alpha val="0"/>
+              </a:srgbClr>
+            </a:solidFill>
+            <a:prstDash val="solid"/>
+          </a:ln>
+        </p:spPr>
+        <p:txBody>
+          <a:bodyPr/>
+          <a:lstStyle/>
+          <a:p>
+            <a:endParaRPr lang="en-US"/>
+          </a:p>
+        </p:txBody>
+      </p:sp>
+      <p:sp>
+        <p:nvSpPr>
+          <p:cNvPr id="25" name="Rechteck 24">
+            <a:extLst>
+              <a:ext uri="{FF2B5EF4-FFF2-40B4-BE49-F238E27FC236}">
+                <a16:creationId xmlns:a16="http://schemas.microsoft.com/office/drawing/2014/main" id="{54792348-4A81-4AA8-881C-328B7688D1AC}"/>
+              </a:ext>
+            </a:extLst>
+          </p:cNvPr>
+          <p:cNvSpPr>
+            <a:spLocks noGrp="1"/>
+          </p:cNvSpPr>
+          <p:nvPr/>
+        </p:nvSpPr>
+        <p:spPr>
+          <a:xfrm>
+            <a:off x="1733550" y="5229225"/>
+            <a:ext cx="304800" cy="285750"/>
+          </a:xfrm>
+          <a:prstGeom prst="rect">
+            <a:avLst/>
+          </a:prstGeom>
+          <a:solidFill>
+            <a:srgbClr val="FFFFFF">
+              <a:alpha val="0"/>
+            </a:srgbClr>
+          </a:solidFill>
+          <a:ln w="0">
+            <a:solidFill>
+              <a:srgbClr val="000000">
+                <a:alpha val="0"/>
+              </a:srgbClr>
+            </a:solidFill>
+            <a:prstDash val="solid"/>
+          </a:ln>
+        </p:spPr>
+        <p:txBody>
+          <a:bodyPr lIns="0" tIns="0" rIns="0" bIns="0" anchor="ctr"/>
+          <a:lstStyle/>
+          <a:p>
+            <a:pPr algn="ctr">
+              <a:defRPr sz="1350" b="1">
+                <a:solidFill>
+                  <a:srgbClr val="87BF2A"/>
+                </a:solidFill>
+              </a:defRPr>
+            </a:pPr>
+            <a:r>
+              <a:rPr sz="1350" b="1">
+                <a:solidFill>
+                  <a:srgbClr val="87BF2A"/>
+                </a:solidFill>
+              </a:rPr>
+              <a:t>3</a:t>
+            </a:r>
+          </a:p>
+        </p:txBody>
+      </p:sp>
+      <p:sp>
+        <p:nvSpPr>
+          <p:cNvPr id="26" name="Rechteck 25">
+            <a:extLst>
+              <a:ext uri="{FF2B5EF4-FFF2-40B4-BE49-F238E27FC236}">
+                <a16:creationId xmlns:a16="http://schemas.microsoft.com/office/drawing/2014/main" id="{73BE9FB8-D410-47E9-BEBB-0BD473492A9B}"/>
+              </a:ext>
+            </a:extLst>
+          </p:cNvPr>
+          <p:cNvSpPr>
+            <a:spLocks noGrp="1"/>
+          </p:cNvSpPr>
+          <p:nvPr/>
+        </p:nvSpPr>
+        <p:spPr>
+          <a:xfrm>
+            <a:off x="2152650" y="5200650"/>
+            <a:ext cx="1943100" cy="228600"/>
+          </a:xfrm>
+          <a:prstGeom prst="rect">
+            <a:avLst/>
+          </a:prstGeom>
+          <a:solidFill>
+            <a:srgbClr val="FFFFFF">
+              <a:alpha val="0"/>
+            </a:srgbClr>
+          </a:solidFill>
+          <a:ln w="0">
+            <a:solidFill>
+              <a:srgbClr val="000000">
+                <a:alpha val="0"/>
+              </a:srgbClr>
+            </a:solidFill>
+            <a:prstDash val="solid"/>
+          </a:ln>
+        </p:spPr>
+        <p:txBody>
+          <a:bodyPr lIns="0" tIns="0" rIns="0" bIns="0" anchor="t">
+            <a:normAutofit/>
+          </a:bodyPr>
+          <a:lstStyle/>
+          <a:p>
+            <a:pPr algn="l">
+              <a:defRPr sz="1125" b="1">
+                <a:solidFill>
+                  <a:srgbClr val="1F252B"/>
+                </a:solidFill>
+              </a:defRPr>
+            </a:pPr>
+            <a:r>
+              <a:rPr sz="1125" b="1">
+                <a:solidFill>
+                  <a:srgbClr val="1F252B"/>
+                </a:solidFill>
+              </a:rPr>
+              <a:t>Refine XGBoost</a:t>
+            </a:r>
+          </a:p>
+        </p:txBody>
+      </p:sp>
+      <p:sp>
+        <p:nvSpPr>
+          <p:cNvPr id="27" name="Rechteck 26">
+            <a:extLst>
+              <a:ext uri="{FF2B5EF4-FFF2-40B4-BE49-F238E27FC236}">
+                <a16:creationId xmlns:a16="http://schemas.microsoft.com/office/drawing/2014/main" id="{7A6FAE25-62E3-4096-8FAB-DD70DDBF9A11}"/>
+              </a:ext>
+            </a:extLst>
+          </p:cNvPr>
+          <p:cNvSpPr>
+            <a:spLocks noGrp="1"/>
+          </p:cNvSpPr>
+          <p:nvPr/>
+        </p:nvSpPr>
+        <p:spPr>
+          <a:xfrm>
+            <a:off x="2152650" y="5448300"/>
+            <a:ext cx="1943100" cy="209550"/>
+          </a:xfrm>
+          <a:prstGeom prst="rect">
+            <a:avLst/>
+          </a:prstGeom>
+          <a:solidFill>
+            <a:srgbClr val="FFFFFF">
+              <a:alpha val="0"/>
+            </a:srgbClr>
+          </a:solidFill>
+          <a:ln w="0">
+            <a:solidFill>
+              <a:srgbClr val="000000">
+                <a:alpha val="0"/>
+              </a:srgbClr>
+            </a:solidFill>
+            <a:prstDash val="solid"/>
+          </a:ln>
+        </p:spPr>
+        <p:txBody>
+          <a:bodyPr lIns="0" tIns="0" rIns="0" bIns="0" anchor="t">
+            <a:normAutofit fontScale="83823"/>
+          </a:bodyPr>
+          <a:lstStyle/>
+          <a:p>
+            <a:pPr algn="l">
+              <a:defRPr sz="825" b="0">
+                <a:solidFill>
+                  <a:srgbClr val="5E5E5D"/>
+                </a:solidFill>
+              </a:defRPr>
+            </a:pPr>
+            <a:r>
+              <a:rPr sz="825" b="0">
+                <a:solidFill>
+                  <a:srgbClr val="5E5E5D"/>
+                </a:solidFill>
+              </a:rPr>
+              <a:t>Test XGBoost variants, including adjusted tree settings and log1p(BikeCount).</a:t>
+            </a:r>
+          </a:p>
+        </p:txBody>
+      </p:sp>
+      <p:sp>
+        <p:nvSpPr>
+          <p:cNvPr id="28" name="Abgerundetes Rechteck 27">
+            <a:extLst>
+              <a:ext uri="{FF2B5EF4-FFF2-40B4-BE49-F238E27FC236}">
+                <a16:creationId xmlns:a16="http://schemas.microsoft.com/office/drawing/2014/main" id="{75DCFA7E-6BE8-4288-9808-B6BE10339D7E}"/>
+              </a:ext>
+            </a:extLst>
+          </p:cNvPr>
+          <p:cNvSpPr>
+            <a:spLocks noGrp="1"/>
+          </p:cNvSpPr>
+          <p:nvPr/>
+        </p:nvSpPr>
+        <p:spPr>
+          <a:xfrm>
+            <a:off x="5810250" y="2609850"/>
+            <a:ext cx="4876800" cy="323850"/>
+          </a:xfrm>
+          <a:prstGeom prst="roundRect">
+            <a:avLst>
+              <a:gd name="adj" fmla="val 9000"/>
+            </a:avLst>
+          </a:prstGeom>
+          <a:solidFill>
+            <a:srgbClr val="910830"/>
+          </a:solidFill>
+          <a:ln w="9525">
+            <a:solidFill>
+              <a:srgbClr val="910830"/>
+            </a:solidFill>
+            <a:prstDash val="solid"/>
+          </a:ln>
+        </p:spPr>
+        <p:txBody>
+          <a:bodyPr/>
+          <a:lstStyle/>
+          <a:p>
+            <a:endParaRPr lang="en-US"/>
+          </a:p>
+        </p:txBody>
+      </p:sp>
+      <p:sp>
+        <p:nvSpPr>
+          <p:cNvPr id="29" name="Rechteck 28">
+            <a:extLst>
+              <a:ext uri="{FF2B5EF4-FFF2-40B4-BE49-F238E27FC236}">
+                <a16:creationId xmlns:a16="http://schemas.microsoft.com/office/drawing/2014/main" id="{55B797DD-430E-459A-BDC6-524335CF2BAF}"/>
+              </a:ext>
+            </a:extLst>
+          </p:cNvPr>
+          <p:cNvSpPr>
+            <a:spLocks noGrp="1"/>
+          </p:cNvSpPr>
+          <p:nvPr/>
+        </p:nvSpPr>
+        <p:spPr>
+          <a:xfrm>
+            <a:off x="5962650" y="2695575"/>
+            <a:ext cx="1524000" cy="171450"/>
+          </a:xfrm>
+          <a:prstGeom prst="rect">
+            <a:avLst/>
+          </a:prstGeom>
+          <a:solidFill>
+            <a:srgbClr val="FFFFFF">
+              <a:alpha val="0"/>
+            </a:srgbClr>
+          </a:solidFill>
+          <a:ln w="0">
+            <a:solidFill>
+              <a:srgbClr val="000000">
+                <a:alpha val="0"/>
+              </a:srgbClr>
+            </a:solidFill>
+            <a:prstDash val="solid"/>
+          </a:ln>
+        </p:spPr>
+        <p:txBody>
+          <a:bodyPr lIns="0" tIns="0" rIns="0" bIns="0" anchor="t"/>
+          <a:lstStyle/>
+          <a:p>
+            <a:pPr algn="l">
+              <a:defRPr sz="900" b="1">
+                <a:solidFill>
+                  <a:srgbClr val="FFFFFF"/>
+                </a:solidFill>
+              </a:defRPr>
+            </a:pPr>
+            <a:r>
+              <a:rPr sz="900" b="1">
+                <a:solidFill>
+                  <a:srgbClr val="FFFFFF"/>
+                </a:solidFill>
+              </a:rPr>
+              <a:t>Rolling CV MSE</a:t>
+            </a:r>
+          </a:p>
+        </p:txBody>
+      </p:sp>
+      <p:sp>
+        <p:nvSpPr>
+          <p:cNvPr id="30" name="Rechteck 29">
+            <a:extLst>
+              <a:ext uri="{FF2B5EF4-FFF2-40B4-BE49-F238E27FC236}">
+                <a16:creationId xmlns:a16="http://schemas.microsoft.com/office/drawing/2014/main" id="{7C1B9221-1571-4034-8BB2-60244DF492B2}"/>
+              </a:ext>
+            </a:extLst>
+          </p:cNvPr>
+          <p:cNvSpPr>
+            <a:spLocks noGrp="1"/>
+          </p:cNvSpPr>
+          <p:nvPr/>
+        </p:nvSpPr>
+        <p:spPr>
+          <a:xfrm>
+            <a:off x="8648700" y="2695575"/>
+            <a:ext cx="685800" cy="171450"/>
+          </a:xfrm>
+          <a:prstGeom prst="rect">
+            <a:avLst/>
+          </a:prstGeom>
+          <a:solidFill>
+            <a:srgbClr val="FFFFFF">
+              <a:alpha val="0"/>
+            </a:srgbClr>
+          </a:solidFill>
+          <a:ln w="0">
+            <a:solidFill>
+              <a:srgbClr val="000000">
+                <a:alpha val="0"/>
+              </a:srgbClr>
+            </a:solidFill>
+            <a:prstDash val="solid"/>
+          </a:ln>
+        </p:spPr>
+        <p:txBody>
+          <a:bodyPr lIns="0" tIns="0" rIns="0" bIns="0" anchor="t"/>
+          <a:lstStyle/>
+          <a:p>
+            <a:pPr algn="r">
+              <a:defRPr sz="900" b="1">
+                <a:solidFill>
+                  <a:srgbClr val="FFFFFF"/>
+                </a:solidFill>
+              </a:defRPr>
+            </a:pPr>
+            <a:r>
+              <a:rPr sz="900" b="1">
+                <a:solidFill>
+                  <a:srgbClr val="FFFFFF"/>
+                </a:solidFill>
+              </a:rPr>
+              <a:t>+1h</a:t>
+            </a:r>
+          </a:p>
+        </p:txBody>
+      </p:sp>
+      <p:sp>
+        <p:nvSpPr>
+          <p:cNvPr id="31" name="Rechteck 30">
+            <a:extLst>
+              <a:ext uri="{FF2B5EF4-FFF2-40B4-BE49-F238E27FC236}">
+                <a16:creationId xmlns:a16="http://schemas.microsoft.com/office/drawing/2014/main" id="{6A6D0B0A-3C88-4943-9811-C3760CCC2110}"/>
+              </a:ext>
+            </a:extLst>
+          </p:cNvPr>
+          <p:cNvSpPr>
+            <a:spLocks noGrp="1"/>
+          </p:cNvSpPr>
+          <p:nvPr/>
+        </p:nvSpPr>
+        <p:spPr>
+          <a:xfrm>
+            <a:off x="9829800" y="2695575"/>
+            <a:ext cx="685800" cy="171450"/>
+          </a:xfrm>
+          <a:prstGeom prst="rect">
+            <a:avLst/>
+          </a:prstGeom>
+          <a:solidFill>
+            <a:srgbClr val="FFFFFF">
+              <a:alpha val="0"/>
+            </a:srgbClr>
+          </a:solidFill>
+          <a:ln w="0">
+            <a:solidFill>
+              <a:srgbClr val="000000">
+                <a:alpha val="0"/>
+              </a:srgbClr>
+            </a:solidFill>
+            <a:prstDash val="solid"/>
+          </a:ln>
+        </p:spPr>
+        <p:txBody>
+          <a:bodyPr lIns="0" tIns="0" rIns="0" bIns="0" anchor="t"/>
+          <a:lstStyle/>
+          <a:p>
+            <a:pPr algn="r">
+              <a:defRPr sz="900" b="1">
+                <a:solidFill>
+                  <a:srgbClr val="FFFFFF"/>
+                </a:solidFill>
+              </a:defRPr>
+            </a:pPr>
+            <a:r>
+              <a:rPr sz="900" b="1">
+                <a:solidFill>
+                  <a:srgbClr val="FFFFFF"/>
+                </a:solidFill>
+              </a:rPr>
+              <a:t>+24h</a:t>
+            </a:r>
+          </a:p>
+        </p:txBody>
+      </p:sp>
+      <p:sp>
+        <p:nvSpPr>
+          <p:cNvPr id="32" name="Rechteck 31">
+            <a:extLst>
+              <a:ext uri="{FF2B5EF4-FFF2-40B4-BE49-F238E27FC236}">
+                <a16:creationId xmlns:a16="http://schemas.microsoft.com/office/drawing/2014/main" id="{AF815EBE-8F56-41D6-A5E9-1A6C9DEA3B6F}"/>
+              </a:ext>
+            </a:extLst>
+          </p:cNvPr>
+          <p:cNvSpPr>
+            <a:spLocks noGrp="1"/>
+          </p:cNvSpPr>
+          <p:nvPr/>
+        </p:nvSpPr>
+        <p:spPr>
+          <a:xfrm>
+            <a:off x="5810250" y="3009900"/>
+            <a:ext cx="4876800" cy="190500"/>
+          </a:xfrm>
+          <a:prstGeom prst="rect">
+            <a:avLst/>
+          </a:prstGeom>
+          <a:solidFill>
+            <a:srgbClr val="FFFFFF">
+              <a:alpha val="0"/>
+            </a:srgbClr>
+          </a:solidFill>
+          <a:ln w="0">
+            <a:solidFill>
+              <a:srgbClr val="000000">
+                <a:alpha val="0"/>
+              </a:srgbClr>
+            </a:solidFill>
+            <a:prstDash val="solid"/>
+          </a:ln>
+        </p:spPr>
+        <p:txBody>
+          <a:bodyPr/>
+          <a:lstStyle/>
+          <a:p>
+            <a:endParaRPr lang="en-US"/>
+          </a:p>
+        </p:txBody>
+      </p:sp>
+      <p:sp>
+        <p:nvSpPr>
+          <p:cNvPr id="33" name="Rechteck 32">
+            <a:extLst>
+              <a:ext uri="{FF2B5EF4-FFF2-40B4-BE49-F238E27FC236}">
+                <a16:creationId xmlns:a16="http://schemas.microsoft.com/office/drawing/2014/main" id="{C98887F4-5B91-4B37-A380-8BF2F83D664D}"/>
+              </a:ext>
+            </a:extLst>
+          </p:cNvPr>
+          <p:cNvSpPr>
+            <a:spLocks noGrp="1"/>
+          </p:cNvSpPr>
+          <p:nvPr/>
+        </p:nvSpPr>
+        <p:spPr>
+          <a:xfrm>
+            <a:off x="5829300" y="3019425"/>
+            <a:ext cx="2476500" cy="171450"/>
+          </a:xfrm>
+          <a:prstGeom prst="rect">
+            <a:avLst/>
+          </a:prstGeom>
+          <a:solidFill>
+            <a:srgbClr val="FFFFFF">
+              <a:alpha val="0"/>
+            </a:srgbClr>
+          </a:solidFill>
+          <a:ln w="0">
+            <a:solidFill>
+              <a:srgbClr val="000000">
+                <a:alpha val="0"/>
+              </a:srgbClr>
+            </a:solidFill>
+            <a:prstDash val="solid"/>
+          </a:ln>
+        </p:spPr>
+        <p:txBody>
+          <a:bodyPr lIns="0" tIns="0" rIns="0" bIns="0" anchor="t"/>
+          <a:lstStyle/>
+          <a:p>
+            <a:pPr algn="l">
+              <a:defRPr sz="750" b="1">
+                <a:solidFill>
+                  <a:srgbClr val="5E5E5D"/>
+                </a:solidFill>
+              </a:defRPr>
+            </a:pPr>
+            <a:r>
+              <a:rPr sz="750" b="1">
+                <a:solidFill>
+                  <a:srgbClr val="5E5E5D"/>
+                </a:solidFill>
+              </a:rPr>
+              <a:t>NAIVE BASELINES</a:t>
+            </a:r>
+          </a:p>
+        </p:txBody>
+      </p:sp>
+      <p:sp>
+        <p:nvSpPr>
+          <p:cNvPr id="34" name="Rechteck 33">
+            <a:extLst>
+              <a:ext uri="{FF2B5EF4-FFF2-40B4-BE49-F238E27FC236}">
+                <a16:creationId xmlns:a16="http://schemas.microsoft.com/office/drawing/2014/main" id="{1BD4E967-2793-443D-B691-19986EAAEE81}"/>
+              </a:ext>
+            </a:extLst>
+          </p:cNvPr>
+          <p:cNvSpPr>
+            <a:spLocks noGrp="1"/>
+          </p:cNvSpPr>
+          <p:nvPr/>
+        </p:nvSpPr>
+        <p:spPr>
+          <a:xfrm>
+            <a:off x="5829300" y="3200400"/>
+            <a:ext cx="4857750" cy="9525"/>
+          </a:xfrm>
+          <a:prstGeom prst="rect">
+            <a:avLst/>
+          </a:prstGeom>
+          <a:solidFill>
+            <a:srgbClr val="EEF0F2"/>
+          </a:solidFill>
+          <a:ln w="0">
+            <a:solidFill>
+              <a:srgbClr val="000000">
+                <a:alpha val="0"/>
+              </a:srgbClr>
+            </a:solidFill>
+            <a:prstDash val="solid"/>
+          </a:ln>
+        </p:spPr>
+        <p:txBody>
+          <a:bodyPr/>
+          <a:lstStyle/>
+          <a:p>
+            <a:endParaRPr lang="en-US"/>
+          </a:p>
+        </p:txBody>
+      </p:sp>
+      <p:sp>
+        <p:nvSpPr>
+          <p:cNvPr id="35" name="Abgerundetes Rechteck 34">
+            <a:extLst>
+              <a:ext uri="{FF2B5EF4-FFF2-40B4-BE49-F238E27FC236}">
+                <a16:creationId xmlns:a16="http://schemas.microsoft.com/office/drawing/2014/main" id="{E006BD0F-CF2D-43F5-9635-B953412A8AE3}"/>
+              </a:ext>
+            </a:extLst>
+          </p:cNvPr>
+          <p:cNvSpPr>
+            <a:spLocks noGrp="1"/>
+          </p:cNvSpPr>
+          <p:nvPr/>
+        </p:nvSpPr>
+        <p:spPr>
+          <a:xfrm>
+            <a:off x="5810250" y="3238500"/>
+            <a:ext cx="4876800" cy="228600"/>
+          </a:xfrm>
+          <a:prstGeom prst="roundRect">
+            <a:avLst>
+              <a:gd name="adj" fmla="val 9000"/>
+            </a:avLst>
+          </a:prstGeom>
+          <a:solidFill>
+            <a:srgbClr val="FFFFFF"/>
+          </a:solidFill>
+          <a:ln w="5715">
+            <a:solidFill>
+              <a:srgbClr val="EEF0F2"/>
+            </a:solidFill>
+            <a:prstDash val="solid"/>
+          </a:ln>
+        </p:spPr>
+        <p:txBody>
+          <a:bodyPr/>
+          <a:lstStyle/>
+          <a:p>
+            <a:endParaRPr lang="en-US"/>
+          </a:p>
+        </p:txBody>
+      </p:sp>
+      <p:sp>
+        <p:nvSpPr>
+          <p:cNvPr id="36" name="Rechteck 35">
+            <a:extLst>
+              <a:ext uri="{FF2B5EF4-FFF2-40B4-BE49-F238E27FC236}">
+                <a16:creationId xmlns:a16="http://schemas.microsoft.com/office/drawing/2014/main" id="{4E5EC469-5A3F-4488-9162-95BB1DB38939}"/>
+              </a:ext>
+            </a:extLst>
+          </p:cNvPr>
+          <p:cNvSpPr>
+            <a:spLocks noGrp="1"/>
+          </p:cNvSpPr>
+          <p:nvPr/>
+        </p:nvSpPr>
+        <p:spPr>
+          <a:xfrm>
+            <a:off x="5962650" y="3286125"/>
+            <a:ext cx="2095500" cy="142875"/>
+          </a:xfrm>
+          <a:prstGeom prst="rect">
+            <a:avLst/>
+          </a:prstGeom>
+          <a:solidFill>
+            <a:srgbClr val="FFFFFF">
+              <a:alpha val="0"/>
+            </a:srgbClr>
+          </a:solidFill>
+          <a:ln w="0">
+            <a:solidFill>
+              <a:srgbClr val="000000">
+                <a:alpha val="0"/>
+              </a:srgbClr>
+            </a:solidFill>
+            <a:prstDash val="solid"/>
+          </a:ln>
+        </p:spPr>
+        <p:txBody>
+          <a:bodyPr lIns="0" tIns="0" rIns="0" bIns="0" anchor="t">
+            <a:normAutofit/>
+          </a:bodyPr>
+          <a:lstStyle/>
+          <a:p>
+            <a:pPr algn="l">
+              <a:defRPr sz="713" b="0">
+                <a:solidFill>
+                  <a:srgbClr val="1F252B"/>
+                </a:solidFill>
+              </a:defRPr>
+            </a:pPr>
+            <a:r>
+              <a:rPr sz="713" b="0">
+                <a:solidFill>
+                  <a:srgbClr val="1F252B"/>
+                </a:solidFill>
+              </a:rPr>
+              <a:t>naive horizon lag</a:t>
+            </a:r>
+          </a:p>
+        </p:txBody>
+      </p:sp>
+      <p:sp>
+        <p:nvSpPr>
+          <p:cNvPr id="37" name="Rechteck 36">
+            <a:extLst>
+              <a:ext uri="{FF2B5EF4-FFF2-40B4-BE49-F238E27FC236}">
+                <a16:creationId xmlns:a16="http://schemas.microsoft.com/office/drawing/2014/main" id="{B578ED4E-C1C1-4289-AF4E-7F959351B643}"/>
+              </a:ext>
+            </a:extLst>
+          </p:cNvPr>
+          <p:cNvSpPr>
+            <a:spLocks noGrp="1"/>
+          </p:cNvSpPr>
+          <p:nvPr/>
+        </p:nvSpPr>
+        <p:spPr>
+          <a:xfrm>
+            <a:off x="8648700" y="3286125"/>
+            <a:ext cx="685800" cy="142875"/>
+          </a:xfrm>
+          <a:prstGeom prst="rect">
+            <a:avLst/>
+          </a:prstGeom>
+          <a:solidFill>
+            <a:srgbClr val="FFFFFF">
+              <a:alpha val="0"/>
+            </a:srgbClr>
+          </a:solidFill>
+          <a:ln w="0">
+            <a:solidFill>
+              <a:srgbClr val="000000">
+                <a:alpha val="0"/>
+              </a:srgbClr>
+            </a:solidFill>
+            <a:prstDash val="solid"/>
+          </a:ln>
+        </p:spPr>
+        <p:txBody>
+          <a:bodyPr lIns="0" tIns="0" rIns="0" bIns="0" anchor="t"/>
+          <a:lstStyle/>
+          <a:p>
+            <a:pPr algn="r">
+              <a:defRPr sz="713" b="0">
+                <a:solidFill>
+                  <a:srgbClr val="1F252B"/>
+                </a:solidFill>
+              </a:defRPr>
+            </a:pPr>
+            <a:r>
+              <a:rPr sz="713" b="0">
+                <a:solidFill>
+                  <a:srgbClr val="1F252B"/>
+                </a:solidFill>
+              </a:rPr>
+              <a:t>25,688</a:t>
+            </a:r>
+          </a:p>
+        </p:txBody>
+      </p:sp>
+      <p:sp>
+        <p:nvSpPr>
+          <p:cNvPr id="38" name="Rechteck 37">
+            <a:extLst>
+              <a:ext uri="{FF2B5EF4-FFF2-40B4-BE49-F238E27FC236}">
+                <a16:creationId xmlns:a16="http://schemas.microsoft.com/office/drawing/2014/main" id="{EDF5FFB2-AB3B-490F-B122-4BF2DF69C5F9}"/>
+              </a:ext>
+            </a:extLst>
+          </p:cNvPr>
+          <p:cNvSpPr>
+            <a:spLocks noGrp="1"/>
+          </p:cNvSpPr>
+          <p:nvPr/>
+        </p:nvSpPr>
+        <p:spPr>
+          <a:xfrm>
+            <a:off x="9829800" y="3286125"/>
+            <a:ext cx="685800" cy="142875"/>
+          </a:xfrm>
+          <a:prstGeom prst="rect">
+            <a:avLst/>
+          </a:prstGeom>
+          <a:solidFill>
+            <a:srgbClr val="FFFFFF">
+              <a:alpha val="0"/>
+            </a:srgbClr>
+          </a:solidFill>
+          <a:ln w="0">
+            <a:solidFill>
+              <a:srgbClr val="000000">
+                <a:alpha val="0"/>
+              </a:srgbClr>
+            </a:solidFill>
+            <a:prstDash val="solid"/>
+          </a:ln>
+        </p:spPr>
+        <p:txBody>
+          <a:bodyPr lIns="0" tIns="0" rIns="0" bIns="0" anchor="t"/>
+          <a:lstStyle/>
+          <a:p>
+            <a:pPr algn="r">
+              <a:defRPr sz="713" b="0">
+                <a:solidFill>
+                  <a:srgbClr val="1F252B"/>
+                </a:solidFill>
+              </a:defRPr>
+            </a:pPr>
+            <a:r>
+              <a:rPr sz="713" b="0">
+                <a:solidFill>
+                  <a:srgbClr val="1F252B"/>
+                </a:solidFill>
+              </a:rPr>
+              <a:t>56,681</a:t>
+            </a:r>
+          </a:p>
+        </p:txBody>
+      </p:sp>
+      <p:sp>
+        <p:nvSpPr>
+          <p:cNvPr id="39" name="Abgerundetes Rechteck 38">
+            <a:extLst>
+              <a:ext uri="{FF2B5EF4-FFF2-40B4-BE49-F238E27FC236}">
+                <a16:creationId xmlns:a16="http://schemas.microsoft.com/office/drawing/2014/main" id="{BBF25BD9-243A-43E5-BF2B-4E102BF7AC62}"/>
+              </a:ext>
+            </a:extLst>
+          </p:cNvPr>
+          <p:cNvSpPr>
+            <a:spLocks noGrp="1"/>
+          </p:cNvSpPr>
+          <p:nvPr/>
+        </p:nvSpPr>
+        <p:spPr>
+          <a:xfrm>
+            <a:off x="5810250" y="3467100"/>
+            <a:ext cx="4876800" cy="228600"/>
+          </a:xfrm>
+          <a:prstGeom prst="roundRect">
+            <a:avLst>
+              <a:gd name="adj" fmla="val 9000"/>
+            </a:avLst>
+          </a:prstGeom>
+          <a:solidFill>
+            <a:srgbClr val="F8F8F8"/>
+          </a:solidFill>
+          <a:ln w="5715">
+            <a:solidFill>
+              <a:srgbClr val="EEF0F2"/>
+            </a:solidFill>
+            <a:prstDash val="solid"/>
+          </a:ln>
+        </p:spPr>
+        <p:txBody>
+          <a:bodyPr/>
+          <a:lstStyle/>
+          <a:p>
+            <a:endParaRPr lang="en-US"/>
+          </a:p>
+        </p:txBody>
+      </p:sp>
+      <p:sp>
+        <p:nvSpPr>
+          <p:cNvPr id="40" name="Rechteck 39">
+            <a:extLst>
+              <a:ext uri="{FF2B5EF4-FFF2-40B4-BE49-F238E27FC236}">
+                <a16:creationId xmlns:a16="http://schemas.microsoft.com/office/drawing/2014/main" id="{B208BF44-D35A-4E58-93CC-314E91AE4008}"/>
+              </a:ext>
+            </a:extLst>
+          </p:cNvPr>
+          <p:cNvSpPr>
+            <a:spLocks noGrp="1"/>
+          </p:cNvSpPr>
+          <p:nvPr/>
+        </p:nvSpPr>
+        <p:spPr>
+          <a:xfrm>
+            <a:off x="5962650" y="3514725"/>
+            <a:ext cx="2095500" cy="142875"/>
+          </a:xfrm>
+          <a:prstGeom prst="rect">
+            <a:avLst/>
+          </a:prstGeom>
+          <a:solidFill>
+            <a:srgbClr val="FFFFFF">
+              <a:alpha val="0"/>
+            </a:srgbClr>
+          </a:solidFill>
+          <a:ln w="0">
+            <a:solidFill>
+              <a:srgbClr val="000000">
+                <a:alpha val="0"/>
+              </a:srgbClr>
+            </a:solidFill>
+            <a:prstDash val="solid"/>
+          </a:ln>
+        </p:spPr>
+        <p:txBody>
+          <a:bodyPr lIns="0" tIns="0" rIns="0" bIns="0" anchor="t">
+            <a:normAutofit/>
+          </a:bodyPr>
+          <a:lstStyle/>
+          <a:p>
+            <a:pPr algn="l">
+              <a:defRPr sz="713" b="0">
+                <a:solidFill>
+                  <a:srgbClr val="1F252B"/>
+                </a:solidFill>
+              </a:defRPr>
+            </a:pPr>
+            <a:r>
+              <a:rPr sz="713" b="0">
+                <a:solidFill>
+                  <a:srgbClr val="1F252B"/>
+                </a:solidFill>
+              </a:rPr>
+              <a:t>naive lag168</a:t>
+            </a:r>
+          </a:p>
+        </p:txBody>
+      </p:sp>
+      <p:sp>
+        <p:nvSpPr>
+          <p:cNvPr id="41" name="Rechteck 40">
+            <a:extLst>
+              <a:ext uri="{FF2B5EF4-FFF2-40B4-BE49-F238E27FC236}">
+                <a16:creationId xmlns:a16="http://schemas.microsoft.com/office/drawing/2014/main" id="{00306D0A-B0FF-4882-B9CB-7BDC9D820541}"/>
+              </a:ext>
+            </a:extLst>
+          </p:cNvPr>
+          <p:cNvSpPr>
+            <a:spLocks noGrp="1"/>
+          </p:cNvSpPr>
+          <p:nvPr/>
+        </p:nvSpPr>
+        <p:spPr>
+          <a:xfrm>
+            <a:off x="8648700" y="3514725"/>
+            <a:ext cx="685800" cy="142875"/>
+          </a:xfrm>
+          <a:prstGeom prst="rect">
+            <a:avLst/>
+          </a:prstGeom>
+          <a:solidFill>
+            <a:srgbClr val="FFFFFF">
+              <a:alpha val="0"/>
+            </a:srgbClr>
+          </a:solidFill>
+          <a:ln w="0">
+            <a:solidFill>
+              <a:srgbClr val="000000">
+                <a:alpha val="0"/>
+              </a:srgbClr>
+            </a:solidFill>
+            <a:prstDash val="solid"/>
+          </a:ln>
+        </p:spPr>
+        <p:txBody>
+          <a:bodyPr lIns="0" tIns="0" rIns="0" bIns="0" anchor="t"/>
+          <a:lstStyle/>
+          <a:p>
+            <a:pPr algn="r">
+              <a:defRPr sz="713" b="0">
+                <a:solidFill>
+                  <a:srgbClr val="1F252B"/>
+                </a:solidFill>
+              </a:defRPr>
+            </a:pPr>
+            <a:r>
+              <a:rPr sz="713" b="0">
+                <a:solidFill>
+                  <a:srgbClr val="1F252B"/>
+                </a:solidFill>
+              </a:rPr>
+              <a:t>22,816</a:t>
+            </a:r>
+          </a:p>
+        </p:txBody>
+      </p:sp>
+      <p:sp>
+        <p:nvSpPr>
+          <p:cNvPr id="42" name="Rechteck 41">
+            <a:extLst>
+              <a:ext uri="{FF2B5EF4-FFF2-40B4-BE49-F238E27FC236}">
+                <a16:creationId xmlns:a16="http://schemas.microsoft.com/office/drawing/2014/main" id="{350624EE-1196-47A3-9395-0C1128449670}"/>
+              </a:ext>
+            </a:extLst>
+          </p:cNvPr>
+          <p:cNvSpPr>
+            <a:spLocks noGrp="1"/>
+          </p:cNvSpPr>
+          <p:nvPr/>
+        </p:nvSpPr>
+        <p:spPr>
+          <a:xfrm>
+            <a:off x="9829800" y="3514725"/>
+            <a:ext cx="685800" cy="142875"/>
+          </a:xfrm>
+          <a:prstGeom prst="rect">
+            <a:avLst/>
+          </a:prstGeom>
+          <a:solidFill>
+            <a:srgbClr val="FFFFFF">
+              <a:alpha val="0"/>
+            </a:srgbClr>
+          </a:solidFill>
+          <a:ln w="0">
+            <a:solidFill>
+              <a:srgbClr val="000000">
+                <a:alpha val="0"/>
+              </a:srgbClr>
+            </a:solidFill>
+            <a:prstDash val="solid"/>
+          </a:ln>
+        </p:spPr>
+        <p:txBody>
+          <a:bodyPr lIns="0" tIns="0" rIns="0" bIns="0" anchor="t"/>
+          <a:lstStyle/>
+          <a:p>
+            <a:pPr algn="r">
+              <a:defRPr sz="713" b="0">
+                <a:solidFill>
+                  <a:srgbClr val="1F252B"/>
+                </a:solidFill>
+              </a:defRPr>
+            </a:pPr>
+            <a:r>
+              <a:rPr sz="713" b="0">
+                <a:solidFill>
+                  <a:srgbClr val="1F252B"/>
+                </a:solidFill>
+              </a:rPr>
+              <a:t>22,816</a:t>
+            </a:r>
+          </a:p>
+        </p:txBody>
+      </p:sp>
+      <p:sp>
+        <p:nvSpPr>
+          <p:cNvPr id="43" name="Rechteck 42">
+            <a:extLst>
+              <a:ext uri="{FF2B5EF4-FFF2-40B4-BE49-F238E27FC236}">
+                <a16:creationId xmlns:a16="http://schemas.microsoft.com/office/drawing/2014/main" id="{D1D00AD7-CB76-4309-8900-71C3B7774542}"/>
+              </a:ext>
+            </a:extLst>
+          </p:cNvPr>
+          <p:cNvSpPr>
+            <a:spLocks noGrp="1"/>
+          </p:cNvSpPr>
+          <p:nvPr/>
+        </p:nvSpPr>
+        <p:spPr>
+          <a:xfrm>
+            <a:off x="5810250" y="3714750"/>
+            <a:ext cx="4876800" cy="190500"/>
+          </a:xfrm>
+          <a:prstGeom prst="rect">
+            <a:avLst/>
+          </a:prstGeom>
+          <a:solidFill>
+            <a:srgbClr val="FFFFFF">
+              <a:alpha val="0"/>
+            </a:srgbClr>
+          </a:solidFill>
+          <a:ln w="0">
+            <a:solidFill>
+              <a:srgbClr val="000000">
+                <a:alpha val="0"/>
+              </a:srgbClr>
+            </a:solidFill>
+            <a:prstDash val="solid"/>
+          </a:ln>
+        </p:spPr>
+        <p:txBody>
+          <a:bodyPr/>
+          <a:lstStyle/>
+          <a:p>
+            <a:endParaRPr lang="en-US"/>
+          </a:p>
+        </p:txBody>
+      </p:sp>
+      <p:sp>
+        <p:nvSpPr>
+          <p:cNvPr id="44" name="Rechteck 43">
+            <a:extLst>
+              <a:ext uri="{FF2B5EF4-FFF2-40B4-BE49-F238E27FC236}">
+                <a16:creationId xmlns:a16="http://schemas.microsoft.com/office/drawing/2014/main" id="{6493C3CB-DD6C-45A6-B2A3-EC514213C9F8}"/>
+              </a:ext>
+            </a:extLst>
+          </p:cNvPr>
+          <p:cNvSpPr>
+            <a:spLocks noGrp="1"/>
+          </p:cNvSpPr>
+          <p:nvPr/>
+        </p:nvSpPr>
+        <p:spPr>
+          <a:xfrm>
+            <a:off x="5829300" y="3724275"/>
+            <a:ext cx="2476500" cy="171450"/>
+          </a:xfrm>
+          <a:prstGeom prst="rect">
+            <a:avLst/>
+          </a:prstGeom>
+          <a:solidFill>
+            <a:srgbClr val="FFFFFF">
+              <a:alpha val="0"/>
+            </a:srgbClr>
+          </a:solidFill>
+          <a:ln w="0">
+            <a:solidFill>
+              <a:srgbClr val="000000">
+                <a:alpha val="0"/>
+              </a:srgbClr>
+            </a:solidFill>
+            <a:prstDash val="solid"/>
+          </a:ln>
+        </p:spPr>
+        <p:txBody>
+          <a:bodyPr lIns="0" tIns="0" rIns="0" bIns="0" anchor="t"/>
+          <a:lstStyle/>
+          <a:p>
+            <a:pPr algn="l">
+              <a:defRPr sz="750" b="1">
+                <a:solidFill>
+                  <a:srgbClr val="5E5E5D"/>
+                </a:solidFill>
+              </a:defRPr>
+            </a:pPr>
+            <a:r>
+              <a:rPr sz="750" b="1">
+                <a:solidFill>
+                  <a:srgbClr val="5E5E5D"/>
+                </a:solidFill>
+              </a:rPr>
+              <a:t>MODEL FAMILY SCREENING</a:t>
+            </a:r>
+          </a:p>
+        </p:txBody>
+      </p:sp>
+      <p:sp>
+        <p:nvSpPr>
+          <p:cNvPr id="45" name="Rechteck 44">
+            <a:extLst>
+              <a:ext uri="{FF2B5EF4-FFF2-40B4-BE49-F238E27FC236}">
+                <a16:creationId xmlns:a16="http://schemas.microsoft.com/office/drawing/2014/main" id="{FE8AFDF9-11C8-4601-9E07-49260A1596E2}"/>
+              </a:ext>
+            </a:extLst>
+          </p:cNvPr>
+          <p:cNvSpPr>
+            <a:spLocks noGrp="1"/>
+          </p:cNvSpPr>
+          <p:nvPr/>
+        </p:nvSpPr>
+        <p:spPr>
+          <a:xfrm>
+            <a:off x="5829300" y="3905250"/>
+            <a:ext cx="4857750" cy="9525"/>
+          </a:xfrm>
+          <a:prstGeom prst="rect">
+            <a:avLst/>
+          </a:prstGeom>
+          <a:solidFill>
+            <a:srgbClr val="EEF0F2"/>
+          </a:solidFill>
+          <a:ln w="0">
+            <a:solidFill>
+              <a:srgbClr val="000000">
+                <a:alpha val="0"/>
+              </a:srgbClr>
+            </a:solidFill>
+            <a:prstDash val="solid"/>
+          </a:ln>
+        </p:spPr>
+        <p:txBody>
+          <a:bodyPr/>
+          <a:lstStyle/>
+          <a:p>
+            <a:endParaRPr lang="en-US"/>
+          </a:p>
+        </p:txBody>
+      </p:sp>
+      <p:sp>
+        <p:nvSpPr>
+          <p:cNvPr id="46" name="Abgerundetes Rechteck 45">
+            <a:extLst>
+              <a:ext uri="{FF2B5EF4-FFF2-40B4-BE49-F238E27FC236}">
+                <a16:creationId xmlns:a16="http://schemas.microsoft.com/office/drawing/2014/main" id="{0EE4C150-E50A-47F1-B35A-FB209A6C631B}"/>
+              </a:ext>
+            </a:extLst>
+          </p:cNvPr>
+          <p:cNvSpPr>
+            <a:spLocks noGrp="1"/>
+          </p:cNvSpPr>
+          <p:nvPr/>
+        </p:nvSpPr>
+        <p:spPr>
+          <a:xfrm>
+            <a:off x="5810250" y="3943350"/>
+            <a:ext cx="4876800" cy="228600"/>
+          </a:xfrm>
+          <a:prstGeom prst="roundRect">
+            <a:avLst>
+              <a:gd name="adj" fmla="val 9000"/>
+            </a:avLst>
+          </a:prstGeom>
+          <a:solidFill>
+            <a:srgbClr val="FFFFFF"/>
+          </a:solidFill>
+          <a:ln w="5715">
+            <a:solidFill>
+              <a:srgbClr val="EEF0F2"/>
+            </a:solidFill>
+            <a:prstDash val="solid"/>
+          </a:ln>
+        </p:spPr>
+        <p:txBody>
+          <a:bodyPr/>
+          <a:lstStyle/>
+          <a:p>
+            <a:endParaRPr lang="en-US"/>
+          </a:p>
+        </p:txBody>
+      </p:sp>
+      <p:sp>
+        <p:nvSpPr>
+          <p:cNvPr id="47" name="Rechteck 46">
+            <a:extLst>
+              <a:ext uri="{FF2B5EF4-FFF2-40B4-BE49-F238E27FC236}">
+                <a16:creationId xmlns:a16="http://schemas.microsoft.com/office/drawing/2014/main" id="{C87D7C97-764D-4275-8833-59FC238BCFEE}"/>
+              </a:ext>
+            </a:extLst>
+          </p:cNvPr>
+          <p:cNvSpPr>
+            <a:spLocks noGrp="1"/>
+          </p:cNvSpPr>
+          <p:nvPr/>
+        </p:nvSpPr>
+        <p:spPr>
+          <a:xfrm>
+            <a:off x="5962650" y="3990975"/>
+            <a:ext cx="2095500" cy="142875"/>
+          </a:xfrm>
+          <a:prstGeom prst="rect">
+            <a:avLst/>
+          </a:prstGeom>
+          <a:solidFill>
+            <a:srgbClr val="FFFFFF">
+              <a:alpha val="0"/>
+            </a:srgbClr>
+          </a:solidFill>
+          <a:ln w="0">
+            <a:solidFill>
+              <a:srgbClr val="000000">
+                <a:alpha val="0"/>
+              </a:srgbClr>
+            </a:solidFill>
+            <a:prstDash val="solid"/>
+          </a:ln>
+        </p:spPr>
+        <p:txBody>
+          <a:bodyPr lIns="0" tIns="0" rIns="0" bIns="0" anchor="t">
+            <a:normAutofit/>
+          </a:bodyPr>
+          <a:lstStyle/>
+          <a:p>
+            <a:pPr algn="l">
+              <a:defRPr sz="713" b="0">
+                <a:solidFill>
+                  <a:srgbClr val="1F252B"/>
+                </a:solidFill>
+              </a:defRPr>
+            </a:pPr>
+            <a:r>
+              <a:rPr sz="713" b="0">
+                <a:solidFill>
+                  <a:srgbClr val="1F252B"/>
+                </a:solidFill>
+              </a:rPr>
+              <a:t>Ridge</a:t>
+            </a:r>
+          </a:p>
+        </p:txBody>
+      </p:sp>
+      <p:sp>
+        <p:nvSpPr>
+          <p:cNvPr id="48" name="Rechteck 47">
+            <a:extLst>
+              <a:ext uri="{FF2B5EF4-FFF2-40B4-BE49-F238E27FC236}">
+                <a16:creationId xmlns:a16="http://schemas.microsoft.com/office/drawing/2014/main" id="{B13EAAFE-7B2A-4351-B115-C6D7E49C17D8}"/>
+              </a:ext>
+            </a:extLst>
+          </p:cNvPr>
+          <p:cNvSpPr>
+            <a:spLocks noGrp="1"/>
+          </p:cNvSpPr>
+          <p:nvPr/>
+        </p:nvSpPr>
+        <p:spPr>
+          <a:xfrm>
+            <a:off x="8648700" y="3990975"/>
+            <a:ext cx="685800" cy="142875"/>
+          </a:xfrm>
+          <a:prstGeom prst="rect">
+            <a:avLst/>
+          </a:prstGeom>
+          <a:solidFill>
+            <a:srgbClr val="FFFFFF">
+              <a:alpha val="0"/>
+            </a:srgbClr>
+          </a:solidFill>
+          <a:ln w="0">
+            <a:solidFill>
+              <a:srgbClr val="000000">
+                <a:alpha val="0"/>
+              </a:srgbClr>
+            </a:solidFill>
+            <a:prstDash val="solid"/>
+          </a:ln>
+        </p:spPr>
+        <p:txBody>
+          <a:bodyPr lIns="0" tIns="0" rIns="0" bIns="0" anchor="t"/>
+          <a:lstStyle/>
+          <a:p>
+            <a:pPr algn="r">
+              <a:defRPr sz="713" b="0">
+                <a:solidFill>
+                  <a:srgbClr val="1F252B"/>
+                </a:solidFill>
+              </a:defRPr>
+            </a:pPr>
+            <a:r>
+              <a:rPr sz="713" b="0">
+                <a:solidFill>
+                  <a:srgbClr val="1F252B"/>
+                </a:solidFill>
+              </a:rPr>
+              <a:t>10,803</a:t>
+            </a:r>
+          </a:p>
+        </p:txBody>
+      </p:sp>
+      <p:sp>
+        <p:nvSpPr>
+          <p:cNvPr id="49" name="Rechteck 48">
+            <a:extLst>
+              <a:ext uri="{FF2B5EF4-FFF2-40B4-BE49-F238E27FC236}">
+                <a16:creationId xmlns:a16="http://schemas.microsoft.com/office/drawing/2014/main" id="{ACD9C67C-B7AC-462C-9F88-6DD4DA4EF8B3}"/>
+              </a:ext>
+            </a:extLst>
+          </p:cNvPr>
+          <p:cNvSpPr>
+            <a:spLocks noGrp="1"/>
+          </p:cNvSpPr>
+          <p:nvPr/>
+        </p:nvSpPr>
+        <p:spPr>
+          <a:xfrm>
+            <a:off x="9829800" y="3990975"/>
+            <a:ext cx="685800" cy="142875"/>
+          </a:xfrm>
+          <a:prstGeom prst="rect">
+            <a:avLst/>
+          </a:prstGeom>
+          <a:solidFill>
+            <a:srgbClr val="FFFFFF">
+              <a:alpha val="0"/>
+            </a:srgbClr>
+          </a:solidFill>
+          <a:ln w="0">
+            <a:solidFill>
+              <a:srgbClr val="000000">
+                <a:alpha val="0"/>
+              </a:srgbClr>
+            </a:solidFill>
+            <a:prstDash val="solid"/>
+          </a:ln>
+        </p:spPr>
+        <p:txBody>
+          <a:bodyPr lIns="0" tIns="0" rIns="0" bIns="0" anchor="t"/>
+          <a:lstStyle/>
+          <a:p>
+            <a:pPr algn="r">
+              <a:defRPr sz="713" b="0">
+                <a:solidFill>
+                  <a:srgbClr val="1F252B"/>
+                </a:solidFill>
+              </a:defRPr>
+            </a:pPr>
+            <a:r>
+              <a:rPr sz="713" b="0">
+                <a:solidFill>
+                  <a:srgbClr val="1F252B"/>
+                </a:solidFill>
+              </a:rPr>
+              <a:t>19,096</a:t>
+            </a:r>
+          </a:p>
+        </p:txBody>
+      </p:sp>
+      <p:sp>
+        <p:nvSpPr>
+          <p:cNvPr id="50" name="Abgerundetes Rechteck 49">
+            <a:extLst>
+              <a:ext uri="{FF2B5EF4-FFF2-40B4-BE49-F238E27FC236}">
+                <a16:creationId xmlns:a16="http://schemas.microsoft.com/office/drawing/2014/main" id="{4E08681F-AFE4-4D53-A2B8-07B42DA3C66B}"/>
+              </a:ext>
+            </a:extLst>
+          </p:cNvPr>
+          <p:cNvSpPr>
+            <a:spLocks noGrp="1"/>
+          </p:cNvSpPr>
+          <p:nvPr/>
+        </p:nvSpPr>
+        <p:spPr>
+          <a:xfrm>
+            <a:off x="5810250" y="4171950"/>
+            <a:ext cx="4876800" cy="228600"/>
+          </a:xfrm>
+          <a:prstGeom prst="roundRect">
+            <a:avLst>
+              <a:gd name="adj" fmla="val 9000"/>
+            </a:avLst>
+          </a:prstGeom>
+          <a:solidFill>
+            <a:srgbClr val="F8F8F8"/>
+          </a:solidFill>
+          <a:ln w="5715">
+            <a:solidFill>
+              <a:srgbClr val="EEF0F2"/>
+            </a:solidFill>
+            <a:prstDash val="solid"/>
+          </a:ln>
+        </p:spPr>
+        <p:txBody>
+          <a:bodyPr/>
+          <a:lstStyle/>
+          <a:p>
+            <a:endParaRPr lang="en-US"/>
+          </a:p>
+        </p:txBody>
+      </p:sp>
+      <p:sp>
+        <p:nvSpPr>
+          <p:cNvPr id="51" name="Rechteck 50">
+            <a:extLst>
+              <a:ext uri="{FF2B5EF4-FFF2-40B4-BE49-F238E27FC236}">
+                <a16:creationId xmlns:a16="http://schemas.microsoft.com/office/drawing/2014/main" id="{4F7A1FE7-61AB-4143-A360-955347819AB5}"/>
+              </a:ext>
+            </a:extLst>
+          </p:cNvPr>
+          <p:cNvSpPr>
+            <a:spLocks noGrp="1"/>
+          </p:cNvSpPr>
+          <p:nvPr/>
+        </p:nvSpPr>
+        <p:spPr>
+          <a:xfrm>
+            <a:off x="5962650" y="4219575"/>
+            <a:ext cx="2095500" cy="142875"/>
+          </a:xfrm>
+          <a:prstGeom prst="rect">
+            <a:avLst/>
+          </a:prstGeom>
+          <a:solidFill>
+            <a:srgbClr val="FFFFFF">
+              <a:alpha val="0"/>
+            </a:srgbClr>
+          </a:solidFill>
+          <a:ln w="0">
+            <a:solidFill>
+              <a:srgbClr val="000000">
+                <a:alpha val="0"/>
+              </a:srgbClr>
+            </a:solidFill>
+            <a:prstDash val="solid"/>
+          </a:ln>
+        </p:spPr>
+        <p:txBody>
+          <a:bodyPr lIns="0" tIns="0" rIns="0" bIns="0" anchor="t">
+            <a:normAutofit/>
+          </a:bodyPr>
+          <a:lstStyle/>
+          <a:p>
+            <a:pPr algn="l">
+              <a:defRPr sz="713" b="0">
+                <a:solidFill>
+                  <a:srgbClr val="1F252B"/>
+                </a:solidFill>
+              </a:defRPr>
+            </a:pPr>
+            <a:r>
+              <a:rPr sz="713" b="0">
+                <a:solidFill>
+                  <a:srgbClr val="1F252B"/>
+                </a:solidFill>
+              </a:rPr>
+              <a:t>RandomForest</a:t>
+            </a:r>
+          </a:p>
+        </p:txBody>
+      </p:sp>
+      <p:sp>
+        <p:nvSpPr>
+          <p:cNvPr id="52" name="Rechteck 51">
+            <a:extLst>
+              <a:ext uri="{FF2B5EF4-FFF2-40B4-BE49-F238E27FC236}">
+                <a16:creationId xmlns:a16="http://schemas.microsoft.com/office/drawing/2014/main" id="{62C3BE25-AA71-4ED0-942C-FB6941F4DEC5}"/>
+              </a:ext>
+            </a:extLst>
+          </p:cNvPr>
+          <p:cNvSpPr>
+            <a:spLocks noGrp="1"/>
+          </p:cNvSpPr>
+          <p:nvPr/>
+        </p:nvSpPr>
+        <p:spPr>
+          <a:xfrm>
+            <a:off x="8648700" y="4219575"/>
+            <a:ext cx="685800" cy="142875"/>
+          </a:xfrm>
+          <a:prstGeom prst="rect">
+            <a:avLst/>
+          </a:prstGeom>
+          <a:solidFill>
+            <a:srgbClr val="FFFFFF">
+              <a:alpha val="0"/>
+            </a:srgbClr>
+          </a:solidFill>
+          <a:ln w="0">
+            <a:solidFill>
+              <a:srgbClr val="000000">
+                <a:alpha val="0"/>
+              </a:srgbClr>
+            </a:solidFill>
+            <a:prstDash val="solid"/>
+          </a:ln>
+        </p:spPr>
+        <p:txBody>
+          <a:bodyPr lIns="0" tIns="0" rIns="0" bIns="0" anchor="t"/>
+          <a:lstStyle/>
+          <a:p>
+            <a:pPr algn="r">
+              <a:defRPr sz="713" b="0">
+                <a:solidFill>
+                  <a:srgbClr val="1F252B"/>
+                </a:solidFill>
+              </a:defRPr>
+            </a:pPr>
+            <a:r>
+              <a:rPr sz="713" b="0">
+                <a:solidFill>
+                  <a:srgbClr val="1F252B"/>
+                </a:solidFill>
+              </a:rPr>
+              <a:t>5,263</a:t>
+            </a:r>
+          </a:p>
+        </p:txBody>
+      </p:sp>
+      <p:sp>
+        <p:nvSpPr>
+          <p:cNvPr id="53" name="Rechteck 52">
+            <a:extLst>
+              <a:ext uri="{FF2B5EF4-FFF2-40B4-BE49-F238E27FC236}">
+                <a16:creationId xmlns:a16="http://schemas.microsoft.com/office/drawing/2014/main" id="{52F492F5-3065-4E32-AB08-990C46D00FC4}"/>
+              </a:ext>
+            </a:extLst>
+          </p:cNvPr>
+          <p:cNvSpPr>
+            <a:spLocks noGrp="1"/>
+          </p:cNvSpPr>
+          <p:nvPr/>
+        </p:nvSpPr>
+        <p:spPr>
+          <a:xfrm>
+            <a:off x="9829800" y="4219575"/>
+            <a:ext cx="685800" cy="142875"/>
+          </a:xfrm>
+          <a:prstGeom prst="rect">
+            <a:avLst/>
+          </a:prstGeom>
+          <a:solidFill>
+            <a:srgbClr val="FFFFFF">
+              <a:alpha val="0"/>
+            </a:srgbClr>
+          </a:solidFill>
+          <a:ln w="0">
+            <a:solidFill>
+              <a:srgbClr val="000000">
+                <a:alpha val="0"/>
+              </a:srgbClr>
+            </a:solidFill>
+            <a:prstDash val="solid"/>
+          </a:ln>
+        </p:spPr>
+        <p:txBody>
+          <a:bodyPr lIns="0" tIns="0" rIns="0" bIns="0" anchor="t"/>
+          <a:lstStyle/>
+          <a:p>
+            <a:pPr algn="r">
+              <a:defRPr sz="713" b="0">
+                <a:solidFill>
+                  <a:srgbClr val="1F252B"/>
+                </a:solidFill>
+              </a:defRPr>
+            </a:pPr>
+            <a:r>
+              <a:rPr sz="713" b="0">
+                <a:solidFill>
+                  <a:srgbClr val="1F252B"/>
+                </a:solidFill>
+              </a:rPr>
+              <a:t>14,681</a:t>
+            </a:r>
+          </a:p>
+        </p:txBody>
+      </p:sp>
+      <p:sp>
+        <p:nvSpPr>
+          <p:cNvPr id="54" name="Abgerundetes Rechteck 53">
+            <a:extLst>
+              <a:ext uri="{FF2B5EF4-FFF2-40B4-BE49-F238E27FC236}">
+                <a16:creationId xmlns:a16="http://schemas.microsoft.com/office/drawing/2014/main" id="{0AB0D871-9A58-48FA-83F5-E5A2DC353392}"/>
+              </a:ext>
+            </a:extLst>
+          </p:cNvPr>
+          <p:cNvSpPr>
+            <a:spLocks noGrp="1"/>
+          </p:cNvSpPr>
+          <p:nvPr/>
+        </p:nvSpPr>
+        <p:spPr>
+          <a:xfrm>
+            <a:off x="5810250" y="4400550"/>
+            <a:ext cx="4876800" cy="228600"/>
+          </a:xfrm>
+          <a:prstGeom prst="roundRect">
+            <a:avLst>
+              <a:gd name="adj" fmla="val 9000"/>
+            </a:avLst>
+          </a:prstGeom>
+          <a:solidFill>
+            <a:srgbClr val="FFFFFF"/>
+          </a:solidFill>
+          <a:ln w="5715">
+            <a:solidFill>
+              <a:srgbClr val="EEF0F2"/>
+            </a:solidFill>
+            <a:prstDash val="solid"/>
+          </a:ln>
+        </p:spPr>
+        <p:txBody>
+          <a:bodyPr/>
+          <a:lstStyle/>
+          <a:p>
+            <a:endParaRPr lang="en-US"/>
+          </a:p>
+        </p:txBody>
+      </p:sp>
+      <p:sp>
+        <p:nvSpPr>
+          <p:cNvPr id="55" name="Rechteck 54">
+            <a:extLst>
+              <a:ext uri="{FF2B5EF4-FFF2-40B4-BE49-F238E27FC236}">
+                <a16:creationId xmlns:a16="http://schemas.microsoft.com/office/drawing/2014/main" id="{AEA37410-29E2-479C-9F50-31BC64C45413}"/>
+              </a:ext>
+            </a:extLst>
+          </p:cNvPr>
+          <p:cNvSpPr>
+            <a:spLocks noGrp="1"/>
+          </p:cNvSpPr>
+          <p:nvPr/>
+        </p:nvSpPr>
+        <p:spPr>
+          <a:xfrm>
+            <a:off x="5962650" y="4448175"/>
+            <a:ext cx="2095500" cy="142875"/>
+          </a:xfrm>
+          <a:prstGeom prst="rect">
+            <a:avLst/>
+          </a:prstGeom>
+          <a:solidFill>
+            <a:srgbClr val="FFFFFF">
+              <a:alpha val="0"/>
+            </a:srgbClr>
+          </a:solidFill>
+          <a:ln w="0">
+            <a:solidFill>
+              <a:srgbClr val="000000">
+                <a:alpha val="0"/>
+              </a:srgbClr>
+            </a:solidFill>
+            <a:prstDash val="solid"/>
+          </a:ln>
+        </p:spPr>
+        <p:txBody>
+          <a:bodyPr lIns="0" tIns="0" rIns="0" bIns="0" anchor="t">
+            <a:normAutofit/>
+          </a:bodyPr>
+          <a:lstStyle/>
+          <a:p>
+            <a:pPr algn="l">
+              <a:defRPr sz="713" b="0">
+                <a:solidFill>
+                  <a:srgbClr val="1F252B"/>
+                </a:solidFill>
+              </a:defRPr>
+            </a:pPr>
+            <a:r>
+              <a:rPr sz="713" b="0">
+                <a:solidFill>
+                  <a:srgbClr val="1F252B"/>
+                </a:solidFill>
+              </a:rPr>
+              <a:t>MLP</a:t>
+            </a:r>
+          </a:p>
+        </p:txBody>
+      </p:sp>
+      <p:sp>
+        <p:nvSpPr>
+          <p:cNvPr id="56" name="Rechteck 55">
+            <a:extLst>
+              <a:ext uri="{FF2B5EF4-FFF2-40B4-BE49-F238E27FC236}">
+                <a16:creationId xmlns:a16="http://schemas.microsoft.com/office/drawing/2014/main" id="{B02F1BCF-AFFD-4DD7-BAD2-C086D13123B8}"/>
+              </a:ext>
+            </a:extLst>
+          </p:cNvPr>
+          <p:cNvSpPr>
+            <a:spLocks noGrp="1"/>
+          </p:cNvSpPr>
+          <p:nvPr/>
+        </p:nvSpPr>
+        <p:spPr>
+          <a:xfrm>
+            <a:off x="8648700" y="4448175"/>
+            <a:ext cx="685800" cy="142875"/>
+          </a:xfrm>
+          <a:prstGeom prst="rect">
+            <a:avLst/>
+          </a:prstGeom>
+          <a:solidFill>
+            <a:srgbClr val="FFFFFF">
+              <a:alpha val="0"/>
+            </a:srgbClr>
+          </a:solidFill>
+          <a:ln w="0">
+            <a:solidFill>
+              <a:srgbClr val="000000">
+                <a:alpha val="0"/>
+              </a:srgbClr>
+            </a:solidFill>
+            <a:prstDash val="solid"/>
+          </a:ln>
+        </p:spPr>
+        <p:txBody>
+          <a:bodyPr lIns="0" tIns="0" rIns="0" bIns="0" anchor="t"/>
+          <a:lstStyle/>
+          <a:p>
+            <a:pPr algn="r">
+              <a:defRPr sz="713" b="0">
+                <a:solidFill>
+                  <a:srgbClr val="1F252B"/>
+                </a:solidFill>
+              </a:defRPr>
+            </a:pPr>
+            <a:r>
+              <a:rPr sz="713" b="0">
+                <a:solidFill>
+                  <a:srgbClr val="1F252B"/>
+                </a:solidFill>
+              </a:rPr>
+              <a:t>7,657</a:t>
+            </a:r>
+          </a:p>
+        </p:txBody>
+      </p:sp>
+      <p:sp>
+        <p:nvSpPr>
+          <p:cNvPr id="57" name="Rechteck 56">
+            <a:extLst>
+              <a:ext uri="{FF2B5EF4-FFF2-40B4-BE49-F238E27FC236}">
+                <a16:creationId xmlns:a16="http://schemas.microsoft.com/office/drawing/2014/main" id="{D78F13AD-4158-4BEB-9598-29082B1FF199}"/>
+              </a:ext>
+            </a:extLst>
+          </p:cNvPr>
+          <p:cNvSpPr>
+            <a:spLocks noGrp="1"/>
+          </p:cNvSpPr>
+          <p:nvPr/>
+        </p:nvSpPr>
+        <p:spPr>
+          <a:xfrm>
+            <a:off x="9829800" y="4448175"/>
+            <a:ext cx="685800" cy="142875"/>
+          </a:xfrm>
+          <a:prstGeom prst="rect">
+            <a:avLst/>
+          </a:prstGeom>
+          <a:solidFill>
+            <a:srgbClr val="FFFFFF">
+              <a:alpha val="0"/>
+            </a:srgbClr>
+          </a:solidFill>
+          <a:ln w="0">
+            <a:solidFill>
+              <a:srgbClr val="000000">
+                <a:alpha val="0"/>
+              </a:srgbClr>
+            </a:solidFill>
+            <a:prstDash val="solid"/>
+          </a:ln>
+        </p:spPr>
+        <p:txBody>
+          <a:bodyPr lIns="0" tIns="0" rIns="0" bIns="0" anchor="t"/>
+          <a:lstStyle/>
+          <a:p>
+            <a:pPr algn="r">
+              <a:defRPr sz="713" b="0">
+                <a:solidFill>
+                  <a:srgbClr val="1F252B"/>
+                </a:solidFill>
+              </a:defRPr>
+            </a:pPr>
+            <a:r>
+              <a:rPr sz="713" b="0">
+                <a:solidFill>
+                  <a:srgbClr val="1F252B"/>
+                </a:solidFill>
+              </a:rPr>
+              <a:t>22,316</a:t>
+            </a:r>
+          </a:p>
+        </p:txBody>
+      </p:sp>
+      <p:sp>
+        <p:nvSpPr>
+          <p:cNvPr id="58" name="Abgerundetes Rechteck 57">
+            <a:extLst>
+              <a:ext uri="{FF2B5EF4-FFF2-40B4-BE49-F238E27FC236}">
+                <a16:creationId xmlns:a16="http://schemas.microsoft.com/office/drawing/2014/main" id="{1D70A64E-7283-4C4C-8723-158917D8609B}"/>
+              </a:ext>
+            </a:extLst>
+          </p:cNvPr>
+          <p:cNvSpPr>
+            <a:spLocks noGrp="1"/>
+          </p:cNvSpPr>
+          <p:nvPr/>
+        </p:nvSpPr>
+        <p:spPr>
+          <a:xfrm>
+            <a:off x="5810250" y="4629150"/>
+            <a:ext cx="4876800" cy="228600"/>
+          </a:xfrm>
+          <a:prstGeom prst="roundRect">
+            <a:avLst>
+              <a:gd name="adj" fmla="val 9000"/>
+            </a:avLst>
+          </a:prstGeom>
+          <a:solidFill>
+            <a:srgbClr val="F8F8F8"/>
+          </a:solidFill>
+          <a:ln w="5715">
+            <a:solidFill>
+              <a:srgbClr val="EEF0F2"/>
+            </a:solidFill>
+            <a:prstDash val="solid"/>
+          </a:ln>
+        </p:spPr>
+        <p:txBody>
+          <a:bodyPr/>
+          <a:lstStyle/>
+          <a:p>
+            <a:endParaRPr lang="en-US"/>
+          </a:p>
+        </p:txBody>
+      </p:sp>
+      <p:sp>
+        <p:nvSpPr>
+          <p:cNvPr id="59" name="Rechteck 58">
+            <a:extLst>
+              <a:ext uri="{FF2B5EF4-FFF2-40B4-BE49-F238E27FC236}">
+                <a16:creationId xmlns:a16="http://schemas.microsoft.com/office/drawing/2014/main" id="{22C7D5FF-00AE-40BC-9BA0-DFE40589324B}"/>
+              </a:ext>
+            </a:extLst>
+          </p:cNvPr>
+          <p:cNvSpPr>
+            <a:spLocks noGrp="1"/>
+          </p:cNvSpPr>
+          <p:nvPr/>
+        </p:nvSpPr>
+        <p:spPr>
+          <a:xfrm>
+            <a:off x="5962650" y="4676775"/>
+            <a:ext cx="2095500" cy="142875"/>
+          </a:xfrm>
+          <a:prstGeom prst="rect">
+            <a:avLst/>
+          </a:prstGeom>
+          <a:solidFill>
+            <a:srgbClr val="FFFFFF">
+              <a:alpha val="0"/>
+            </a:srgbClr>
+          </a:solidFill>
+          <a:ln w="0">
+            <a:solidFill>
+              <a:srgbClr val="000000">
+                <a:alpha val="0"/>
+              </a:srgbClr>
+            </a:solidFill>
+            <a:prstDash val="solid"/>
+          </a:ln>
+        </p:spPr>
+        <p:txBody>
+          <a:bodyPr lIns="0" tIns="0" rIns="0" bIns="0" anchor="t">
+            <a:normAutofit/>
+          </a:bodyPr>
+          <a:lstStyle/>
+          <a:p>
+            <a:pPr algn="l">
+              <a:defRPr sz="713" b="0">
+                <a:solidFill>
+                  <a:srgbClr val="1F252B"/>
+                </a:solidFill>
+              </a:defRPr>
+            </a:pPr>
+            <a:r>
+              <a:rPr sz="713" b="0">
+                <a:solidFill>
+                  <a:srgbClr val="1F252B"/>
+                </a:solidFill>
+              </a:rPr>
+              <a:t>XGBoost</a:t>
+            </a:r>
+          </a:p>
+        </p:txBody>
+      </p:sp>
+      <p:sp>
+        <p:nvSpPr>
+          <p:cNvPr id="60" name="Rechteck 59">
+            <a:extLst>
+              <a:ext uri="{FF2B5EF4-FFF2-40B4-BE49-F238E27FC236}">
+                <a16:creationId xmlns:a16="http://schemas.microsoft.com/office/drawing/2014/main" id="{2AC3EE94-9F46-4CDA-AE21-4330BFE92E03}"/>
+              </a:ext>
+            </a:extLst>
+          </p:cNvPr>
+          <p:cNvSpPr>
+            <a:spLocks noGrp="1"/>
+          </p:cNvSpPr>
+          <p:nvPr/>
+        </p:nvSpPr>
+        <p:spPr>
+          <a:xfrm>
+            <a:off x="8648700" y="4676775"/>
+            <a:ext cx="685800" cy="142875"/>
+          </a:xfrm>
+          <a:prstGeom prst="rect">
+            <a:avLst/>
+          </a:prstGeom>
+          <a:solidFill>
+            <a:srgbClr val="FFFFFF">
+              <a:alpha val="0"/>
+            </a:srgbClr>
+          </a:solidFill>
+          <a:ln w="0">
+            <a:solidFill>
+              <a:srgbClr val="000000">
+                <a:alpha val="0"/>
+              </a:srgbClr>
+            </a:solidFill>
+            <a:prstDash val="solid"/>
+          </a:ln>
+        </p:spPr>
+        <p:txBody>
+          <a:bodyPr lIns="0" tIns="0" rIns="0" bIns="0" anchor="t"/>
+          <a:lstStyle/>
+          <a:p>
+            <a:pPr algn="r">
+              <a:defRPr sz="713" b="0">
+                <a:solidFill>
+                  <a:srgbClr val="1F252B"/>
+                </a:solidFill>
+              </a:defRPr>
+            </a:pPr>
+            <a:r>
+              <a:rPr sz="713" b="0">
+                <a:solidFill>
+                  <a:srgbClr val="1F252B"/>
+                </a:solidFill>
+              </a:rPr>
+              <a:t>4,459</a:t>
+            </a:r>
+          </a:p>
+        </p:txBody>
+      </p:sp>
+      <p:sp>
+        <p:nvSpPr>
+          <p:cNvPr id="61" name="Rechteck 60">
+            <a:extLst>
+              <a:ext uri="{FF2B5EF4-FFF2-40B4-BE49-F238E27FC236}">
+                <a16:creationId xmlns:a16="http://schemas.microsoft.com/office/drawing/2014/main" id="{73FDE3B9-DFA9-4506-8190-414D8D4AFB58}"/>
+              </a:ext>
+            </a:extLst>
+          </p:cNvPr>
+          <p:cNvSpPr>
+            <a:spLocks noGrp="1"/>
+          </p:cNvSpPr>
+          <p:nvPr/>
+        </p:nvSpPr>
+        <p:spPr>
+          <a:xfrm>
+            <a:off x="9829800" y="4676775"/>
+            <a:ext cx="685800" cy="142875"/>
+          </a:xfrm>
+          <a:prstGeom prst="rect">
+            <a:avLst/>
+          </a:prstGeom>
+          <a:solidFill>
+            <a:srgbClr val="FFFFFF">
+              <a:alpha val="0"/>
+            </a:srgbClr>
+          </a:solidFill>
+          <a:ln w="0">
+            <a:solidFill>
+              <a:srgbClr val="000000">
+                <a:alpha val="0"/>
+              </a:srgbClr>
+            </a:solidFill>
+            <a:prstDash val="solid"/>
+          </a:ln>
+        </p:spPr>
+        <p:txBody>
+          <a:bodyPr lIns="0" tIns="0" rIns="0" bIns="0" anchor="t"/>
+          <a:lstStyle/>
+          <a:p>
+            <a:pPr algn="r">
+              <a:defRPr sz="713" b="0">
+                <a:solidFill>
+                  <a:srgbClr val="1F252B"/>
+                </a:solidFill>
+              </a:defRPr>
+            </a:pPr>
+            <a:r>
+              <a:rPr sz="713" b="0">
+                <a:solidFill>
+                  <a:srgbClr val="1F252B"/>
+                </a:solidFill>
+              </a:rPr>
+              <a:t>14,583</a:t>
+            </a:r>
+          </a:p>
+        </p:txBody>
+      </p:sp>
+      <p:sp>
+        <p:nvSpPr>
+          <p:cNvPr id="62" name="Rechteck 61">
+            <a:extLst>
+              <a:ext uri="{FF2B5EF4-FFF2-40B4-BE49-F238E27FC236}">
+                <a16:creationId xmlns:a16="http://schemas.microsoft.com/office/drawing/2014/main" id="{C8E61289-F602-4F4A-A2ED-BEC5E1E5F7CB}"/>
+              </a:ext>
+            </a:extLst>
+          </p:cNvPr>
+          <p:cNvSpPr>
+            <a:spLocks noGrp="1"/>
+          </p:cNvSpPr>
+          <p:nvPr/>
+        </p:nvSpPr>
+        <p:spPr>
+          <a:xfrm>
+            <a:off x="5810250" y="4838700"/>
+            <a:ext cx="4876800" cy="190500"/>
+          </a:xfrm>
+          <a:prstGeom prst="rect">
+            <a:avLst/>
+          </a:prstGeom>
+          <a:solidFill>
+            <a:srgbClr val="FFFFFF">
+              <a:alpha val="0"/>
+            </a:srgbClr>
+          </a:solidFill>
+          <a:ln w="0">
+            <a:solidFill>
+              <a:srgbClr val="000000">
+                <a:alpha val="0"/>
+              </a:srgbClr>
+            </a:solidFill>
+            <a:prstDash val="solid"/>
+          </a:ln>
+        </p:spPr>
+        <p:txBody>
+          <a:bodyPr/>
+          <a:lstStyle/>
+          <a:p>
+            <a:endParaRPr lang="en-US"/>
+          </a:p>
+        </p:txBody>
+      </p:sp>
+      <p:sp>
+        <p:nvSpPr>
+          <p:cNvPr id="63" name="Rechteck 62">
+            <a:extLst>
+              <a:ext uri="{FF2B5EF4-FFF2-40B4-BE49-F238E27FC236}">
+                <a16:creationId xmlns:a16="http://schemas.microsoft.com/office/drawing/2014/main" id="{6B8370B3-FEAA-439F-8D2A-0DFD6D0FB6C1}"/>
+              </a:ext>
+            </a:extLst>
+          </p:cNvPr>
+          <p:cNvSpPr>
+            <a:spLocks noGrp="1"/>
+          </p:cNvSpPr>
+          <p:nvPr/>
+        </p:nvSpPr>
+        <p:spPr>
+          <a:xfrm>
+            <a:off x="5829300" y="4848225"/>
+            <a:ext cx="2476500" cy="171450"/>
+          </a:xfrm>
+          <a:prstGeom prst="rect">
+            <a:avLst/>
+          </a:prstGeom>
+          <a:solidFill>
+            <a:srgbClr val="FFFFFF">
+              <a:alpha val="0"/>
+            </a:srgbClr>
+          </a:solidFill>
+          <a:ln w="0">
+            <a:solidFill>
+              <a:srgbClr val="000000">
+                <a:alpha val="0"/>
+              </a:srgbClr>
+            </a:solidFill>
+            <a:prstDash val="solid"/>
+          </a:ln>
+        </p:spPr>
+        <p:txBody>
+          <a:bodyPr lIns="0" tIns="0" rIns="0" bIns="0" anchor="t"/>
+          <a:lstStyle/>
+          <a:p>
+            <a:pPr algn="l">
+              <a:defRPr sz="750" b="1">
+                <a:solidFill>
+                  <a:srgbClr val="5E5E5D"/>
+                </a:solidFill>
+              </a:defRPr>
+            </a:pPr>
+            <a:r>
+              <a:rPr sz="750" b="1">
+                <a:solidFill>
+                  <a:srgbClr val="5E5E5D"/>
+                </a:solidFill>
+              </a:rPr>
+              <a:t>XGBOOST REFINEMENT</a:t>
+            </a:r>
+          </a:p>
+        </p:txBody>
+      </p:sp>
+      <p:sp>
+        <p:nvSpPr>
+          <p:cNvPr id="64" name="Rechteck 63">
+            <a:extLst>
+              <a:ext uri="{FF2B5EF4-FFF2-40B4-BE49-F238E27FC236}">
+                <a16:creationId xmlns:a16="http://schemas.microsoft.com/office/drawing/2014/main" id="{E50C9CB2-0885-4B5B-B0AA-A62B89F04E77}"/>
+              </a:ext>
+            </a:extLst>
+          </p:cNvPr>
+          <p:cNvSpPr>
+            <a:spLocks noGrp="1"/>
+          </p:cNvSpPr>
+          <p:nvPr/>
+        </p:nvSpPr>
+        <p:spPr>
+          <a:xfrm>
+            <a:off x="5829300" y="5029200"/>
+            <a:ext cx="4857750" cy="9525"/>
+          </a:xfrm>
+          <a:prstGeom prst="rect">
+            <a:avLst/>
+          </a:prstGeom>
+          <a:solidFill>
+            <a:srgbClr val="EEF0F2"/>
+          </a:solidFill>
+          <a:ln w="0">
+            <a:solidFill>
+              <a:srgbClr val="000000">
+                <a:alpha val="0"/>
+              </a:srgbClr>
+            </a:solidFill>
+            <a:prstDash val="solid"/>
+          </a:ln>
+        </p:spPr>
+        <p:txBody>
+          <a:bodyPr/>
+          <a:lstStyle/>
+          <a:p>
+            <a:endParaRPr lang="en-US"/>
+          </a:p>
+        </p:txBody>
+      </p:sp>
+      <p:sp>
+        <p:nvSpPr>
+          <p:cNvPr id="65" name="Abgerundetes Rechteck 64">
+            <a:extLst>
+              <a:ext uri="{FF2B5EF4-FFF2-40B4-BE49-F238E27FC236}">
+                <a16:creationId xmlns:a16="http://schemas.microsoft.com/office/drawing/2014/main" id="{AE750D67-C82F-4224-9151-BBDB681E7518}"/>
+              </a:ext>
+            </a:extLst>
+          </p:cNvPr>
+          <p:cNvSpPr>
+            <a:spLocks noGrp="1"/>
+          </p:cNvSpPr>
+          <p:nvPr/>
+        </p:nvSpPr>
+        <p:spPr>
+          <a:xfrm>
+            <a:off x="5810250" y="5067300"/>
+            <a:ext cx="4876800" cy="228600"/>
+          </a:xfrm>
+          <a:prstGeom prst="roundRect">
+            <a:avLst>
+              <a:gd name="adj" fmla="val 9000"/>
+            </a:avLst>
+          </a:prstGeom>
+          <a:solidFill>
+            <a:srgbClr val="FFFFFF"/>
+          </a:solidFill>
+          <a:ln w="5715">
+            <a:solidFill>
+              <a:srgbClr val="EEF0F2"/>
+            </a:solidFill>
+            <a:prstDash val="solid"/>
+          </a:ln>
+        </p:spPr>
+        <p:txBody>
+          <a:bodyPr/>
+          <a:lstStyle/>
+          <a:p>
+            <a:endParaRPr lang="en-US"/>
+          </a:p>
+        </p:txBody>
+      </p:sp>
+      <p:sp>
+        <p:nvSpPr>
+          <p:cNvPr id="66" name="Rechteck 65">
+            <a:extLst>
+              <a:ext uri="{FF2B5EF4-FFF2-40B4-BE49-F238E27FC236}">
+                <a16:creationId xmlns:a16="http://schemas.microsoft.com/office/drawing/2014/main" id="{B93235BE-BE06-4230-8678-3DC4AD9EDF1B}"/>
+              </a:ext>
+            </a:extLst>
+          </p:cNvPr>
+          <p:cNvSpPr>
+            <a:spLocks noGrp="1"/>
+          </p:cNvSpPr>
+          <p:nvPr/>
+        </p:nvSpPr>
+        <p:spPr>
+          <a:xfrm>
+            <a:off x="5962650" y="5114925"/>
+            <a:ext cx="2095500" cy="142875"/>
+          </a:xfrm>
+          <a:prstGeom prst="rect">
+            <a:avLst/>
+          </a:prstGeom>
+          <a:solidFill>
+            <a:srgbClr val="FFFFFF">
+              <a:alpha val="0"/>
+            </a:srgbClr>
+          </a:solidFill>
+          <a:ln w="0">
+            <a:solidFill>
+              <a:srgbClr val="000000">
+                <a:alpha val="0"/>
+              </a:srgbClr>
+            </a:solidFill>
+            <a:prstDash val="solid"/>
+          </a:ln>
+        </p:spPr>
+        <p:txBody>
+          <a:bodyPr lIns="0" tIns="0" rIns="0" bIns="0" anchor="t">
+            <a:normAutofit/>
+          </a:bodyPr>
+          <a:lstStyle/>
+          <a:p>
+            <a:pPr algn="l">
+              <a:defRPr sz="713" b="0">
+                <a:solidFill>
+                  <a:srgbClr val="1F252B"/>
+                </a:solidFill>
+              </a:defRPr>
+            </a:pPr>
+            <a:r>
+              <a:rPr sz="713" b="0">
+                <a:solidFill>
+                  <a:srgbClr val="1F252B"/>
+                </a:solidFill>
+              </a:rPr>
+              <a:t>XGBoost log1p</a:t>
+            </a:r>
+          </a:p>
+        </p:txBody>
+      </p:sp>
+      <p:sp>
+        <p:nvSpPr>
+          <p:cNvPr id="67" name="Rechteck 66">
+            <a:extLst>
+              <a:ext uri="{FF2B5EF4-FFF2-40B4-BE49-F238E27FC236}">
+                <a16:creationId xmlns:a16="http://schemas.microsoft.com/office/drawing/2014/main" id="{96C18DE9-B18B-4708-A0F0-9AEC72F4067C}"/>
+              </a:ext>
+            </a:extLst>
+          </p:cNvPr>
+          <p:cNvSpPr>
+            <a:spLocks noGrp="1"/>
+          </p:cNvSpPr>
+          <p:nvPr/>
+        </p:nvSpPr>
+        <p:spPr>
+          <a:xfrm>
+            <a:off x="8648700" y="5114925"/>
+            <a:ext cx="685800" cy="142875"/>
+          </a:xfrm>
+          <a:prstGeom prst="rect">
+            <a:avLst/>
+          </a:prstGeom>
+          <a:solidFill>
+            <a:srgbClr val="FFFFFF">
+              <a:alpha val="0"/>
+            </a:srgbClr>
+          </a:solidFill>
+          <a:ln w="0">
+            <a:solidFill>
+              <a:srgbClr val="000000">
+                <a:alpha val="0"/>
+              </a:srgbClr>
+            </a:solidFill>
+            <a:prstDash val="solid"/>
+          </a:ln>
+        </p:spPr>
+        <p:txBody>
+          <a:bodyPr lIns="0" tIns="0" rIns="0" bIns="0" anchor="t"/>
+          <a:lstStyle/>
+          <a:p>
+            <a:pPr algn="r">
+              <a:defRPr sz="713" b="0">
+                <a:solidFill>
+                  <a:srgbClr val="1F252B"/>
+                </a:solidFill>
+              </a:defRPr>
+            </a:pPr>
+            <a:r>
+              <a:rPr sz="713" b="0">
+                <a:solidFill>
+                  <a:srgbClr val="1F252B"/>
+                </a:solidFill>
+              </a:rPr>
+              <a:t>4,652</a:t>
+            </a:r>
+          </a:p>
+        </p:txBody>
+      </p:sp>
+      <p:sp>
+        <p:nvSpPr>
+          <p:cNvPr id="68" name="Rechteck 67">
+            <a:extLst>
+              <a:ext uri="{FF2B5EF4-FFF2-40B4-BE49-F238E27FC236}">
+                <a16:creationId xmlns:a16="http://schemas.microsoft.com/office/drawing/2014/main" id="{28CA85A2-1181-4F5E-9BD7-EF38AE8E269E}"/>
+              </a:ext>
+            </a:extLst>
+          </p:cNvPr>
+          <p:cNvSpPr>
+            <a:spLocks noGrp="1"/>
+          </p:cNvSpPr>
+          <p:nvPr/>
+        </p:nvSpPr>
+        <p:spPr>
+          <a:xfrm>
+            <a:off x="9829800" y="5114925"/>
+            <a:ext cx="685800" cy="142875"/>
+          </a:xfrm>
+          <a:prstGeom prst="rect">
+            <a:avLst/>
+          </a:prstGeom>
+          <a:solidFill>
+            <a:srgbClr val="FFFFFF">
+              <a:alpha val="0"/>
+            </a:srgbClr>
+          </a:solidFill>
+          <a:ln w="0">
+            <a:solidFill>
+              <a:srgbClr val="000000">
+                <a:alpha val="0"/>
+              </a:srgbClr>
+            </a:solidFill>
+            <a:prstDash val="solid"/>
+          </a:ln>
+        </p:spPr>
+        <p:txBody>
+          <a:bodyPr lIns="0" tIns="0" rIns="0" bIns="0" anchor="t"/>
+          <a:lstStyle/>
+          <a:p>
+            <a:pPr algn="r">
+              <a:defRPr sz="713" b="0">
+                <a:solidFill>
+                  <a:srgbClr val="1F252B"/>
+                </a:solidFill>
+              </a:defRPr>
+            </a:pPr>
+            <a:r>
+              <a:rPr sz="713" b="0">
+                <a:solidFill>
+                  <a:srgbClr val="1F252B"/>
+                </a:solidFill>
+              </a:rPr>
+              <a:t>19,569</a:t>
+            </a:r>
+          </a:p>
+        </p:txBody>
+      </p:sp>
+      <p:sp>
+        <p:nvSpPr>
+          <p:cNvPr id="69" name="Abgerundetes Rechteck 68">
+            <a:extLst>
+              <a:ext uri="{FF2B5EF4-FFF2-40B4-BE49-F238E27FC236}">
+                <a16:creationId xmlns:a16="http://schemas.microsoft.com/office/drawing/2014/main" id="{04D3547A-341A-4F8F-BA07-A36EC650A1E0}"/>
+              </a:ext>
+            </a:extLst>
+          </p:cNvPr>
+          <p:cNvSpPr>
+            <a:spLocks noGrp="1"/>
+          </p:cNvSpPr>
+          <p:nvPr/>
+        </p:nvSpPr>
+        <p:spPr>
+          <a:xfrm>
+            <a:off x="5810250" y="5295900"/>
+            <a:ext cx="4876800" cy="228600"/>
+          </a:xfrm>
+          <a:prstGeom prst="roundRect">
+            <a:avLst>
+              <a:gd name="adj" fmla="val 9000"/>
+            </a:avLst>
+          </a:prstGeom>
+          <a:solidFill>
+            <a:srgbClr val="F8F8F8"/>
+          </a:solidFill>
+          <a:ln w="5715">
+            <a:solidFill>
+              <a:srgbClr val="EEF0F2"/>
+            </a:solidFill>
+            <a:prstDash val="solid"/>
+          </a:ln>
+        </p:spPr>
+        <p:txBody>
+          <a:bodyPr/>
+          <a:lstStyle/>
+          <a:p>
+            <a:endParaRPr lang="en-US"/>
+          </a:p>
+        </p:txBody>
+      </p:sp>
+      <p:sp>
+        <p:nvSpPr>
+          <p:cNvPr id="70" name="Rechteck 69">
+            <a:extLst>
+              <a:ext uri="{FF2B5EF4-FFF2-40B4-BE49-F238E27FC236}">
+                <a16:creationId xmlns:a16="http://schemas.microsoft.com/office/drawing/2014/main" id="{37302212-DA34-4ADC-8D98-08494A0C3C02}"/>
+              </a:ext>
+            </a:extLst>
+          </p:cNvPr>
+          <p:cNvSpPr>
+            <a:spLocks noGrp="1"/>
+          </p:cNvSpPr>
+          <p:nvPr/>
+        </p:nvSpPr>
+        <p:spPr>
+          <a:xfrm>
+            <a:off x="5962650" y="5343525"/>
+            <a:ext cx="2095500" cy="142875"/>
+          </a:xfrm>
+          <a:prstGeom prst="rect">
+            <a:avLst/>
+          </a:prstGeom>
+          <a:solidFill>
+            <a:srgbClr val="FFFFFF">
+              <a:alpha val="0"/>
+            </a:srgbClr>
+          </a:solidFill>
+          <a:ln w="0">
+            <a:solidFill>
+              <a:srgbClr val="000000">
+                <a:alpha val="0"/>
+              </a:srgbClr>
+            </a:solidFill>
+            <a:prstDash val="solid"/>
+          </a:ln>
+        </p:spPr>
+        <p:txBody>
+          <a:bodyPr lIns="0" tIns="0" rIns="0" bIns="0" anchor="t">
+            <a:normAutofit/>
+          </a:bodyPr>
+          <a:lstStyle/>
+          <a:p>
+            <a:pPr algn="l">
+              <a:defRPr sz="713" b="0">
+                <a:solidFill>
+                  <a:srgbClr val="1F252B"/>
+                </a:solidFill>
+              </a:defRPr>
+            </a:pPr>
+            <a:r>
+              <a:rPr sz="713" b="0">
+                <a:solidFill>
+                  <a:srgbClr val="1F252B"/>
+                </a:solidFill>
+              </a:rPr>
+              <a:t>XGBoost tuned log1p</a:t>
+            </a:r>
+          </a:p>
+        </p:txBody>
+      </p:sp>
+      <p:sp>
+        <p:nvSpPr>
+          <p:cNvPr id="71" name="Rechteck 70">
+            <a:extLst>
+              <a:ext uri="{FF2B5EF4-FFF2-40B4-BE49-F238E27FC236}">
+                <a16:creationId xmlns:a16="http://schemas.microsoft.com/office/drawing/2014/main" id="{B365DEA5-53DA-47A4-B421-B37FBC747BB4}"/>
+              </a:ext>
+            </a:extLst>
+          </p:cNvPr>
+          <p:cNvSpPr>
+            <a:spLocks noGrp="1"/>
+          </p:cNvSpPr>
+          <p:nvPr/>
+        </p:nvSpPr>
+        <p:spPr>
+          <a:xfrm>
+            <a:off x="8648700" y="5343525"/>
+            <a:ext cx="685800" cy="142875"/>
+          </a:xfrm>
+          <a:prstGeom prst="rect">
+            <a:avLst/>
+          </a:prstGeom>
+          <a:solidFill>
+            <a:srgbClr val="FFFFFF">
+              <a:alpha val="0"/>
+            </a:srgbClr>
+          </a:solidFill>
+          <a:ln w="0">
+            <a:solidFill>
+              <a:srgbClr val="000000">
+                <a:alpha val="0"/>
+              </a:srgbClr>
+            </a:solidFill>
+            <a:prstDash val="solid"/>
+          </a:ln>
+        </p:spPr>
+        <p:txBody>
+          <a:bodyPr lIns="0" tIns="0" rIns="0" bIns="0" anchor="t"/>
+          <a:lstStyle/>
+          <a:p>
+            <a:pPr algn="r">
+              <a:defRPr sz="713" b="0">
+                <a:solidFill>
+                  <a:srgbClr val="1F252B"/>
+                </a:solidFill>
+              </a:defRPr>
+            </a:pPr>
+            <a:r>
+              <a:rPr sz="713" b="0">
+                <a:solidFill>
+                  <a:srgbClr val="1F252B"/>
+                </a:solidFill>
+              </a:rPr>
+              <a:t>4,686</a:t>
+            </a:r>
+          </a:p>
+        </p:txBody>
+      </p:sp>
+      <p:sp>
+        <p:nvSpPr>
+          <p:cNvPr id="72" name="Rechteck 71">
+            <a:extLst>
+              <a:ext uri="{FF2B5EF4-FFF2-40B4-BE49-F238E27FC236}">
+                <a16:creationId xmlns:a16="http://schemas.microsoft.com/office/drawing/2014/main" id="{188CE4C7-F3D0-4E7E-8570-74C6C502A8BD}"/>
+              </a:ext>
+            </a:extLst>
+          </p:cNvPr>
+          <p:cNvSpPr>
+            <a:spLocks noGrp="1"/>
+          </p:cNvSpPr>
+          <p:nvPr/>
+        </p:nvSpPr>
+        <p:spPr>
+          <a:xfrm>
+            <a:off x="9829800" y="5343525"/>
+            <a:ext cx="685800" cy="142875"/>
+          </a:xfrm>
+          <a:prstGeom prst="rect">
+            <a:avLst/>
+          </a:prstGeom>
+          <a:solidFill>
+            <a:srgbClr val="FFFFFF">
+              <a:alpha val="0"/>
+            </a:srgbClr>
+          </a:solidFill>
+          <a:ln w="0">
+            <a:solidFill>
+              <a:srgbClr val="000000">
+                <a:alpha val="0"/>
+              </a:srgbClr>
+            </a:solidFill>
+            <a:prstDash val="solid"/>
+          </a:ln>
+        </p:spPr>
+        <p:txBody>
+          <a:bodyPr lIns="0" tIns="0" rIns="0" bIns="0" anchor="t"/>
+          <a:lstStyle/>
+          <a:p>
+            <a:pPr algn="r">
+              <a:defRPr sz="713" b="0">
+                <a:solidFill>
+                  <a:srgbClr val="1F252B"/>
+                </a:solidFill>
+              </a:defRPr>
+            </a:pPr>
+            <a:r>
+              <a:rPr sz="713" b="0">
+                <a:solidFill>
+                  <a:srgbClr val="1F252B"/>
+                </a:solidFill>
+              </a:rPr>
+              <a:t>16,534</a:t>
+            </a:r>
+          </a:p>
+        </p:txBody>
+      </p:sp>
+      <p:sp>
+        <p:nvSpPr>
+          <p:cNvPr id="73" name="Abgerundetes Rechteck 72">
+            <a:extLst>
+              <a:ext uri="{FF2B5EF4-FFF2-40B4-BE49-F238E27FC236}">
+                <a16:creationId xmlns:a16="http://schemas.microsoft.com/office/drawing/2014/main" id="{D0293333-4FBB-4883-B852-CE378F997BC6}"/>
+              </a:ext>
+            </a:extLst>
+          </p:cNvPr>
+          <p:cNvSpPr>
+            <a:spLocks noGrp="1"/>
+          </p:cNvSpPr>
+          <p:nvPr/>
+        </p:nvSpPr>
+        <p:spPr>
+          <a:xfrm>
+            <a:off x="5810250" y="5524500"/>
+            <a:ext cx="4876800" cy="228600"/>
+          </a:xfrm>
+          <a:prstGeom prst="roundRect">
+            <a:avLst>
+              <a:gd name="adj" fmla="val 9000"/>
+            </a:avLst>
+          </a:prstGeom>
+          <a:solidFill>
+            <a:srgbClr val="F4E6EB"/>
+          </a:solidFill>
+          <a:ln w="13335">
+            <a:solidFill>
+              <a:srgbClr val="910830"/>
+            </a:solidFill>
+            <a:prstDash val="solid"/>
+          </a:ln>
+        </p:spPr>
+        <p:txBody>
+          <a:bodyPr/>
+          <a:lstStyle/>
+          <a:p>
+            <a:endParaRPr lang="en-US"/>
+          </a:p>
+        </p:txBody>
+      </p:sp>
+      <p:sp>
+        <p:nvSpPr>
+          <p:cNvPr id="74" name="Rechteck 73">
+            <a:extLst>
+              <a:ext uri="{FF2B5EF4-FFF2-40B4-BE49-F238E27FC236}">
+                <a16:creationId xmlns:a16="http://schemas.microsoft.com/office/drawing/2014/main" id="{4D612161-9484-4CB9-BF3A-104471F38228}"/>
+              </a:ext>
+            </a:extLst>
+          </p:cNvPr>
+          <p:cNvSpPr>
+            <a:spLocks noGrp="1"/>
+          </p:cNvSpPr>
+          <p:nvPr/>
+        </p:nvSpPr>
+        <p:spPr>
+          <a:xfrm>
+            <a:off x="5962650" y="5572125"/>
+            <a:ext cx="2095500" cy="142875"/>
+          </a:xfrm>
+          <a:prstGeom prst="rect">
+            <a:avLst/>
+          </a:prstGeom>
+          <a:solidFill>
+            <a:srgbClr val="FFFFFF">
+              <a:alpha val="0"/>
+            </a:srgbClr>
+          </a:solidFill>
+          <a:ln w="0">
+            <a:solidFill>
+              <a:srgbClr val="000000">
+                <a:alpha val="0"/>
+              </a:srgbClr>
+            </a:solidFill>
+            <a:prstDash val="solid"/>
+          </a:ln>
+        </p:spPr>
+        <p:txBody>
+          <a:bodyPr lIns="0" tIns="0" rIns="0" bIns="0" anchor="t">
+            <a:normAutofit/>
+          </a:bodyPr>
+          <a:lstStyle/>
+          <a:p>
+            <a:pPr algn="l">
+              <a:defRPr sz="713" b="1">
+                <a:solidFill>
+                  <a:srgbClr val="910830"/>
+                </a:solidFill>
+              </a:defRPr>
+            </a:pPr>
+            <a:r>
+              <a:rPr sz="713" b="1">
+                <a:solidFill>
+                  <a:srgbClr val="910830"/>
+                </a:solidFill>
+              </a:rPr>
+              <a:t>XGBoost tuned</a:t>
+            </a:r>
+          </a:p>
+        </p:txBody>
+      </p:sp>
+      <p:sp>
+        <p:nvSpPr>
+          <p:cNvPr id="75" name="Rechteck 74">
+            <a:extLst>
+              <a:ext uri="{FF2B5EF4-FFF2-40B4-BE49-F238E27FC236}">
+                <a16:creationId xmlns:a16="http://schemas.microsoft.com/office/drawing/2014/main" id="{0EF4CABE-CF69-4504-9C1C-E37588028EC7}"/>
+              </a:ext>
+            </a:extLst>
+          </p:cNvPr>
+          <p:cNvSpPr>
+            <a:spLocks noGrp="1"/>
+          </p:cNvSpPr>
+          <p:nvPr/>
+        </p:nvSpPr>
+        <p:spPr>
+          <a:xfrm>
+            <a:off x="8648700" y="5572125"/>
+            <a:ext cx="685800" cy="142875"/>
+          </a:xfrm>
+          <a:prstGeom prst="rect">
+            <a:avLst/>
+          </a:prstGeom>
+          <a:solidFill>
+            <a:srgbClr val="FFFFFF">
+              <a:alpha val="0"/>
+            </a:srgbClr>
+          </a:solidFill>
+          <a:ln w="0">
+            <a:solidFill>
+              <a:srgbClr val="000000">
+                <a:alpha val="0"/>
+              </a:srgbClr>
+            </a:solidFill>
+            <a:prstDash val="solid"/>
+          </a:ln>
+        </p:spPr>
+        <p:txBody>
+          <a:bodyPr lIns="0" tIns="0" rIns="0" bIns="0" anchor="t"/>
+          <a:lstStyle/>
+          <a:p>
+            <a:pPr algn="r">
+              <a:defRPr sz="713" b="1">
+                <a:solidFill>
+                  <a:srgbClr val="910830"/>
+                </a:solidFill>
+              </a:defRPr>
+            </a:pPr>
+            <a:r>
+              <a:rPr sz="713" b="1">
+                <a:solidFill>
+                  <a:srgbClr val="910830"/>
+                </a:solidFill>
+              </a:rPr>
+              <a:t>4,370</a:t>
+            </a:r>
+          </a:p>
+        </p:txBody>
+      </p:sp>
+      <p:sp>
+        <p:nvSpPr>
+          <p:cNvPr id="76" name="Rechteck 75">
+            <a:extLst>
+              <a:ext uri="{FF2B5EF4-FFF2-40B4-BE49-F238E27FC236}">
+                <a16:creationId xmlns:a16="http://schemas.microsoft.com/office/drawing/2014/main" id="{F9863886-8C82-456C-9609-F4DF2882538E}"/>
+              </a:ext>
+            </a:extLst>
+          </p:cNvPr>
+          <p:cNvSpPr>
+            <a:spLocks noGrp="1"/>
+          </p:cNvSpPr>
+          <p:nvPr/>
+        </p:nvSpPr>
+        <p:spPr>
+          <a:xfrm>
+            <a:off x="9829800" y="5572125"/>
+            <a:ext cx="685800" cy="142875"/>
+          </a:xfrm>
+          <a:prstGeom prst="rect">
+            <a:avLst/>
+          </a:prstGeom>
+          <a:solidFill>
+            <a:srgbClr val="FFFFFF">
+              <a:alpha val="0"/>
+            </a:srgbClr>
+          </a:solidFill>
+          <a:ln w="0">
+            <a:solidFill>
+              <a:srgbClr val="000000">
+                <a:alpha val="0"/>
+              </a:srgbClr>
+            </a:solidFill>
+            <a:prstDash val="solid"/>
+          </a:ln>
+        </p:spPr>
+        <p:txBody>
+          <a:bodyPr lIns="0" tIns="0" rIns="0" bIns="0" anchor="t"/>
+          <a:lstStyle/>
+          <a:p>
+            <a:pPr algn="r">
+              <a:defRPr sz="713" b="1">
+                <a:solidFill>
+                  <a:srgbClr val="910830"/>
+                </a:solidFill>
+              </a:defRPr>
+            </a:pPr>
+            <a:r>
+              <a:rPr sz="713" b="1">
+                <a:solidFill>
+                  <a:srgbClr val="910830"/>
+                </a:solidFill>
+              </a:rPr>
+              <a:t>13,890</a:t>
+            </a:r>
+          </a:p>
+        </p:txBody>
+      </p:sp>
+      <p:sp>
+        <p:nvSpPr>
+          <p:cNvPr id="77" name="Abgerundetes Rechteck 76">
+            <a:extLst>
+              <a:ext uri="{FF2B5EF4-FFF2-40B4-BE49-F238E27FC236}">
+                <a16:creationId xmlns:a16="http://schemas.microsoft.com/office/drawing/2014/main" id="{506114CA-FB81-498F-A5B5-6521370BBE03}"/>
+              </a:ext>
+            </a:extLst>
+          </p:cNvPr>
+          <p:cNvSpPr>
+            <a:spLocks noGrp="1"/>
+          </p:cNvSpPr>
+          <p:nvPr/>
+        </p:nvSpPr>
+        <p:spPr>
+          <a:xfrm>
+            <a:off x="838200" y="5829300"/>
+            <a:ext cx="9848850" cy="457200"/>
+          </a:xfrm>
+          <a:prstGeom prst="roundRect">
+            <a:avLst>
+              <a:gd name="adj" fmla="val 9000"/>
+            </a:avLst>
+          </a:prstGeom>
+          <a:solidFill>
+            <a:srgbClr val="F4E6EB"/>
+          </a:solidFill>
+          <a:ln w="11430">
+            <a:solidFill>
+              <a:srgbClr val="910830"/>
+            </a:solidFill>
+            <a:prstDash val="solid"/>
+          </a:ln>
+        </p:spPr>
+        <p:txBody>
+          <a:bodyPr/>
+          <a:lstStyle/>
+          <a:p>
+            <a:endParaRPr lang="en-US"/>
+          </a:p>
+        </p:txBody>
+      </p:sp>
+      <p:sp>
+        <p:nvSpPr>
+          <p:cNvPr id="78" name="Rechteck 77">
+            <a:extLst>
+              <a:ext uri="{FF2B5EF4-FFF2-40B4-BE49-F238E27FC236}">
+                <a16:creationId xmlns:a16="http://schemas.microsoft.com/office/drawing/2014/main" id="{F599DAF4-91D6-42D9-9D3D-A424BC80938E}"/>
+              </a:ext>
+            </a:extLst>
+          </p:cNvPr>
+          <p:cNvSpPr>
+            <a:spLocks noGrp="1"/>
+          </p:cNvSpPr>
+          <p:nvPr/>
+        </p:nvSpPr>
+        <p:spPr>
+          <a:xfrm>
+            <a:off x="1047750" y="5962650"/>
+            <a:ext cx="1066800" cy="190500"/>
+          </a:xfrm>
+          <a:prstGeom prst="rect">
+            <a:avLst/>
+          </a:prstGeom>
+          <a:solidFill>
+            <a:srgbClr val="FFFFFF">
+              <a:alpha val="0"/>
+            </a:srgbClr>
+          </a:solidFill>
+          <a:ln w="0">
+            <a:solidFill>
+              <a:srgbClr val="000000">
+                <a:alpha val="0"/>
+              </a:srgbClr>
+            </a:solidFill>
+            <a:prstDash val="solid"/>
+          </a:ln>
+        </p:spPr>
+        <p:txBody>
+          <a:bodyPr lIns="0" tIns="0" rIns="0" bIns="0" anchor="t"/>
+          <a:lstStyle/>
+          <a:p>
+            <a:pPr algn="l">
+              <a:defRPr sz="1125" b="1">
+                <a:solidFill>
+                  <a:srgbClr val="910830"/>
+                </a:solidFill>
+              </a:defRPr>
+            </a:pPr>
+            <a:r>
+              <a:rPr sz="1125" b="1">
+                <a:solidFill>
+                  <a:srgbClr val="910830"/>
+                </a:solidFill>
+              </a:rPr>
+              <a:t>Takeaway</a:t>
+            </a:r>
+          </a:p>
+        </p:txBody>
+      </p:sp>
+      <p:sp>
+        <p:nvSpPr>
+          <p:cNvPr id="79" name="Rechteck 78">
+            <a:extLst>
+              <a:ext uri="{FF2B5EF4-FFF2-40B4-BE49-F238E27FC236}">
+                <a16:creationId xmlns:a16="http://schemas.microsoft.com/office/drawing/2014/main" id="{5285CF43-641F-4704-9FF6-EA6A92AEF459}"/>
+              </a:ext>
+            </a:extLst>
+          </p:cNvPr>
+          <p:cNvSpPr>
+            <a:spLocks noGrp="1"/>
+          </p:cNvSpPr>
+          <p:nvPr/>
+        </p:nvSpPr>
+        <p:spPr>
+          <a:xfrm>
+            <a:off x="2152650" y="5953125"/>
+            <a:ext cx="8343900" cy="228600"/>
+          </a:xfrm>
+          <a:prstGeom prst="rect">
+            <a:avLst/>
+          </a:prstGeom>
+          <a:solidFill>
+            <a:srgbClr val="FFFFFF">
+              <a:alpha val="0"/>
+            </a:srgbClr>
+          </a:solidFill>
+          <a:ln w="0">
+            <a:solidFill>
+              <a:srgbClr val="000000">
+                <a:alpha val="0"/>
+              </a:srgbClr>
+            </a:solidFill>
+            <a:prstDash val="solid"/>
+          </a:ln>
+        </p:spPr>
+        <p:txBody>
+          <a:bodyPr lIns="0" tIns="0" rIns="0" bIns="0" anchor="t">
+            <a:normAutofit/>
+          </a:bodyPr>
+          <a:lstStyle/>
+          <a:p>
+            <a:pPr algn="l">
+              <a:defRPr sz="975" b="1">
+                <a:solidFill>
+                  <a:srgbClr val="1F252B"/>
+                </a:solidFill>
+              </a:defRPr>
+            </a:pPr>
+            <a:r>
+              <a:rPr sz="975" b="1">
+                <a:solidFill>
+                  <a:srgbClr val="1F252B"/>
+                </a:solidFill>
+              </a:rPr>
+              <a:t>Boosted trees fit this tabular time-series task best; XGBoost tuned achieves the lowest rolling validation error on both horizons.</a:t>
+            </a:r>
+          </a:p>
+        </p:txBody>
+      </p:sp>
     </p:spTree>
     <p:extLst>
       <p:ext uri="{BB962C8B-B14F-4D97-AF65-F5344CB8AC3E}">
-        <p14:creationId xmlns:p14="http://schemas.microsoft.com/office/powerpoint/2010/main" val="1423848138"/>
+        <p14:creationId xmlns:p14="http://schemas.microsoft.com/office/powerpoint/2010/main" val="841726156"/>
       </p:ext>
     </p:extLst>
   </p:cSld>
+  <p:clrMapOvr>
+    <a:masterClrMapping/>
+  </p:clrMapOvr>
 </p:sld>
 </file>
 
 <file path=ppt/theme/theme1.xml><?xml version="1.0" encoding="utf-8"?>
-<a:theme xmlns:a="http://schemas.openxmlformats.org/drawingml/2006/main" name="ChatGPT">
+<a:theme xmlns:a="http://schemas.openxmlformats.org/drawingml/2006/main" name="Office">
   <a:themeElements>
-    <a:clrScheme name="ChatGPT">
+    <a:clrScheme name="Office">
       <a:dk1>
-        <a:srgbClr val="000000"/>
+        <a:sysClr val="windowText" lastClr="000000"/>
       </a:dk1>
       <a:lt1>
-        <a:srgbClr val="FFFFFF"/>
+        <a:sysClr val="window" lastClr="FFFFFF"/>
       </a:lt1>
       <a:dk2>
         <a:srgbClr val="0E2841"/>
@@ -1262,46 +8118,189 @@
     </a:clrScheme>
     <a:fontScheme name="Office">
       <a:majorFont>
-        <a:latin typeface="Calibri Light"/>
-        <a:ea typeface="Calibri Light"/>
-        <a:cs typeface="Calibri Light"/>
+        <a:latin typeface="Aptos Display" panose="02110004020202020204"/>
+        <a:ea typeface=""/>
+        <a:cs typeface=""/>
+        <a:font script="Jpan" typeface="游ゴシック Light"/>
+        <a:font script="Hang" typeface="맑은 고딕"/>
+        <a:font script="Hans" typeface="等线 Light"/>
+        <a:font script="Hant" typeface="新細明體"/>
+        <a:font script="Arab" typeface="Times New Roman"/>
+        <a:font script="Hebr" typeface="Times New Roman"/>
+        <a:font script="Thai" typeface="Angsana New"/>
+        <a:font script="Ethi" typeface="Nyala"/>
+        <a:font script="Beng" typeface="Vrinda"/>
+        <a:font script="Gujr" typeface="Shruti"/>
+        <a:font script="Khmr" typeface="MoolBoran"/>
+        <a:font script="Knda" typeface="Tunga"/>
+        <a:font script="Guru" typeface="Raavi"/>
+        <a:font script="Cans" typeface="Euphemia"/>
+        <a:font script="Cher" typeface="Plantagenet Cherokee"/>
+        <a:font script="Yiii" typeface="Microsoft Yi Baiti"/>
+        <a:font script="Tibt" typeface="Microsoft Himalaya"/>
+        <a:font script="Thaa" typeface="MV Boli"/>
+        <a:font script="Deva" typeface="Mangal"/>
+        <a:font script="Telu" typeface="Gautami"/>
+        <a:font script="Taml" typeface="Latha"/>
+        <a:font script="Syrc" typeface="Estrangelo Edessa"/>
+        <a:font script="Orya" typeface="Kalinga"/>
+        <a:font script="Mlym" typeface="Kartika"/>
+        <a:font script="Laoo" typeface="DokChampa"/>
+        <a:font script="Sinh" typeface="Iskoola Pota"/>
+        <a:font script="Mong" typeface="Mongolian Baiti"/>
+        <a:font script="Viet" typeface="Times New Roman"/>
+        <a:font script="Uigh" typeface="Microsoft Uighur"/>
+        <a:font script="Geor" typeface="Sylfaen"/>
+        <a:font script="Armn" typeface="Arial"/>
+        <a:font script="Bugi" typeface="Leelawadee UI"/>
+        <a:font script="Bopo" typeface="Microsoft JhengHei"/>
+        <a:font script="Java" typeface="Javanese Text"/>
+        <a:font script="Lisu" typeface="Segoe UI"/>
+        <a:font script="Mymr" typeface="Myanmar Text"/>
+        <a:font script="Nkoo" typeface="Ebrima"/>
+        <a:font script="Olck" typeface="Nirmala UI"/>
+        <a:font script="Osma" typeface="Ebrima"/>
+        <a:font script="Phag" typeface="Phagspa"/>
+        <a:font script="Syrn" typeface="Estrangelo Edessa"/>
+        <a:font script="Syrj" typeface="Estrangelo Edessa"/>
+        <a:font script="Syre" typeface="Estrangelo Edessa"/>
+        <a:font script="Sora" typeface="Nirmala UI"/>
+        <a:font script="Tale" typeface="Microsoft Tai Le"/>
+        <a:font script="Talu" typeface="Microsoft New Tai Lue"/>
+        <a:font script="Tfng" typeface="Ebrima"/>
       </a:majorFont>
       <a:minorFont>
-        <a:latin typeface="Calibri"/>
-        <a:ea typeface="Calibri"/>
-        <a:cs typeface="Calibri"/>
+        <a:latin typeface="Aptos" panose="02110004020202020204"/>
+        <a:ea typeface=""/>
+        <a:cs typeface=""/>
+        <a:font script="Jpan" typeface="游ゴシック"/>
+        <a:font script="Hang" typeface="맑은 고딕"/>
+        <a:font script="Hans" typeface="等线"/>
+        <a:font script="Hant" typeface="新細明體"/>
+        <a:font script="Arab" typeface="Arial"/>
+        <a:font script="Hebr" typeface="Arial"/>
+        <a:font script="Thai" typeface="Cordia New"/>
+        <a:font script="Ethi" typeface="Nyala"/>
+        <a:font script="Beng" typeface="Vrinda"/>
+        <a:font script="Gujr" typeface="Shruti"/>
+        <a:font script="Khmr" typeface="DaunPenh"/>
+        <a:font script="Knda" typeface="Tunga"/>
+        <a:font script="Guru" typeface="Raavi"/>
+        <a:font script="Cans" typeface="Euphemia"/>
+        <a:font script="Cher" typeface="Plantagenet Cherokee"/>
+        <a:font script="Yiii" typeface="Microsoft Yi Baiti"/>
+        <a:font script="Tibt" typeface="Microsoft Himalaya"/>
+        <a:font script="Thaa" typeface="MV Boli"/>
+        <a:font script="Deva" typeface="Mangal"/>
+        <a:font script="Telu" typeface="Gautami"/>
+        <a:font script="Taml" typeface="Latha"/>
+        <a:font script="Syrc" typeface="Estrangelo Edessa"/>
+        <a:font script="Orya" typeface="Kalinga"/>
+        <a:font script="Mlym" typeface="Kartika"/>
+        <a:font script="Laoo" typeface="DokChampa"/>
+        <a:font script="Sinh" typeface="Iskoola Pota"/>
+        <a:font script="Mong" typeface="Mongolian Baiti"/>
+        <a:font script="Viet" typeface="Arial"/>
+        <a:font script="Uigh" typeface="Microsoft Uighur"/>
+        <a:font script="Geor" typeface="Sylfaen"/>
+        <a:font script="Armn" typeface="Arial"/>
+        <a:font script="Bugi" typeface="Leelawadee UI"/>
+        <a:font script="Bopo" typeface="Microsoft JhengHei"/>
+        <a:font script="Java" typeface="Javanese Text"/>
+        <a:font script="Lisu" typeface="Segoe UI"/>
+        <a:font script="Mymr" typeface="Myanmar Text"/>
+        <a:font script="Nkoo" typeface="Ebrima"/>
+        <a:font script="Olck" typeface="Nirmala UI"/>
+        <a:font script="Osma" typeface="Ebrima"/>
+        <a:font script="Phag" typeface="Phagspa"/>
+        <a:font script="Syrn" typeface="Estrangelo Edessa"/>
+        <a:font script="Syrj" typeface="Estrangelo Edessa"/>
+        <a:font script="Syre" typeface="Estrangelo Edessa"/>
+        <a:font script="Sora" typeface="Nirmala UI"/>
+        <a:font script="Tale" typeface="Microsoft Tai Le"/>
+        <a:font script="Talu" typeface="Microsoft New Tai Lue"/>
+        <a:font script="Tfng" typeface="Ebrima"/>
       </a:minorFont>
     </a:fontScheme>
-    <a:fmtScheme name="ChatGPT">
+    <a:fmtScheme name="Office">
       <a:fillStyleLst>
         <a:solidFill>
           <a:schemeClr val="phClr"/>
         </a:solidFill>
-        <a:solidFill>
-          <a:schemeClr val="dk1"/>
-        </a:solidFill>
-        <a:solidFill>
-          <a:schemeClr val="accent1"/>
-        </a:solidFill>
+        <a:gradFill rotWithShape="1">
+          <a:gsLst>
+            <a:gs pos="0">
+              <a:schemeClr val="phClr">
+                <a:lumMod val="110000"/>
+                <a:satMod val="105000"/>
+                <a:tint val="67000"/>
+              </a:schemeClr>
+            </a:gs>
+            <a:gs pos="50000">
+              <a:schemeClr val="phClr">
+                <a:lumMod val="105000"/>
+                <a:satMod val="103000"/>
+                <a:tint val="73000"/>
+              </a:schemeClr>
+            </a:gs>
+            <a:gs pos="100000">
+              <a:schemeClr val="phClr">
+                <a:lumMod val="105000"/>
+                <a:satMod val="109000"/>
+                <a:tint val="81000"/>
+              </a:schemeClr>
+            </a:gs>
+          </a:gsLst>
+          <a:lin ang="5400000" scaled="0"/>
+        </a:gradFill>
+        <a:gradFill rotWithShape="1">
+          <a:gsLst>
+            <a:gs pos="0">
+              <a:schemeClr val="phClr">
+                <a:satMod val="103000"/>
+                <a:lumMod val="102000"/>
+                <a:tint val="94000"/>
+              </a:schemeClr>
+            </a:gs>
+            <a:gs pos="50000">
+              <a:schemeClr val="phClr">
+                <a:satMod val="110000"/>
+                <a:lumMod val="100000"/>
+                <a:shade val="100000"/>
+              </a:schemeClr>
+            </a:gs>
+            <a:gs pos="100000">
+              <a:schemeClr val="phClr">
+                <a:lumMod val="99000"/>
+                <a:satMod val="120000"/>
+                <a:shade val="78000"/>
+              </a:schemeClr>
+            </a:gs>
+          </a:gsLst>
+          <a:lin ang="5400000" scaled="0"/>
+        </a:gradFill>
       </a:fillStyleLst>
       <a:lnStyleLst>
-        <a:ln w="12700">
+        <a:ln w="12700" cap="flat" cmpd="sng" algn="ctr">
           <a:solidFill>
             <a:schemeClr val="phClr"/>
           </a:solidFill>
           <a:prstDash val="solid"/>
+          <a:miter lim="800000"/>
         </a:ln>
-        <a:ln w="19050">
+        <a:ln w="19050" cap="flat" cmpd="sng" algn="ctr">
           <a:solidFill>
             <a:schemeClr val="phClr"/>
           </a:solidFill>
           <a:prstDash val="solid"/>
+          <a:miter lim="800000"/>
         </a:ln>
-        <a:ln w="25400">
+        <a:ln w="25400" cap="flat" cmpd="sng" algn="ctr">
           <a:solidFill>
             <a:schemeClr val="phClr"/>
           </a:solidFill>
           <a:prstDash val="solid"/>
+          <a:miter lim="800000"/>
         </a:ln>
       </a:lnStyleLst>
       <a:effectStyleLst>
@@ -1313,7 +8312,7 @@
         </a:effectStyle>
         <a:effectStyle>
           <a:effectLst>
-            <a:outerShdw blurRad="57150" dist="19050" dir="5400000">
+            <a:outerShdw blurRad="57150" dist="19050" dir="5400000" algn="ctr" rotWithShape="0">
               <a:srgbClr val="000000">
                 <a:alpha val="63000"/>
               </a:srgbClr>
@@ -1331,22 +8330,22 @@
             <a:satMod val="170000"/>
           </a:schemeClr>
         </a:solidFill>
-        <a:gradFill>
+        <a:gradFill rotWithShape="1">
           <a:gsLst>
             <a:gs pos="0">
               <a:schemeClr val="phClr">
                 <a:tint val="93000"/>
+                <a:satMod val="150000"/>
                 <a:shade val="98000"/>
                 <a:lumMod val="102000"/>
-                <a:satMod val="150000"/>
               </a:schemeClr>
             </a:gs>
             <a:gs pos="50000">
               <a:schemeClr val="phClr">
                 <a:tint val="98000"/>
+                <a:satMod val="130000"/>
                 <a:shade val="90000"/>
                 <a:lumMod val="103000"/>
-                <a:satMod val="130000"/>
               </a:schemeClr>
             </a:gs>
             <a:gs pos="100000">
@@ -1361,5 +8360,347 @@
       </a:bgFillStyleLst>
     </a:fmtScheme>
   </a:themeElements>
+  <a:objectDefaults>
+    <a:lnDef>
+      <a:spPr/>
+      <a:bodyPr/>
+      <a:lstStyle/>
+      <a:style>
+        <a:lnRef idx="2">
+          <a:schemeClr val="accent1"/>
+        </a:lnRef>
+        <a:fillRef idx="0">
+          <a:schemeClr val="accent1"/>
+        </a:fillRef>
+        <a:effectRef idx="1">
+          <a:schemeClr val="accent1"/>
+        </a:effectRef>
+        <a:fontRef idx="minor">
+          <a:schemeClr val="tx1"/>
+        </a:fontRef>
+      </a:style>
+    </a:lnDef>
+  </a:objectDefaults>
+  <a:extraClrSchemeLst/>
+  <a:extLst>
+    <a:ext uri="{05A4C25C-085E-4340-85A3-A5531E510DB2}">
+      <thm15:themeFamily xmlns:thm15="http://schemas.microsoft.com/office/thememl/2012/main" name="Office Theme" id="{2E142A2C-CD16-42D6-873A-C26D2A0506FA}" vid="{1BDDFF52-6CD6-40A5-AB3C-68EB2F1E4D0A}"/>
+    </a:ext>
+  </a:extLst>
+</a:theme>
+</file>
+
+<file path=ppt/theme/theme2.xml><?xml version="1.0" encoding="utf-8"?>
+<a:theme xmlns:a="http://schemas.openxmlformats.org/drawingml/2006/main" name="Office">
+  <a:themeElements>
+    <a:clrScheme name="Office">
+      <a:dk1>
+        <a:sysClr val="windowText" lastClr="000000"/>
+      </a:dk1>
+      <a:lt1>
+        <a:sysClr val="window" lastClr="FFFFFF"/>
+      </a:lt1>
+      <a:dk2>
+        <a:srgbClr val="0E2841"/>
+      </a:dk2>
+      <a:lt2>
+        <a:srgbClr val="E8E8E8"/>
+      </a:lt2>
+      <a:accent1>
+        <a:srgbClr val="156082"/>
+      </a:accent1>
+      <a:accent2>
+        <a:srgbClr val="E97132"/>
+      </a:accent2>
+      <a:accent3>
+        <a:srgbClr val="196B24"/>
+      </a:accent3>
+      <a:accent4>
+        <a:srgbClr val="0F9ED5"/>
+      </a:accent4>
+      <a:accent5>
+        <a:srgbClr val="A02B93"/>
+      </a:accent5>
+      <a:accent6>
+        <a:srgbClr val="4EA72E"/>
+      </a:accent6>
+      <a:hlink>
+        <a:srgbClr val="467886"/>
+      </a:hlink>
+      <a:folHlink>
+        <a:srgbClr val="96607D"/>
+      </a:folHlink>
+    </a:clrScheme>
+    <a:fontScheme name="Office">
+      <a:majorFont>
+        <a:latin typeface="Aptos Display" panose="02110004020202020204"/>
+        <a:ea typeface=""/>
+        <a:cs typeface=""/>
+        <a:font script="Jpan" typeface="游ゴシック Light"/>
+        <a:font script="Hang" typeface="맑은 고딕"/>
+        <a:font script="Hans" typeface="等线 Light"/>
+        <a:font script="Hant" typeface="新細明體"/>
+        <a:font script="Arab" typeface="Times New Roman"/>
+        <a:font script="Hebr" typeface="Times New Roman"/>
+        <a:font script="Thai" typeface="Angsana New"/>
+        <a:font script="Ethi" typeface="Nyala"/>
+        <a:font script="Beng" typeface="Vrinda"/>
+        <a:font script="Gujr" typeface="Shruti"/>
+        <a:font script="Khmr" typeface="MoolBoran"/>
+        <a:font script="Knda" typeface="Tunga"/>
+        <a:font script="Guru" typeface="Raavi"/>
+        <a:font script="Cans" typeface="Euphemia"/>
+        <a:font script="Cher" typeface="Plantagenet Cherokee"/>
+        <a:font script="Yiii" typeface="Microsoft Yi Baiti"/>
+        <a:font script="Tibt" typeface="Microsoft Himalaya"/>
+        <a:font script="Thaa" typeface="MV Boli"/>
+        <a:font script="Deva" typeface="Mangal"/>
+        <a:font script="Telu" typeface="Gautami"/>
+        <a:font script="Taml" typeface="Latha"/>
+        <a:font script="Syrc" typeface="Estrangelo Edessa"/>
+        <a:font script="Orya" typeface="Kalinga"/>
+        <a:font script="Mlym" typeface="Kartika"/>
+        <a:font script="Laoo" typeface="DokChampa"/>
+        <a:font script="Sinh" typeface="Iskoola Pota"/>
+        <a:font script="Mong" typeface="Mongolian Baiti"/>
+        <a:font script="Viet" typeface="Times New Roman"/>
+        <a:font script="Uigh" typeface="Microsoft Uighur"/>
+        <a:font script="Geor" typeface="Sylfaen"/>
+        <a:font script="Armn" typeface="Arial"/>
+        <a:font script="Bugi" typeface="Leelawadee UI"/>
+        <a:font script="Bopo" typeface="Microsoft JhengHei"/>
+        <a:font script="Java" typeface="Javanese Text"/>
+        <a:font script="Lisu" typeface="Segoe UI"/>
+        <a:font script="Mymr" typeface="Myanmar Text"/>
+        <a:font script="Nkoo" typeface="Ebrima"/>
+        <a:font script="Olck" typeface="Nirmala UI"/>
+        <a:font script="Osma" typeface="Ebrima"/>
+        <a:font script="Phag" typeface="Phagspa"/>
+        <a:font script="Syrn" typeface="Estrangelo Edessa"/>
+        <a:font script="Syrj" typeface="Estrangelo Edessa"/>
+        <a:font script="Syre" typeface="Estrangelo Edessa"/>
+        <a:font script="Sora" typeface="Nirmala UI"/>
+        <a:font script="Tale" typeface="Microsoft Tai Le"/>
+        <a:font script="Talu" typeface="Microsoft New Tai Lue"/>
+        <a:font script="Tfng" typeface="Ebrima"/>
+      </a:majorFont>
+      <a:minorFont>
+        <a:latin typeface="Aptos" panose="02110004020202020204"/>
+        <a:ea typeface=""/>
+        <a:cs typeface=""/>
+        <a:font script="Jpan" typeface="游ゴシック"/>
+        <a:font script="Hang" typeface="맑은 고딕"/>
+        <a:font script="Hans" typeface="等线"/>
+        <a:font script="Hant" typeface="新細明體"/>
+        <a:font script="Arab" typeface="Arial"/>
+        <a:font script="Hebr" typeface="Arial"/>
+        <a:font script="Thai" typeface="Cordia New"/>
+        <a:font script="Ethi" typeface="Nyala"/>
+        <a:font script="Beng" typeface="Vrinda"/>
+        <a:font script="Gujr" typeface="Shruti"/>
+        <a:font script="Khmr" typeface="DaunPenh"/>
+        <a:font script="Knda" typeface="Tunga"/>
+        <a:font script="Guru" typeface="Raavi"/>
+        <a:font script="Cans" typeface="Euphemia"/>
+        <a:font script="Cher" typeface="Plantagenet Cherokee"/>
+        <a:font script="Yiii" typeface="Microsoft Yi Baiti"/>
+        <a:font script="Tibt" typeface="Microsoft Himalaya"/>
+        <a:font script="Thaa" typeface="MV Boli"/>
+        <a:font script="Deva" typeface="Mangal"/>
+        <a:font script="Telu" typeface="Gautami"/>
+        <a:font script="Taml" typeface="Latha"/>
+        <a:font script="Syrc" typeface="Estrangelo Edessa"/>
+        <a:font script="Orya" typeface="Kalinga"/>
+        <a:font script="Mlym" typeface="Kartika"/>
+        <a:font script="Laoo" typeface="DokChampa"/>
+        <a:font script="Sinh" typeface="Iskoola Pota"/>
+        <a:font script="Mong" typeface="Mongolian Baiti"/>
+        <a:font script="Viet" typeface="Arial"/>
+        <a:font script="Uigh" typeface="Microsoft Uighur"/>
+        <a:font script="Geor" typeface="Sylfaen"/>
+        <a:font script="Armn" typeface="Arial"/>
+        <a:font script="Bugi" typeface="Leelawadee UI"/>
+        <a:font script="Bopo" typeface="Microsoft JhengHei"/>
+        <a:font script="Java" typeface="Javanese Text"/>
+        <a:font script="Lisu" typeface="Segoe UI"/>
+        <a:font script="Mymr" typeface="Myanmar Text"/>
+        <a:font script="Nkoo" typeface="Ebrima"/>
+        <a:font script="Olck" typeface="Nirmala UI"/>
+        <a:font script="Osma" typeface="Ebrima"/>
+        <a:font script="Phag" typeface="Phagspa"/>
+        <a:font script="Syrn" typeface="Estrangelo Edessa"/>
+        <a:font script="Syrj" typeface="Estrangelo Edessa"/>
+        <a:font script="Syre" typeface="Estrangelo Edessa"/>
+        <a:font script="Sora" typeface="Nirmala UI"/>
+        <a:font script="Tale" typeface="Microsoft Tai Le"/>
+        <a:font script="Talu" typeface="Microsoft New Tai Lue"/>
+        <a:font script="Tfng" typeface="Ebrima"/>
+      </a:minorFont>
+    </a:fontScheme>
+    <a:fmtScheme name="Office">
+      <a:fillStyleLst>
+        <a:solidFill>
+          <a:schemeClr val="phClr"/>
+        </a:solidFill>
+        <a:gradFill rotWithShape="1">
+          <a:gsLst>
+            <a:gs pos="0">
+              <a:schemeClr val="phClr">
+                <a:lumMod val="110000"/>
+                <a:satMod val="105000"/>
+                <a:tint val="67000"/>
+              </a:schemeClr>
+            </a:gs>
+            <a:gs pos="50000">
+              <a:schemeClr val="phClr">
+                <a:lumMod val="105000"/>
+                <a:satMod val="103000"/>
+                <a:tint val="73000"/>
+              </a:schemeClr>
+            </a:gs>
+            <a:gs pos="100000">
+              <a:schemeClr val="phClr">
+                <a:lumMod val="105000"/>
+                <a:satMod val="109000"/>
+                <a:tint val="81000"/>
+              </a:schemeClr>
+            </a:gs>
+          </a:gsLst>
+          <a:lin ang="5400000" scaled="0"/>
+        </a:gradFill>
+        <a:gradFill rotWithShape="1">
+          <a:gsLst>
+            <a:gs pos="0">
+              <a:schemeClr val="phClr">
+                <a:satMod val="103000"/>
+                <a:lumMod val="102000"/>
+                <a:tint val="94000"/>
+              </a:schemeClr>
+            </a:gs>
+            <a:gs pos="50000">
+              <a:schemeClr val="phClr">
+                <a:satMod val="110000"/>
+                <a:lumMod val="100000"/>
+                <a:shade val="100000"/>
+              </a:schemeClr>
+            </a:gs>
+            <a:gs pos="100000">
+              <a:schemeClr val="phClr">
+                <a:lumMod val="99000"/>
+                <a:satMod val="120000"/>
+                <a:shade val="78000"/>
+              </a:schemeClr>
+            </a:gs>
+          </a:gsLst>
+          <a:lin ang="5400000" scaled="0"/>
+        </a:gradFill>
+      </a:fillStyleLst>
+      <a:lnStyleLst>
+        <a:ln w="12700" cap="flat" cmpd="sng" algn="ctr">
+          <a:solidFill>
+            <a:schemeClr val="phClr"/>
+          </a:solidFill>
+          <a:prstDash val="solid"/>
+          <a:miter lim="800000"/>
+        </a:ln>
+        <a:ln w="19050" cap="flat" cmpd="sng" algn="ctr">
+          <a:solidFill>
+            <a:schemeClr val="phClr"/>
+          </a:solidFill>
+          <a:prstDash val="solid"/>
+          <a:miter lim="800000"/>
+        </a:ln>
+        <a:ln w="25400" cap="flat" cmpd="sng" algn="ctr">
+          <a:solidFill>
+            <a:schemeClr val="phClr"/>
+          </a:solidFill>
+          <a:prstDash val="solid"/>
+          <a:miter lim="800000"/>
+        </a:ln>
+      </a:lnStyleLst>
+      <a:effectStyleLst>
+        <a:effectStyle>
+          <a:effectLst/>
+        </a:effectStyle>
+        <a:effectStyle>
+          <a:effectLst/>
+        </a:effectStyle>
+        <a:effectStyle>
+          <a:effectLst>
+            <a:outerShdw blurRad="57150" dist="19050" dir="5400000" algn="ctr" rotWithShape="0">
+              <a:srgbClr val="000000">
+                <a:alpha val="63000"/>
+              </a:srgbClr>
+            </a:outerShdw>
+          </a:effectLst>
+        </a:effectStyle>
+      </a:effectStyleLst>
+      <a:bgFillStyleLst>
+        <a:solidFill>
+          <a:schemeClr val="phClr"/>
+        </a:solidFill>
+        <a:solidFill>
+          <a:schemeClr val="phClr">
+            <a:tint val="95000"/>
+            <a:satMod val="170000"/>
+          </a:schemeClr>
+        </a:solidFill>
+        <a:gradFill rotWithShape="1">
+          <a:gsLst>
+            <a:gs pos="0">
+              <a:schemeClr val="phClr">
+                <a:tint val="93000"/>
+                <a:satMod val="150000"/>
+                <a:shade val="98000"/>
+                <a:lumMod val="102000"/>
+              </a:schemeClr>
+            </a:gs>
+            <a:gs pos="50000">
+              <a:schemeClr val="phClr">
+                <a:tint val="98000"/>
+                <a:satMod val="130000"/>
+                <a:shade val="90000"/>
+                <a:lumMod val="103000"/>
+              </a:schemeClr>
+            </a:gs>
+            <a:gs pos="100000">
+              <a:schemeClr val="phClr">
+                <a:shade val="63000"/>
+                <a:satMod val="120000"/>
+              </a:schemeClr>
+            </a:gs>
+          </a:gsLst>
+          <a:lin ang="5400000" scaled="0"/>
+        </a:gradFill>
+      </a:bgFillStyleLst>
+    </a:fmtScheme>
+  </a:themeElements>
+  <a:objectDefaults>
+    <a:lnDef>
+      <a:spPr/>
+      <a:bodyPr/>
+      <a:lstStyle/>
+      <a:style>
+        <a:lnRef idx="2">
+          <a:schemeClr val="accent1"/>
+        </a:lnRef>
+        <a:fillRef idx="0">
+          <a:schemeClr val="accent1"/>
+        </a:fillRef>
+        <a:effectRef idx="1">
+          <a:schemeClr val="accent1"/>
+        </a:effectRef>
+        <a:fontRef idx="minor">
+          <a:schemeClr val="tx1"/>
+        </a:fontRef>
+      </a:style>
+    </a:lnDef>
+  </a:objectDefaults>
+  <a:extraClrSchemeLst/>
+  <a:extLst>
+    <a:ext uri="{05A4C25C-085E-4340-85A3-A5531E510DB2}">
+      <thm15:themeFamily xmlns:thm15="http://schemas.microsoft.com/office/thememl/2012/main" name="Office Theme" id="{2E142A2C-CD16-42D6-873A-C26D2A0506FA}" vid="{1BDDFF52-6CD6-40A5-AB3C-68EB2F1E4D0A}"/>
+    </a:ext>
+  </a:extLst>
 </a:theme>
 </file>
--- a/submission/presentation_group18.pptx
+++ b/submission/presentation_group18.pptx
@@ -4358,7 +4358,7 @@
               </a:defRPr>
             </a:pPr>
             <a:r>
-              <a:rPr sz="1200" b="0">
+              <a:rPr sz="1200" b="0" dirty="0">
                 <a:solidFill>
                   <a:srgbClr val="5E5E5D"/>
                 </a:solidFill>
@@ -4384,7 +4384,7 @@
         </p:nvSpPr>
         <p:spPr>
           <a:xfrm>
-            <a:off x="838200" y="2857500"/>
+            <a:off x="838200" y="2570779"/>
             <a:ext cx="2095500" cy="228600"/>
           </a:xfrm>
           <a:prstGeom prst="rect">
@@ -4416,7 +4416,7 @@
               </a:defRPr>
             </a:pPr>
             <a:r>
-              <a:rPr sz="1350" b="1">
+              <a:rPr sz="1350" b="1" dirty="0">
                 <a:solidFill>
                   <a:srgbClr val="1F252B"/>
                 </a:solidFill>
@@ -4442,7 +4442,7 @@
         </p:nvSpPr>
         <p:spPr>
           <a:xfrm>
-            <a:off x="838200" y="3162300"/>
+            <a:off x="838200" y="2875579"/>
             <a:ext cx="4191000" cy="685800"/>
           </a:xfrm>
           <a:prstGeom prst="roundRect">
@@ -4484,7 +4484,7 @@
         </p:nvSpPr>
         <p:spPr>
           <a:xfrm>
-            <a:off x="838200" y="3162300"/>
+            <a:off x="838200" y="2875579"/>
             <a:ext cx="66675" cy="685800"/>
           </a:xfrm>
           <a:prstGeom prst="rect">
@@ -4526,7 +4526,7 @@
         </p:nvSpPr>
         <p:spPr>
           <a:xfrm>
-            <a:off x="1009650" y="3324225"/>
+            <a:off x="1009650" y="3037504"/>
             <a:ext cx="304800" cy="285750"/>
           </a:xfrm>
           <a:prstGeom prst="rect">
@@ -4584,7 +4584,7 @@
         </p:nvSpPr>
         <p:spPr>
           <a:xfrm>
-            <a:off x="1428750" y="3295650"/>
+            <a:off x="1428750" y="3008929"/>
             <a:ext cx="3390900" cy="228600"/>
           </a:xfrm>
           <a:prstGeom prst="rect">
@@ -4644,7 +4644,7 @@
         </p:nvSpPr>
         <p:spPr>
           <a:xfrm>
-            <a:off x="1428750" y="3543300"/>
+            <a:off x="1428750" y="3256579"/>
             <a:ext cx="3390900" cy="247650"/>
           </a:xfrm>
           <a:prstGeom prst="rect">
@@ -4678,12 +4678,44 @@
               </a:defRPr>
             </a:pPr>
             <a:r>
-              <a:rPr sz="825" b="0">
+              <a:rPr sz="825" b="0" dirty="0">
                 <a:solidFill>
                   <a:srgbClr val="5E5E5D"/>
                 </a:solidFill>
               </a:rPr>
-              <a:t>Ridge, RandomForest, XGBoost and MLP cover the required linear, tree-based and neural-network approaches.</a:t>
+              <a:t>Ridge, </a:t>
+            </a:r>
+            <a:r>
+              <a:rPr sz="825" b="0" dirty="0" err="1">
+                <a:solidFill>
+                  <a:srgbClr val="5E5E5D"/>
+                </a:solidFill>
+              </a:rPr>
+              <a:t>RandomForest</a:t>
+            </a:r>
+            <a:r>
+              <a:rPr sz="825" b="0" dirty="0">
+                <a:solidFill>
+                  <a:srgbClr val="5E5E5D"/>
+                </a:solidFill>
+              </a:rPr>
+              <a:t>, </a:t>
+            </a:r>
+            <a:r>
+              <a:rPr sz="825" b="0" dirty="0" err="1">
+                <a:solidFill>
+                  <a:srgbClr val="5E5E5D"/>
+                </a:solidFill>
+              </a:rPr>
+              <a:t>XGBoost</a:t>
+            </a:r>
+            <a:r>
+              <a:rPr sz="825" b="0" dirty="0">
+                <a:solidFill>
+                  <a:srgbClr val="5E5E5D"/>
+                </a:solidFill>
+              </a:rPr>
+              <a:t> and MLP cover the required linear, tree-based and neural-network approaches.</a:t>
             </a:r>
           </a:p>
         </p:txBody>
@@ -4704,7 +4736,7 @@
         </p:nvSpPr>
         <p:spPr>
           <a:xfrm>
-            <a:off x="2895600" y="3905250"/>
+            <a:off x="2895600" y="3618529"/>
             <a:ext cx="323850" cy="228600"/>
           </a:xfrm>
           <a:prstGeom prst="downArrow">
@@ -4744,7 +4776,7 @@
         </p:nvSpPr>
         <p:spPr>
           <a:xfrm>
-            <a:off x="1200150" y="4171950"/>
+            <a:off x="1200150" y="3885229"/>
             <a:ext cx="3467100" cy="647700"/>
           </a:xfrm>
           <a:prstGeom prst="roundRect">
@@ -4786,7 +4818,7 @@
         </p:nvSpPr>
         <p:spPr>
           <a:xfrm>
-            <a:off x="1200150" y="4171950"/>
+            <a:off x="1200150" y="3885229"/>
             <a:ext cx="66675" cy="647700"/>
           </a:xfrm>
           <a:prstGeom prst="rect">
@@ -4828,7 +4860,7 @@
         </p:nvSpPr>
         <p:spPr>
           <a:xfrm>
-            <a:off x="1371600" y="4333875"/>
+            <a:off x="1371600" y="4047154"/>
             <a:ext cx="304800" cy="285750"/>
           </a:xfrm>
           <a:prstGeom prst="rect">
@@ -4886,7 +4918,7 @@
         </p:nvSpPr>
         <p:spPr>
           <a:xfrm>
-            <a:off x="1790700" y="4305300"/>
+            <a:off x="1790700" y="4018579"/>
             <a:ext cx="2667000" cy="228600"/>
           </a:xfrm>
           <a:prstGeom prst="rect">
@@ -4946,7 +4978,7 @@
         </p:nvSpPr>
         <p:spPr>
           <a:xfrm>
-            <a:off x="1790700" y="4552950"/>
+            <a:off x="1790700" y="4266229"/>
             <a:ext cx="2667000" cy="209550"/>
           </a:xfrm>
           <a:prstGeom prst="rect">
@@ -4980,12 +5012,20 @@
               </a:defRPr>
             </a:pPr>
             <a:r>
-              <a:rPr sz="825" b="0">
+              <a:rPr sz="825" b="0" dirty="0" err="1">
                 <a:solidFill>
                   <a:srgbClr val="5E5E5D"/>
                 </a:solidFill>
               </a:rPr>
-              <a:t>XGBoost is strongest across the rolling validation windows.</a:t>
+              <a:t>XGBoost</a:t>
+            </a:r>
+            <a:r>
+              <a:rPr sz="825" b="0" dirty="0">
+                <a:solidFill>
+                  <a:srgbClr val="5E5E5D"/>
+                </a:solidFill>
+              </a:rPr>
+              <a:t> is strongest across the rolling validation windows.</a:t>
             </a:r>
           </a:p>
         </p:txBody>
@@ -5006,7 +5046,7 @@
         </p:nvSpPr>
         <p:spPr>
           <a:xfrm>
-            <a:off x="2895600" y="4876800"/>
+            <a:off x="2895600" y="4590079"/>
             <a:ext cx="323850" cy="228600"/>
           </a:xfrm>
           <a:prstGeom prst="downArrow">
@@ -5046,7 +5086,7 @@
         </p:nvSpPr>
         <p:spPr>
           <a:xfrm>
-            <a:off x="1562100" y="5067300"/>
+            <a:off x="1562100" y="4873567"/>
             <a:ext cx="2743200" cy="647700"/>
           </a:xfrm>
           <a:prstGeom prst="roundRect">
@@ -5088,7 +5128,7 @@
         </p:nvSpPr>
         <p:spPr>
           <a:xfrm>
-            <a:off x="1562100" y="5067300"/>
+            <a:off x="1562100" y="4873567"/>
             <a:ext cx="66675" cy="647700"/>
           </a:xfrm>
           <a:prstGeom prst="rect">
@@ -5130,7 +5170,7 @@
         </p:nvSpPr>
         <p:spPr>
           <a:xfrm>
-            <a:off x="1733550" y="5229225"/>
+            <a:off x="1733550" y="5035492"/>
             <a:ext cx="304800" cy="285750"/>
           </a:xfrm>
           <a:prstGeom prst="rect">
@@ -5188,7 +5228,7 @@
         </p:nvSpPr>
         <p:spPr>
           <a:xfrm>
-            <a:off x="2152650" y="5200650"/>
+            <a:off x="2152650" y="5006917"/>
             <a:ext cx="1943100" cy="228600"/>
           </a:xfrm>
           <a:prstGeom prst="rect">
@@ -5248,7 +5288,7 @@
         </p:nvSpPr>
         <p:spPr>
           <a:xfrm>
-            <a:off x="2152650" y="5448300"/>
+            <a:off x="2152650" y="5254567"/>
             <a:ext cx="1943100" cy="209550"/>
           </a:xfrm>
           <a:prstGeom prst="rect">
@@ -5270,7 +5310,7 @@
         </p:spPr>
         <p:txBody>
           <a:bodyPr lIns="0" tIns="0" rIns="0" bIns="0" anchor="t">
-            <a:normAutofit fontScale="83823"/>
+            <a:normAutofit fontScale="91323" lnSpcReduction="20000"/>
           </a:bodyPr>
           <a:lstStyle/>
           <a:p>
@@ -5282,12 +5322,44 @@
               </a:defRPr>
             </a:pPr>
             <a:r>
-              <a:rPr sz="825" b="0">
+              <a:rPr sz="825" b="0" dirty="0">
                 <a:solidFill>
                   <a:srgbClr val="5E5E5D"/>
                 </a:solidFill>
               </a:rPr>
-              <a:t>Test XGBoost variants, including adjusted tree settings and log1p(BikeCount).</a:t>
+              <a:t>Test </a:t>
+            </a:r>
+            <a:r>
+              <a:rPr sz="825" b="0" dirty="0" err="1">
+                <a:solidFill>
+                  <a:srgbClr val="5E5E5D"/>
+                </a:solidFill>
+              </a:rPr>
+              <a:t>XGBoost</a:t>
+            </a:r>
+            <a:r>
+              <a:rPr sz="825" b="0" dirty="0">
+                <a:solidFill>
+                  <a:srgbClr val="5E5E5D"/>
+                </a:solidFill>
+              </a:rPr>
+              <a:t> variants, including adjusted tree settings and log1p(</a:t>
+            </a:r>
+            <a:r>
+              <a:rPr sz="825" b="0" dirty="0" err="1">
+                <a:solidFill>
+                  <a:srgbClr val="5E5E5D"/>
+                </a:solidFill>
+              </a:rPr>
+              <a:t>BikeCount</a:t>
+            </a:r>
+            <a:r>
+              <a:rPr sz="825" b="0" dirty="0">
+                <a:solidFill>
+                  <a:srgbClr val="5E5E5D"/>
+                </a:solidFill>
+              </a:rPr>
+              <a:t>).</a:t>
             </a:r>
           </a:p>
         </p:txBody>
@@ -6148,7 +6220,7 @@
         </p:nvSpPr>
         <p:spPr>
           <a:xfrm>
-            <a:off x="5829300" y="3724275"/>
+            <a:off x="5829300" y="3755271"/>
             <a:ext cx="2476500" cy="171450"/>
           </a:xfrm>
           <a:prstGeom prst="rect">
@@ -6180,7 +6252,7 @@
               </a:defRPr>
             </a:pPr>
             <a:r>
-              <a:rPr sz="750" b="1">
+              <a:rPr sz="750" b="1" dirty="0">
                 <a:solidFill>
                   <a:srgbClr val="5E5E5D"/>
                 </a:solidFill>
@@ -7164,7 +7236,7 @@
         </p:nvSpPr>
         <p:spPr>
           <a:xfrm>
-            <a:off x="5829300" y="4848225"/>
+            <a:off x="5829300" y="4894719"/>
             <a:ext cx="2476500" cy="171450"/>
           </a:xfrm>
           <a:prstGeom prst="rect">
@@ -7196,7 +7268,7 @@
               </a:defRPr>
             </a:pPr>
             <a:r>
-              <a:rPr sz="750" b="1">
+              <a:rPr sz="750" b="1" dirty="0">
                 <a:solidFill>
                   <a:srgbClr val="5E5E5D"/>
                 </a:solidFill>
@@ -8052,12 +8124,28 @@
               </a:defRPr>
             </a:pPr>
             <a:r>
-              <a:rPr sz="975" b="1">
+              <a:rPr sz="975" b="1" dirty="0">
                 <a:solidFill>
                   <a:srgbClr val="1F252B"/>
                 </a:solidFill>
               </a:rPr>
-              <a:t>Boosted trees fit this tabular time-series task best; XGBoost tuned achieves the lowest rolling validation error on both horizons.</a:t>
+              <a:t>Boosted trees fit this tabular time-series task best; </a:t>
+            </a:r>
+            <a:r>
+              <a:rPr sz="975" b="1" dirty="0" err="1">
+                <a:solidFill>
+                  <a:srgbClr val="1F252B"/>
+                </a:solidFill>
+              </a:rPr>
+              <a:t>XGBoost</a:t>
+            </a:r>
+            <a:r>
+              <a:rPr sz="975" b="1" dirty="0">
+                <a:solidFill>
+                  <a:srgbClr val="1F252B"/>
+                </a:solidFill>
+              </a:rPr>
+              <a:t> tuned achieves the lowest rolling validation error on both horizons.</a:t>
             </a:r>
           </a:p>
         </p:txBody>
